--- a/media/exports/reports/2026-02/program-cost.pptx
+++ b/media/exports/reports/2026-02/program-cost.pptx
@@ -286,7 +286,9 @@
     <a:lstStyle/>
     <a:p>
       <a:pPr>
-        <a:defRPr sz="1800"/>
+        <a:defRPr sz="1800">
+          <a:latin typeface="Roboto"/>
+        </a:defRPr>
       </a:pPr>
       <a:endParaRPr lang="en-US"/>
     </a:p>
@@ -468,7 +470,9 @@
     <a:lstStyle/>
     <a:p>
       <a:pPr>
-        <a:defRPr sz="1800"/>
+        <a:defRPr sz="1800">
+          <a:latin typeface="Roboto"/>
+        </a:defRPr>
       </a:pPr>
       <a:endParaRPr lang="en-US"/>
     </a:p>
@@ -722,7 +726,9 @@
     <a:lstStyle/>
     <a:p>
       <a:pPr>
-        <a:defRPr sz="1800"/>
+        <a:defRPr sz="1800">
+          <a:latin typeface="Roboto"/>
+        </a:defRPr>
       </a:pPr>
       <a:endParaRPr/>
     </a:p>
@@ -3753,11 +3759,17 @@
           <a:bodyPr rtlCol="0" anchor="ctr"/>
           <a:lstStyle/>
           <a:p>
+            <a:pPr>
+              <a:defRPr>
+                <a:latin typeface="Roboto"/>
+              </a:defRPr>
+            </a:pPr>
             <a:r>
               <a:rPr sz="1600" b="1">
                 <a:solidFill>
                   <a:srgbClr val="FFFFFF"/>
                 </a:solidFill>
+                <a:latin typeface="Roboto"/>
               </a:rPr>
               <a:t>4th</a:t>
             </a:r>
@@ -3786,14 +3798,19 @@
           </a:bodyPr>
           <a:lstStyle/>
           <a:p>
+            <a:pPr>
+              <a:defRPr>
+                <a:latin typeface="Roboto"/>
+              </a:defRPr>
+            </a:pPr>
             <a:r>
               <a:rPr sz="1800" b="1">
                 <a:solidFill>
                   <a:srgbClr val="25342A"/>
                 </a:solidFill>
-                <a:latin typeface="Arial"/>
+                <a:latin typeface="Roboto"/>
               </a:rPr>
-              <a:t>The 4th Sheet</a:t>
+              <a:t>The Fourth Sheet</a:t>
             </a:r>
           </a:p>
         </p:txBody>
@@ -3820,12 +3837,17 @@
           </a:bodyPr>
           <a:lstStyle/>
           <a:p>
+            <a:pPr>
+              <a:defRPr>
+                <a:latin typeface="Roboto"/>
+              </a:defRPr>
+            </a:pPr>
             <a:r>
               <a:rPr sz="1100" b="1">
                 <a:solidFill>
                   <a:srgbClr val="8A7A52"/>
                 </a:solidFill>
-                <a:latin typeface="Arial"/>
+                <a:latin typeface="Roboto"/>
               </a:rPr>
               <a:t>SAMPLE DATA · invented figures for demonstration</a:t>
             </a:r>
@@ -3854,12 +3876,17 @@
           </a:bodyPr>
           <a:lstStyle/>
           <a:p>
+            <a:pPr>
+              <a:defRPr>
+                <a:latin typeface="Roboto"/>
+              </a:defRPr>
+            </a:pPr>
             <a:r>
               <a:rPr sz="3400" b="1">
                 <a:solidFill>
                   <a:srgbClr val="25342A"/>
                 </a:solidFill>
-                <a:latin typeface="Arial"/>
+                <a:latin typeface="Roboto"/>
               </a:rPr>
               <a:t>What does each program really cost?</a:t>
             </a:r>
@@ -3888,12 +3915,17 @@
           </a:bodyPr>
           <a:lstStyle/>
           <a:p>
+            <a:pPr>
+              <a:defRPr>
+                <a:latin typeface="Roboto"/>
+              </a:defRPr>
+            </a:pPr>
             <a:r>
               <a:rPr sz="1600" b="0">
                 <a:solidFill>
                   <a:srgbClr val="5F6F63"/>
                 </a:solidFill>
-                <a:latin typeface="Arial"/>
+                <a:latin typeface="Roboto"/>
               </a:rPr>
               <a:t>Sample Community Services Ltd</a:t>
             </a:r>
@@ -3922,12 +3954,17 @@
           </a:bodyPr>
           <a:lstStyle/>
           <a:p>
+            <a:pPr>
+              <a:defRPr>
+                <a:latin typeface="Roboto"/>
+              </a:defRPr>
+            </a:pPr>
             <a:r>
               <a:rPr sz="1400" b="0">
                 <a:solidFill>
                   <a:srgbClr val="25342A"/>
                 </a:solidFill>
-                <a:latin typeface="Arial"/>
+                <a:latin typeface="Roboto"/>
               </a:rPr>
               <a:t>Period: February 2026. Each program's full cost: what its grant pays for, plus its fair share of the costs no single grant covers (untied program costs and administration, shared by grant spending). Pick a program and every chart and note follows it.</a:t>
             </a:r>
@@ -3956,45 +3993,65 @@
           </a:bodyPr>
           <a:lstStyle/>
           <a:p>
+            <a:pPr>
+              <a:defRPr>
+                <a:latin typeface="Roboto"/>
+              </a:defRPr>
+            </a:pPr>
             <a:r>
               <a:rPr sz="1100" b="0">
                 <a:solidFill>
                   <a:srgbClr val="5F6F63"/>
                 </a:solidFill>
-                <a:latin typeface="Arial"/>
+                <a:latin typeface="Roboto"/>
               </a:rPr>
               <a:t>How final is this data?</a:t>
             </a:r>
           </a:p>
           <a:p>
+            <a:pPr>
+              <a:defRPr>
+                <a:latin typeface="Roboto"/>
+              </a:defRPr>
+            </a:pPr>
             <a:r>
               <a:rPr sz="1100" b="0">
                 <a:solidFill>
                   <a:srgbClr val="5F6F63"/>
                 </a:solidFill>
-                <a:latin typeface="Arial"/>
+                <a:latin typeface="Roboto"/>
               </a:rPr>
               <a:t>January 2026: Locked. January 2026 is locked (closed 3 Feb 2026). These numbers won't change.</a:t>
             </a:r>
           </a:p>
           <a:p>
+            <a:pPr>
+              <a:defRPr>
+                <a:latin typeface="Roboto"/>
+              </a:defRPr>
+            </a:pPr>
             <a:r>
               <a:rPr sz="1100" b="0">
                 <a:solidFill>
                   <a:srgbClr val="5F6F63"/>
                 </a:solidFill>
-                <a:latin typeface="Arial"/>
+                <a:latin typeface="Roboto"/>
               </a:rPr>
               <a:t>February 2026: Locked. February 2026 is locked (closed 3 Mar 2026). These numbers won't change.</a:t>
             </a:r>
           </a:p>
           <a:p>
+            <a:pPr>
+              <a:defRPr>
+                <a:latin typeface="Roboto"/>
+              </a:defRPr>
+            </a:pPr>
             <a:r>
               <a:rPr sz="1100" b="0">
                 <a:solidFill>
                   <a:srgbClr val="5F6F63"/>
                 </a:solidFill>
-                <a:latin typeface="Arial"/>
+                <a:latin typeface="Roboto"/>
               </a:rPr>
               <a:t>October 2026: Incomplete. October 2026 is still in progress: figures to 6 Oct only.</a:t>
             </a:r>
@@ -4023,12 +4080,17 @@
           </a:bodyPr>
           <a:lstStyle/>
           <a:p>
+            <a:pPr>
+              <a:defRPr>
+                <a:latin typeface="Roboto"/>
+              </a:defRPr>
+            </a:pPr>
             <a:r>
               <a:rPr sz="900" b="0">
                 <a:solidFill>
                   <a:srgbClr val="5F6F63"/>
                 </a:solidFill>
-                <a:latin typeface="Arial"/>
+                <a:latin typeface="Roboto"/>
               </a:rPr>
               <a:t>program-cost.pptx</a:t>
             </a:r>
@@ -4057,13 +4119,17 @@
           </a:bodyPr>
           <a:lstStyle/>
           <a:p>
-            <a:pPr algn="ctr"/>
+            <a:pPr algn="ctr">
+              <a:defRPr>
+                <a:latin typeface="Roboto"/>
+              </a:defRPr>
+            </a:pPr>
             <a:r>
               <a:rPr sz="900" b="0">
                 <a:solidFill>
                   <a:srgbClr val="5F6F63"/>
                 </a:solidFill>
-                <a:latin typeface="Arial"/>
+                <a:latin typeface="Roboto"/>
               </a:rPr>
               <a:t>Data retrieved 2pm, Tue 6 Oct 2026 · Sample data</a:t>
             </a:r>
@@ -4092,13 +4158,17 @@
           </a:bodyPr>
           <a:lstStyle/>
           <a:p>
-            <a:pPr algn="r"/>
+            <a:pPr algn="r">
+              <a:defRPr>
+                <a:latin typeface="Roboto"/>
+              </a:defRPr>
+            </a:pPr>
             <a:r>
               <a:rPr sz="900" b="0">
                 <a:solidFill>
                   <a:srgbClr val="5F6F63"/>
                 </a:solidFill>
-                <a:latin typeface="Arial"/>
+                <a:latin typeface="Roboto"/>
               </a:rPr>
               <a:t>Slide 1 of 9</a:t>
             </a:r>
@@ -4162,7 +4232,11 @@
           <a:bodyPr rtlCol="0" anchor="ctr"/>
           <a:lstStyle/>
           <a:p>
-            <a:pPr algn="ctr"/>
+            <a:pPr algn="ctr">
+              <a:defRPr>
+                <a:latin typeface="Roboto"/>
+              </a:defRPr>
+            </a:pPr>
           </a:p>
         </p:txBody>
       </p:sp>
@@ -4188,12 +4262,17 @@
           </a:bodyPr>
           <a:lstStyle/>
           <a:p>
+            <a:pPr>
+              <a:defRPr>
+                <a:latin typeface="Roboto"/>
+              </a:defRPr>
+            </a:pPr>
             <a:r>
               <a:rPr sz="1000" b="0">
                 <a:solidFill>
                   <a:srgbClr val="5F6F63"/>
                 </a:solidFill>
-                <a:latin typeface="Arial"/>
+                <a:latin typeface="Roboto"/>
               </a:rPr>
               <a:t>Sample Community Services Ltd · What does each program really cost?</a:t>
             </a:r>
@@ -4222,12 +4301,17 @@
           </a:bodyPr>
           <a:lstStyle/>
           <a:p>
+            <a:pPr>
+              <a:defRPr>
+                <a:latin typeface="Roboto"/>
+              </a:defRPr>
+            </a:pPr>
             <a:r>
               <a:rPr sz="2400" b="1">
                 <a:solidFill>
                   <a:srgbClr val="25342A"/>
                 </a:solidFill>
-                <a:latin typeface="Arial"/>
+                <a:latin typeface="Roboto"/>
               </a:rPr>
               <a:t>Full cost of each program, February 2026 · $ · Program: All programs</a:t>
             </a:r>
@@ -4274,12 +4358,17 @@
           </a:bodyPr>
           <a:lstStyle/>
           <a:p>
+            <a:pPr>
+              <a:defRPr>
+                <a:latin typeface="Roboto"/>
+              </a:defRPr>
+            </a:pPr>
             <a:r>
               <a:rPr sz="900" b="0">
                 <a:solidFill>
                   <a:srgbClr val="5F6F63"/>
                 </a:solidFill>
-                <a:latin typeface="Arial"/>
+                <a:latin typeface="Roboto"/>
               </a:rPr>
               <a:t>program-cost.pptx</a:t>
             </a:r>
@@ -4308,13 +4397,17 @@
           </a:bodyPr>
           <a:lstStyle/>
           <a:p>
-            <a:pPr algn="ctr"/>
+            <a:pPr algn="ctr">
+              <a:defRPr>
+                <a:latin typeface="Roboto"/>
+              </a:defRPr>
+            </a:pPr>
             <a:r>
               <a:rPr sz="900" b="0">
                 <a:solidFill>
                   <a:srgbClr val="5F6F63"/>
                 </a:solidFill>
-                <a:latin typeface="Arial"/>
+                <a:latin typeface="Roboto"/>
               </a:rPr>
               <a:t>Data retrieved 2pm, Tue 6 Oct 2026 · Sample data</a:t>
             </a:r>
@@ -4343,13 +4436,17 @@
           </a:bodyPr>
           <a:lstStyle/>
           <a:p>
-            <a:pPr algn="r"/>
+            <a:pPr algn="r">
+              <a:defRPr>
+                <a:latin typeface="Roboto"/>
+              </a:defRPr>
+            </a:pPr>
             <a:r>
               <a:rPr sz="900" b="0">
                 <a:solidFill>
                   <a:srgbClr val="5F6F63"/>
                 </a:solidFill>
-                <a:latin typeface="Arial"/>
+                <a:latin typeface="Roboto"/>
               </a:rPr>
               <a:t>Slide 2 of 9</a:t>
             </a:r>
@@ -4413,7 +4510,11 @@
           <a:bodyPr rtlCol="0" anchor="ctr"/>
           <a:lstStyle/>
           <a:p>
-            <a:pPr algn="ctr"/>
+            <a:pPr algn="ctr">
+              <a:defRPr>
+                <a:latin typeface="Roboto"/>
+              </a:defRPr>
+            </a:pPr>
           </a:p>
         </p:txBody>
       </p:sp>
@@ -4439,12 +4540,17 @@
           </a:bodyPr>
           <a:lstStyle/>
           <a:p>
+            <a:pPr>
+              <a:defRPr>
+                <a:latin typeface="Roboto"/>
+              </a:defRPr>
+            </a:pPr>
             <a:r>
               <a:rPr sz="1000" b="0">
                 <a:solidFill>
                   <a:srgbClr val="5F6F63"/>
                 </a:solidFill>
-                <a:latin typeface="Arial"/>
+                <a:latin typeface="Roboto"/>
               </a:rPr>
               <a:t>Sample Community Services Ltd · What does each program really cost?</a:t>
             </a:r>
@@ -4473,12 +4579,17 @@
           </a:bodyPr>
           <a:lstStyle/>
           <a:p>
+            <a:pPr>
+              <a:defRPr>
+                <a:latin typeface="Roboto"/>
+              </a:defRPr>
+            </a:pPr>
             <a:r>
               <a:rPr sz="2400" b="1">
                 <a:solidFill>
                   <a:srgbClr val="25342A"/>
                 </a:solidFill>
-                <a:latin typeface="Arial"/>
+                <a:latin typeface="Roboto"/>
               </a:rPr>
               <a:t>Full cost of each program, February 2026 · % of total · Program: All programs</a:t>
             </a:r>
@@ -4525,12 +4636,17 @@
           </a:bodyPr>
           <a:lstStyle/>
           <a:p>
+            <a:pPr>
+              <a:defRPr>
+                <a:latin typeface="Roboto"/>
+              </a:defRPr>
+            </a:pPr>
             <a:r>
               <a:rPr sz="900" b="0">
                 <a:solidFill>
                   <a:srgbClr val="5F6F63"/>
                 </a:solidFill>
-                <a:latin typeface="Arial"/>
+                <a:latin typeface="Roboto"/>
               </a:rPr>
               <a:t>program-cost.pptx</a:t>
             </a:r>
@@ -4559,13 +4675,17 @@
           </a:bodyPr>
           <a:lstStyle/>
           <a:p>
-            <a:pPr algn="ctr"/>
+            <a:pPr algn="ctr">
+              <a:defRPr>
+                <a:latin typeface="Roboto"/>
+              </a:defRPr>
+            </a:pPr>
             <a:r>
               <a:rPr sz="900" b="0">
                 <a:solidFill>
                   <a:srgbClr val="5F6F63"/>
                 </a:solidFill>
-                <a:latin typeface="Arial"/>
+                <a:latin typeface="Roboto"/>
               </a:rPr>
               <a:t>Data retrieved 2pm, Tue 6 Oct 2026 · Sample data</a:t>
             </a:r>
@@ -4594,13 +4714,17 @@
           </a:bodyPr>
           <a:lstStyle/>
           <a:p>
-            <a:pPr algn="r"/>
+            <a:pPr algn="r">
+              <a:defRPr>
+                <a:latin typeface="Roboto"/>
+              </a:defRPr>
+            </a:pPr>
             <a:r>
               <a:rPr sz="900" b="0">
                 <a:solidFill>
                   <a:srgbClr val="5F6F63"/>
                 </a:solidFill>
-                <a:latin typeface="Arial"/>
+                <a:latin typeface="Roboto"/>
               </a:rPr>
               <a:t>Slide 3 of 9</a:t>
             </a:r>
@@ -4664,7 +4788,11 @@
           <a:bodyPr rtlCol="0" anchor="ctr"/>
           <a:lstStyle/>
           <a:p>
-            <a:pPr algn="ctr"/>
+            <a:pPr algn="ctr">
+              <a:defRPr>
+                <a:latin typeface="Roboto"/>
+              </a:defRPr>
+            </a:pPr>
           </a:p>
         </p:txBody>
       </p:sp>
@@ -4690,12 +4818,17 @@
           </a:bodyPr>
           <a:lstStyle/>
           <a:p>
+            <a:pPr>
+              <a:defRPr>
+                <a:latin typeface="Roboto"/>
+              </a:defRPr>
+            </a:pPr>
             <a:r>
               <a:rPr sz="1000" b="0">
                 <a:solidFill>
                   <a:srgbClr val="5F6F63"/>
                 </a:solidFill>
-                <a:latin typeface="Arial"/>
+                <a:latin typeface="Roboto"/>
               </a:rPr>
               <a:t>Sample Community Services Ltd · What does each program really cost?</a:t>
             </a:r>
@@ -4724,12 +4857,17 @@
           </a:bodyPr>
           <a:lstStyle/>
           <a:p>
+            <a:pPr>
+              <a:defRPr>
+                <a:latin typeface="Roboto"/>
+              </a:defRPr>
+            </a:pPr>
             <a:r>
               <a:rPr sz="2400" b="1">
                 <a:solidFill>
                   <a:srgbClr val="25342A"/>
                 </a:solidFill>
-                <a:latin typeface="Arial"/>
+                <a:latin typeface="Roboto"/>
               </a:rPr>
               <a:t>What it shows · Program: All programs</a:t>
             </a:r>
@@ -4777,7 +4915,11 @@
           <a:bodyPr rtlCol="0" anchor="ctr"/>
           <a:lstStyle/>
           <a:p>
-            <a:pPr algn="ctr"/>
+            <a:pPr algn="ctr">
+              <a:defRPr>
+                <a:latin typeface="Roboto"/>
+              </a:defRPr>
+            </a:pPr>
           </a:p>
         </p:txBody>
       </p:sp>
@@ -4803,12 +4945,17 @@
           </a:bodyPr>
           <a:lstStyle/>
           <a:p>
+            <a:pPr>
+              <a:defRPr>
+                <a:latin typeface="Roboto"/>
+              </a:defRPr>
+            </a:pPr>
             <a:r>
               <a:rPr sz="1100" b="1">
                 <a:solidFill>
                   <a:srgbClr val="5F6F63"/>
                 </a:solidFill>
-                <a:latin typeface="Arial"/>
+                <a:latin typeface="Roboto"/>
               </a:rPr>
               <a:t>WHAT IT SHOWS</a:t>
             </a:r>
@@ -4837,12 +4984,17 @@
           </a:bodyPr>
           <a:lstStyle/>
           <a:p>
+            <a:pPr>
+              <a:defRPr>
+                <a:latin typeface="Roboto"/>
+              </a:defRPr>
+            </a:pPr>
             <a:r>
               <a:rPr sz="1600" b="0">
                 <a:solidFill>
                   <a:srgbClr val="25342A"/>
                 </a:solidFill>
-                <a:latin typeface="Arial"/>
+                <a:latin typeface="Roboto"/>
               </a:rPr>
               <a:t>Housing support is the biggest program: $51,514 in February once its share of untied program costs and administration is added to $26,508 of grant spending. Shared costs add 94.3% on top of grant spending across all programs.</a:t>
             </a:r>
@@ -4890,7 +5042,11 @@
           <a:bodyPr rtlCol="0" anchor="ctr"/>
           <a:lstStyle/>
           <a:p>
-            <a:pPr algn="ctr"/>
+            <a:pPr algn="ctr">
+              <a:defRPr>
+                <a:latin typeface="Roboto"/>
+              </a:defRPr>
+            </a:pPr>
           </a:p>
         </p:txBody>
       </p:sp>
@@ -4916,12 +5072,17 @@
           </a:bodyPr>
           <a:lstStyle/>
           <a:p>
+            <a:pPr>
+              <a:defRPr>
+                <a:latin typeface="Roboto"/>
+              </a:defRPr>
+            </a:pPr>
             <a:r>
               <a:rPr sz="1100" b="1">
                 <a:solidFill>
                   <a:srgbClr val="5F6F63"/>
                 </a:solidFill>
-                <a:latin typeface="Arial"/>
+                <a:latin typeface="Roboto"/>
               </a:rPr>
               <a:t>WHAT YOU'D DO ABOUT IT</a:t>
             </a:r>
@@ -4950,12 +5111,17 @@
           </a:bodyPr>
           <a:lstStyle/>
           <a:p>
+            <a:pPr>
+              <a:defRPr>
+                <a:latin typeface="Roboto"/>
+              </a:defRPr>
+            </a:pPr>
             <a:r>
               <a:rPr sz="1600" b="0">
                 <a:solidFill>
                   <a:srgbClr val="25342A"/>
                 </a:solidFill>
-                <a:latin typeface="Arial"/>
+                <a:latin typeface="Roboto"/>
               </a:rPr>
               <a:t>The full cost (not just the grant line) is the number for renewal applications, where the funder lets you recover a share of overheads. Pick a program above to see it on its own.</a:t>
             </a:r>
@@ -4984,12 +5150,17 @@
           </a:bodyPr>
           <a:lstStyle/>
           <a:p>
+            <a:pPr>
+              <a:defRPr>
+                <a:latin typeface="Roboto"/>
+              </a:defRPr>
+            </a:pPr>
             <a:r>
               <a:rPr sz="900" b="0">
                 <a:solidFill>
                   <a:srgbClr val="5F6F63"/>
                 </a:solidFill>
-                <a:latin typeface="Arial"/>
+                <a:latin typeface="Roboto"/>
               </a:rPr>
               <a:t>program-cost.pptx</a:t>
             </a:r>
@@ -5018,13 +5189,17 @@
           </a:bodyPr>
           <a:lstStyle/>
           <a:p>
-            <a:pPr algn="ctr"/>
+            <a:pPr algn="ctr">
+              <a:defRPr>
+                <a:latin typeface="Roboto"/>
+              </a:defRPr>
+            </a:pPr>
             <a:r>
               <a:rPr sz="900" b="0">
                 <a:solidFill>
                   <a:srgbClr val="5F6F63"/>
                 </a:solidFill>
-                <a:latin typeface="Arial"/>
+                <a:latin typeface="Roboto"/>
               </a:rPr>
               <a:t>Data retrieved 2pm, Tue 6 Oct 2026 · Sample data</a:t>
             </a:r>
@@ -5053,13 +5228,17 @@
           </a:bodyPr>
           <a:lstStyle/>
           <a:p>
-            <a:pPr algn="r"/>
+            <a:pPr algn="r">
+              <a:defRPr>
+                <a:latin typeface="Roboto"/>
+              </a:defRPr>
+            </a:pPr>
             <a:r>
               <a:rPr sz="900" b="0">
                 <a:solidFill>
                   <a:srgbClr val="5F6F63"/>
                 </a:solidFill>
-                <a:latin typeface="Arial"/>
+                <a:latin typeface="Roboto"/>
               </a:rPr>
               <a:t>Slide 4 of 9</a:t>
             </a:r>
@@ -5123,7 +5302,11 @@
           <a:bodyPr rtlCol="0" anchor="ctr"/>
           <a:lstStyle/>
           <a:p>
-            <a:pPr algn="ctr"/>
+            <a:pPr algn="ctr">
+              <a:defRPr>
+                <a:latin typeface="Roboto"/>
+              </a:defRPr>
+            </a:pPr>
           </a:p>
         </p:txBody>
       </p:sp>
@@ -5149,12 +5332,17 @@
           </a:bodyPr>
           <a:lstStyle/>
           <a:p>
+            <a:pPr>
+              <a:defRPr>
+                <a:latin typeface="Roboto"/>
+              </a:defRPr>
+            </a:pPr>
             <a:r>
               <a:rPr sz="1000" b="0">
                 <a:solidFill>
                   <a:srgbClr val="5F6F63"/>
                 </a:solidFill>
-                <a:latin typeface="Arial"/>
+                <a:latin typeface="Roboto"/>
               </a:rPr>
               <a:t>Sample Community Services Ltd · What does each program really cost?</a:t>
             </a:r>
@@ -5183,12 +5371,17 @@
           </a:bodyPr>
           <a:lstStyle/>
           <a:p>
+            <a:pPr>
+              <a:defRPr>
+                <a:latin typeface="Roboto"/>
+              </a:defRPr>
+            </a:pPr>
             <a:r>
               <a:rPr sz="2400" b="1">
                 <a:solidFill>
                   <a:srgbClr val="25342A"/>
                 </a:solidFill>
-                <a:latin typeface="Arial"/>
+                <a:latin typeface="Roboto"/>
               </a:rPr>
               <a:t>What it shows · Program: Housing support</a:t>
             </a:r>
@@ -5236,7 +5429,11 @@
           <a:bodyPr rtlCol="0" anchor="ctr"/>
           <a:lstStyle/>
           <a:p>
-            <a:pPr algn="ctr"/>
+            <a:pPr algn="ctr">
+              <a:defRPr>
+                <a:latin typeface="Roboto"/>
+              </a:defRPr>
+            </a:pPr>
           </a:p>
         </p:txBody>
       </p:sp>
@@ -5262,12 +5459,17 @@
           </a:bodyPr>
           <a:lstStyle/>
           <a:p>
+            <a:pPr>
+              <a:defRPr>
+                <a:latin typeface="Roboto"/>
+              </a:defRPr>
+            </a:pPr>
             <a:r>
               <a:rPr sz="1100" b="1">
                 <a:solidFill>
                   <a:srgbClr val="5F6F63"/>
                 </a:solidFill>
-                <a:latin typeface="Arial"/>
+                <a:latin typeface="Roboto"/>
               </a:rPr>
               <a:t>WHAT IT SHOWS</a:t>
             </a:r>
@@ -5296,12 +5498,17 @@
           </a:bodyPr>
           <a:lstStyle/>
           <a:p>
+            <a:pPr>
+              <a:defRPr>
+                <a:latin typeface="Roboto"/>
+              </a:defRPr>
+            </a:pPr>
             <a:r>
               <a:rPr sz="1600" b="0">
                 <a:solidFill>
                   <a:srgbClr val="25342A"/>
                 </a:solidFill>
-                <a:latin typeface="Arial"/>
+                <a:latin typeface="Roboto"/>
               </a:rPr>
               <a:t>Housing support cost $51,514 in full in February: $26,508 paid by the State Housing Program grant, and $25,006 of shared costs no grant covers. It has spent 95.0% of its budget to date, with $302,990 left and 10 months to go.</a:t>
             </a:r>
@@ -5349,7 +5556,11 @@
           <a:bodyPr rtlCol="0" anchor="ctr"/>
           <a:lstStyle/>
           <a:p>
-            <a:pPr algn="ctr"/>
+            <a:pPr algn="ctr">
+              <a:defRPr>
+                <a:latin typeface="Roboto"/>
+              </a:defRPr>
+            </a:pPr>
           </a:p>
         </p:txBody>
       </p:sp>
@@ -5375,12 +5586,17 @@
           </a:bodyPr>
           <a:lstStyle/>
           <a:p>
+            <a:pPr>
+              <a:defRPr>
+                <a:latin typeface="Roboto"/>
+              </a:defRPr>
+            </a:pPr>
             <a:r>
               <a:rPr sz="1100" b="1">
                 <a:solidFill>
                   <a:srgbClr val="5F6F63"/>
                 </a:solidFill>
-                <a:latin typeface="Arial"/>
+                <a:latin typeface="Roboto"/>
               </a:rPr>
               <a:t>WHAT YOU'D DO ABOUT IT</a:t>
             </a:r>
@@ -5409,12 +5625,17 @@
           </a:bodyPr>
           <a:lstStyle/>
           <a:p>
+            <a:pPr>
+              <a:defRPr>
+                <a:latin typeface="Roboto"/>
+              </a:defRPr>
+            </a:pPr>
             <a:r>
               <a:rPr sz="1600" b="0">
                 <a:solidFill>
                   <a:srgbClr val="25342A"/>
                 </a:solidFill>
-                <a:latin typeface="Arial"/>
+                <a:latin typeface="Roboto"/>
               </a:rPr>
               <a:t>The full cost is $51,514 a month; $25,006 of it is shared cost the grant doesn't pay for. Worth asking for as much of it as the funder allows at renewal.</a:t>
             </a:r>
@@ -5443,12 +5664,17 @@
           </a:bodyPr>
           <a:lstStyle/>
           <a:p>
+            <a:pPr>
+              <a:defRPr>
+                <a:latin typeface="Roboto"/>
+              </a:defRPr>
+            </a:pPr>
             <a:r>
               <a:rPr sz="900" b="0">
                 <a:solidFill>
                   <a:srgbClr val="5F6F63"/>
                 </a:solidFill>
-                <a:latin typeface="Arial"/>
+                <a:latin typeface="Roboto"/>
               </a:rPr>
               <a:t>program-cost.pptx</a:t>
             </a:r>
@@ -5477,13 +5703,17 @@
           </a:bodyPr>
           <a:lstStyle/>
           <a:p>
-            <a:pPr algn="ctr"/>
+            <a:pPr algn="ctr">
+              <a:defRPr>
+                <a:latin typeface="Roboto"/>
+              </a:defRPr>
+            </a:pPr>
             <a:r>
               <a:rPr sz="900" b="0">
                 <a:solidFill>
                   <a:srgbClr val="5F6F63"/>
                 </a:solidFill>
-                <a:latin typeface="Arial"/>
+                <a:latin typeface="Roboto"/>
               </a:rPr>
               <a:t>Data retrieved 2pm, Tue 6 Oct 2026 · Sample data</a:t>
             </a:r>
@@ -5512,13 +5742,17 @@
           </a:bodyPr>
           <a:lstStyle/>
           <a:p>
-            <a:pPr algn="r"/>
+            <a:pPr algn="r">
+              <a:defRPr>
+                <a:latin typeface="Roboto"/>
+              </a:defRPr>
+            </a:pPr>
             <a:r>
               <a:rPr sz="900" b="0">
                 <a:solidFill>
                   <a:srgbClr val="5F6F63"/>
                 </a:solidFill>
-                <a:latin typeface="Arial"/>
+                <a:latin typeface="Roboto"/>
               </a:rPr>
               <a:t>Slide 5 of 9</a:t>
             </a:r>
@@ -5582,7 +5816,11 @@
           <a:bodyPr rtlCol="0" anchor="ctr"/>
           <a:lstStyle/>
           <a:p>
-            <a:pPr algn="ctr"/>
+            <a:pPr algn="ctr">
+              <a:defRPr>
+                <a:latin typeface="Roboto"/>
+              </a:defRPr>
+            </a:pPr>
           </a:p>
         </p:txBody>
       </p:sp>
@@ -5608,12 +5846,17 @@
           </a:bodyPr>
           <a:lstStyle/>
           <a:p>
+            <a:pPr>
+              <a:defRPr>
+                <a:latin typeface="Roboto"/>
+              </a:defRPr>
+            </a:pPr>
             <a:r>
               <a:rPr sz="1000" b="0">
                 <a:solidFill>
                   <a:srgbClr val="5F6F63"/>
                 </a:solidFill>
-                <a:latin typeface="Arial"/>
+                <a:latin typeface="Roboto"/>
               </a:rPr>
               <a:t>Sample Community Services Ltd · What does each program really cost?</a:t>
             </a:r>
@@ -5642,12 +5885,17 @@
           </a:bodyPr>
           <a:lstStyle/>
           <a:p>
+            <a:pPr>
+              <a:defRPr>
+                <a:latin typeface="Roboto"/>
+              </a:defRPr>
+            </a:pPr>
             <a:r>
               <a:rPr sz="2400" b="1">
                 <a:solidFill>
                   <a:srgbClr val="25342A"/>
                 </a:solidFill>
-                <a:latin typeface="Arial"/>
+                <a:latin typeface="Roboto"/>
               </a:rPr>
               <a:t>What it shows · Program: Youth outreach</a:t>
             </a:r>
@@ -5695,7 +5943,11 @@
           <a:bodyPr rtlCol="0" anchor="ctr"/>
           <a:lstStyle/>
           <a:p>
-            <a:pPr algn="ctr"/>
+            <a:pPr algn="ctr">
+              <a:defRPr>
+                <a:latin typeface="Roboto"/>
+              </a:defRPr>
+            </a:pPr>
           </a:p>
         </p:txBody>
       </p:sp>
@@ -5721,12 +5973,17 @@
           </a:bodyPr>
           <a:lstStyle/>
           <a:p>
+            <a:pPr>
+              <a:defRPr>
+                <a:latin typeface="Roboto"/>
+              </a:defRPr>
+            </a:pPr>
             <a:r>
               <a:rPr sz="1100" b="1">
                 <a:solidFill>
                   <a:srgbClr val="5F6F63"/>
                 </a:solidFill>
-                <a:latin typeface="Arial"/>
+                <a:latin typeface="Roboto"/>
               </a:rPr>
               <a:t>WHAT IT SHOWS</a:t>
             </a:r>
@@ -5755,12 +6012,17 @@
           </a:bodyPr>
           <a:lstStyle/>
           <a:p>
+            <a:pPr>
+              <a:defRPr>
+                <a:latin typeface="Roboto"/>
+              </a:defRPr>
+            </a:pPr>
             <a:r>
               <a:rPr sz="1600" b="0">
                 <a:solidFill>
                   <a:srgbClr val="25342A"/>
                 </a:solidFill>
-                <a:latin typeface="Arial"/>
+                <a:latin typeface="Roboto"/>
               </a:rPr>
               <a:t>Youth outreach cost $40,311 in full in February: $20,743 paid by the State Department of Families grant, and $19,568 of shared costs no grant covers. It has spent 100.1% of its budget to date, with $319,780 left and 16 months to go.</a:t>
             </a:r>
@@ -5808,7 +6070,11 @@
           <a:bodyPr rtlCol="0" anchor="ctr"/>
           <a:lstStyle/>
           <a:p>
-            <a:pPr algn="ctr"/>
+            <a:pPr algn="ctr">
+              <a:defRPr>
+                <a:latin typeface="Roboto"/>
+              </a:defRPr>
+            </a:pPr>
           </a:p>
         </p:txBody>
       </p:sp>
@@ -5834,12 +6100,17 @@
           </a:bodyPr>
           <a:lstStyle/>
           <a:p>
+            <a:pPr>
+              <a:defRPr>
+                <a:latin typeface="Roboto"/>
+              </a:defRPr>
+            </a:pPr>
             <a:r>
               <a:rPr sz="1100" b="1">
                 <a:solidFill>
                   <a:srgbClr val="5F6F63"/>
                 </a:solidFill>
-                <a:latin typeface="Arial"/>
+                <a:latin typeface="Roboto"/>
               </a:rPr>
               <a:t>WHAT YOU'D DO ABOUT IT</a:t>
             </a:r>
@@ -5868,12 +6139,17 @@
           </a:bodyPr>
           <a:lstStyle/>
           <a:p>
+            <a:pPr>
+              <a:defRPr>
+                <a:latin typeface="Roboto"/>
+              </a:defRPr>
+            </a:pPr>
             <a:r>
               <a:rPr sz="1600" b="0">
                 <a:solidFill>
                   <a:srgbClr val="25342A"/>
                 </a:solidFill>
-                <a:latin typeface="Arial"/>
+                <a:latin typeface="Roboto"/>
               </a:rPr>
               <a:t>The full cost is $40,311 a month; $19,568 of it is shared cost the grant doesn't pay for. Worth asking for as much of it as the funder allows at renewal.</a:t>
             </a:r>
@@ -5902,12 +6178,17 @@
           </a:bodyPr>
           <a:lstStyle/>
           <a:p>
+            <a:pPr>
+              <a:defRPr>
+                <a:latin typeface="Roboto"/>
+              </a:defRPr>
+            </a:pPr>
             <a:r>
               <a:rPr sz="900" b="0">
                 <a:solidFill>
                   <a:srgbClr val="5F6F63"/>
                 </a:solidFill>
-                <a:latin typeface="Arial"/>
+                <a:latin typeface="Roboto"/>
               </a:rPr>
               <a:t>program-cost.pptx</a:t>
             </a:r>
@@ -5936,13 +6217,17 @@
           </a:bodyPr>
           <a:lstStyle/>
           <a:p>
-            <a:pPr algn="ctr"/>
+            <a:pPr algn="ctr">
+              <a:defRPr>
+                <a:latin typeface="Roboto"/>
+              </a:defRPr>
+            </a:pPr>
             <a:r>
               <a:rPr sz="900" b="0">
                 <a:solidFill>
                   <a:srgbClr val="5F6F63"/>
                 </a:solidFill>
-                <a:latin typeface="Arial"/>
+                <a:latin typeface="Roboto"/>
               </a:rPr>
               <a:t>Data retrieved 2pm, Tue 6 Oct 2026 · Sample data</a:t>
             </a:r>
@@ -5971,13 +6256,17 @@
           </a:bodyPr>
           <a:lstStyle/>
           <a:p>
-            <a:pPr algn="r"/>
+            <a:pPr algn="r">
+              <a:defRPr>
+                <a:latin typeface="Roboto"/>
+              </a:defRPr>
+            </a:pPr>
             <a:r>
               <a:rPr sz="900" b="0">
                 <a:solidFill>
                   <a:srgbClr val="5F6F63"/>
                 </a:solidFill>
-                <a:latin typeface="Arial"/>
+                <a:latin typeface="Roboto"/>
               </a:rPr>
               <a:t>Slide 6 of 9</a:t>
             </a:r>
@@ -6041,7 +6330,11 @@
           <a:bodyPr rtlCol="0" anchor="ctr"/>
           <a:lstStyle/>
           <a:p>
-            <a:pPr algn="ctr"/>
+            <a:pPr algn="ctr">
+              <a:defRPr>
+                <a:latin typeface="Roboto"/>
+              </a:defRPr>
+            </a:pPr>
           </a:p>
         </p:txBody>
       </p:sp>
@@ -6067,12 +6360,17 @@
           </a:bodyPr>
           <a:lstStyle/>
           <a:p>
+            <a:pPr>
+              <a:defRPr>
+                <a:latin typeface="Roboto"/>
+              </a:defRPr>
+            </a:pPr>
             <a:r>
               <a:rPr sz="1000" b="0">
                 <a:solidFill>
                   <a:srgbClr val="5F6F63"/>
                 </a:solidFill>
-                <a:latin typeface="Arial"/>
+                <a:latin typeface="Roboto"/>
               </a:rPr>
               <a:t>Sample Community Services Ltd · What does each program really cost?</a:t>
             </a:r>
@@ -6101,12 +6399,17 @@
           </a:bodyPr>
           <a:lstStyle/>
           <a:p>
+            <a:pPr>
+              <a:defRPr>
+                <a:latin typeface="Roboto"/>
+              </a:defRPr>
+            </a:pPr>
             <a:r>
               <a:rPr sz="2400" b="1">
                 <a:solidFill>
                   <a:srgbClr val="25342A"/>
                 </a:solidFill>
-                <a:latin typeface="Arial"/>
+                <a:latin typeface="Roboto"/>
               </a:rPr>
               <a:t>What it shows · Program: Digital literacy</a:t>
             </a:r>
@@ -6154,7 +6457,11 @@
           <a:bodyPr rtlCol="0" anchor="ctr"/>
           <a:lstStyle/>
           <a:p>
-            <a:pPr algn="ctr"/>
+            <a:pPr algn="ctr">
+              <a:defRPr>
+                <a:latin typeface="Roboto"/>
+              </a:defRPr>
+            </a:pPr>
           </a:p>
         </p:txBody>
       </p:sp>
@@ -6180,12 +6487,17 @@
           </a:bodyPr>
           <a:lstStyle/>
           <a:p>
+            <a:pPr>
+              <a:defRPr>
+                <a:latin typeface="Roboto"/>
+              </a:defRPr>
+            </a:pPr>
             <a:r>
               <a:rPr sz="1100" b="1">
                 <a:solidFill>
                   <a:srgbClr val="5F6F63"/>
                 </a:solidFill>
-                <a:latin typeface="Arial"/>
+                <a:latin typeface="Roboto"/>
               </a:rPr>
               <a:t>WHAT IT SHOWS</a:t>
             </a:r>
@@ -6214,12 +6526,17 @@
           </a:bodyPr>
           <a:lstStyle/>
           <a:p>
+            <a:pPr>
+              <a:defRPr>
+                <a:latin typeface="Roboto"/>
+              </a:defRPr>
+            </a:pPr>
             <a:r>
               <a:rPr sz="1600" b="0">
                 <a:solidFill>
                   <a:srgbClr val="25342A"/>
                 </a:solidFill>
-                <a:latin typeface="Arial"/>
+                <a:latin typeface="Roboto"/>
               </a:rPr>
               <a:t>Digital literacy cost $10,510 in full in February: $5,408 paid by the Philanthropic foundation grant, and $5,102 of shared costs no grant covers. It has spent 99.2% of its budget to date, with $65,200 left and 13 months to go.</a:t>
             </a:r>
@@ -6267,7 +6584,11 @@
           <a:bodyPr rtlCol="0" anchor="ctr"/>
           <a:lstStyle/>
           <a:p>
-            <a:pPr algn="ctr"/>
+            <a:pPr algn="ctr">
+              <a:defRPr>
+                <a:latin typeface="Roboto"/>
+              </a:defRPr>
+            </a:pPr>
           </a:p>
         </p:txBody>
       </p:sp>
@@ -6293,12 +6614,17 @@
           </a:bodyPr>
           <a:lstStyle/>
           <a:p>
+            <a:pPr>
+              <a:defRPr>
+                <a:latin typeface="Roboto"/>
+              </a:defRPr>
+            </a:pPr>
             <a:r>
               <a:rPr sz="1100" b="1">
                 <a:solidFill>
                   <a:srgbClr val="5F6F63"/>
                 </a:solidFill>
-                <a:latin typeface="Arial"/>
+                <a:latin typeface="Roboto"/>
               </a:rPr>
               <a:t>WHAT YOU'D DO ABOUT IT</a:t>
             </a:r>
@@ -6327,12 +6653,17 @@
           </a:bodyPr>
           <a:lstStyle/>
           <a:p>
+            <a:pPr>
+              <a:defRPr>
+                <a:latin typeface="Roboto"/>
+              </a:defRPr>
+            </a:pPr>
             <a:r>
               <a:rPr sz="1600" b="0">
                 <a:solidFill>
                   <a:srgbClr val="25342A"/>
                 </a:solidFill>
-                <a:latin typeface="Arial"/>
+                <a:latin typeface="Roboto"/>
               </a:rPr>
               <a:t>The full cost is $10,510 a month; $5,102 of it is shared cost the grant doesn't pay for. Worth asking for as much of it as the funder allows at renewal.</a:t>
             </a:r>
@@ -6361,12 +6692,17 @@
           </a:bodyPr>
           <a:lstStyle/>
           <a:p>
+            <a:pPr>
+              <a:defRPr>
+                <a:latin typeface="Roboto"/>
+              </a:defRPr>
+            </a:pPr>
             <a:r>
               <a:rPr sz="900" b="0">
                 <a:solidFill>
                   <a:srgbClr val="5F6F63"/>
                 </a:solidFill>
-                <a:latin typeface="Arial"/>
+                <a:latin typeface="Roboto"/>
               </a:rPr>
               <a:t>program-cost.pptx</a:t>
             </a:r>
@@ -6395,13 +6731,17 @@
           </a:bodyPr>
           <a:lstStyle/>
           <a:p>
-            <a:pPr algn="ctr"/>
+            <a:pPr algn="ctr">
+              <a:defRPr>
+                <a:latin typeface="Roboto"/>
+              </a:defRPr>
+            </a:pPr>
             <a:r>
               <a:rPr sz="900" b="0">
                 <a:solidFill>
                   <a:srgbClr val="5F6F63"/>
                 </a:solidFill>
-                <a:latin typeface="Arial"/>
+                <a:latin typeface="Roboto"/>
               </a:rPr>
               <a:t>Data retrieved 2pm, Tue 6 Oct 2026 · Sample data</a:t>
             </a:r>
@@ -6430,13 +6770,17 @@
           </a:bodyPr>
           <a:lstStyle/>
           <a:p>
-            <a:pPr algn="r"/>
+            <a:pPr algn="r">
+              <a:defRPr>
+                <a:latin typeface="Roboto"/>
+              </a:defRPr>
+            </a:pPr>
             <a:r>
               <a:rPr sz="900" b="0">
                 <a:solidFill>
                   <a:srgbClr val="5F6F63"/>
                 </a:solidFill>
-                <a:latin typeface="Arial"/>
+                <a:latin typeface="Roboto"/>
               </a:rPr>
               <a:t>Slide 7 of 9</a:t>
             </a:r>
@@ -6500,7 +6844,11 @@
           <a:bodyPr rtlCol="0" anchor="ctr"/>
           <a:lstStyle/>
           <a:p>
-            <a:pPr algn="ctr"/>
+            <a:pPr algn="ctr">
+              <a:defRPr>
+                <a:latin typeface="Roboto"/>
+              </a:defRPr>
+            </a:pPr>
           </a:p>
         </p:txBody>
       </p:sp>
@@ -6526,12 +6874,17 @@
           </a:bodyPr>
           <a:lstStyle/>
           <a:p>
+            <a:pPr>
+              <a:defRPr>
+                <a:latin typeface="Roboto"/>
+              </a:defRPr>
+            </a:pPr>
             <a:r>
               <a:rPr sz="1000" b="0">
                 <a:solidFill>
                   <a:srgbClr val="5F6F63"/>
                 </a:solidFill>
-                <a:latin typeface="Arial"/>
+                <a:latin typeface="Roboto"/>
               </a:rPr>
               <a:t>Sample Community Services Ltd · What does each program really cost?</a:t>
             </a:r>
@@ -6560,12 +6913,17 @@
           </a:bodyPr>
           <a:lstStyle/>
           <a:p>
+            <a:pPr>
+              <a:defRPr>
+                <a:latin typeface="Roboto"/>
+              </a:defRPr>
+            </a:pPr>
             <a:r>
               <a:rPr sz="2400" b="1">
                 <a:solidFill>
                   <a:srgbClr val="25342A"/>
                 </a:solidFill>
-                <a:latin typeface="Arial"/>
+                <a:latin typeface="Roboto"/>
               </a:rPr>
               <a:t>What it shows · Program: Community meals (2025-26)</a:t>
             </a:r>
@@ -6613,7 +6971,11 @@
           <a:bodyPr rtlCol="0" anchor="ctr"/>
           <a:lstStyle/>
           <a:p>
-            <a:pPr algn="ctr"/>
+            <a:pPr algn="ctr">
+              <a:defRPr>
+                <a:latin typeface="Roboto"/>
+              </a:defRPr>
+            </a:pPr>
           </a:p>
         </p:txBody>
       </p:sp>
@@ -6639,12 +7001,17 @@
           </a:bodyPr>
           <a:lstStyle/>
           <a:p>
+            <a:pPr>
+              <a:defRPr>
+                <a:latin typeface="Roboto"/>
+              </a:defRPr>
+            </a:pPr>
             <a:r>
               <a:rPr sz="1100" b="1">
                 <a:solidFill>
                   <a:srgbClr val="5F6F63"/>
                 </a:solidFill>
-                <a:latin typeface="Arial"/>
+                <a:latin typeface="Roboto"/>
               </a:rPr>
               <a:t>WHAT IT SHOWS</a:t>
             </a:r>
@@ -6673,12 +7040,17 @@
           </a:bodyPr>
           <a:lstStyle/>
           <a:p>
+            <a:pPr>
+              <a:defRPr>
+                <a:latin typeface="Roboto"/>
+              </a:defRPr>
+            </a:pPr>
             <a:r>
               <a:rPr sz="1600" b="0">
                 <a:solidFill>
                   <a:srgbClr val="25342A"/>
                 </a:solidFill>
-                <a:latin typeface="Arial"/>
+                <a:latin typeface="Roboto"/>
               </a:rPr>
               <a:t>Community meals (2025-26) cost $6,024 in full in February: $3,100 paid by the Local council community grant grant, and $2,924 of shared costs no grant covers. It has spent 94.8% of its budget to date, with $16,200 left and 4 months to go.</a:t>
             </a:r>
@@ -6726,7 +7098,11 @@
           <a:bodyPr rtlCol="0" anchor="ctr"/>
           <a:lstStyle/>
           <a:p>
-            <a:pPr algn="ctr"/>
+            <a:pPr algn="ctr">
+              <a:defRPr>
+                <a:latin typeface="Roboto"/>
+              </a:defRPr>
+            </a:pPr>
           </a:p>
         </p:txBody>
       </p:sp>
@@ -6752,12 +7128,17 @@
           </a:bodyPr>
           <a:lstStyle/>
           <a:p>
+            <a:pPr>
+              <a:defRPr>
+                <a:latin typeface="Roboto"/>
+              </a:defRPr>
+            </a:pPr>
             <a:r>
               <a:rPr sz="1100" b="1">
                 <a:solidFill>
                   <a:srgbClr val="5F6F63"/>
                 </a:solidFill>
-                <a:latin typeface="Arial"/>
+                <a:latin typeface="Roboto"/>
               </a:rPr>
               <a:t>WHAT YOU'D DO ABOUT IT</a:t>
             </a:r>
@@ -6786,12 +7167,17 @@
           </a:bodyPr>
           <a:lstStyle/>
           <a:p>
+            <a:pPr>
+              <a:defRPr>
+                <a:latin typeface="Roboto"/>
+              </a:defRPr>
+            </a:pPr>
             <a:r>
               <a:rPr sz="1600" b="0">
                 <a:solidFill>
                   <a:srgbClr val="25342A"/>
                 </a:solidFill>
-                <a:latin typeface="Arial"/>
+                <a:latin typeface="Roboto"/>
               </a:rPr>
               <a:t>The full cost is $6,024 a month; $2,924 of it is shared cost the grant doesn't pay for. Worth asking for as much of it as the funder allows at renewal.</a:t>
             </a:r>
@@ -6820,12 +7206,17 @@
           </a:bodyPr>
           <a:lstStyle/>
           <a:p>
+            <a:pPr>
+              <a:defRPr>
+                <a:latin typeface="Roboto"/>
+              </a:defRPr>
+            </a:pPr>
             <a:r>
               <a:rPr sz="900" b="0">
                 <a:solidFill>
                   <a:srgbClr val="5F6F63"/>
                 </a:solidFill>
-                <a:latin typeface="Arial"/>
+                <a:latin typeface="Roboto"/>
               </a:rPr>
               <a:t>program-cost.pptx</a:t>
             </a:r>
@@ -6854,13 +7245,17 @@
           </a:bodyPr>
           <a:lstStyle/>
           <a:p>
-            <a:pPr algn="ctr"/>
+            <a:pPr algn="ctr">
+              <a:defRPr>
+                <a:latin typeface="Roboto"/>
+              </a:defRPr>
+            </a:pPr>
             <a:r>
               <a:rPr sz="900" b="0">
                 <a:solidFill>
                   <a:srgbClr val="5F6F63"/>
                 </a:solidFill>
-                <a:latin typeface="Arial"/>
+                <a:latin typeface="Roboto"/>
               </a:rPr>
               <a:t>Data retrieved 2pm, Tue 6 Oct 2026 · Sample data</a:t>
             </a:r>
@@ -6889,13 +7284,17 @@
           </a:bodyPr>
           <a:lstStyle/>
           <a:p>
-            <a:pPr algn="r"/>
+            <a:pPr algn="r">
+              <a:defRPr>
+                <a:latin typeface="Roboto"/>
+              </a:defRPr>
+            </a:pPr>
             <a:r>
               <a:rPr sz="900" b="0">
                 <a:solidFill>
                   <a:srgbClr val="5F6F63"/>
                 </a:solidFill>
-                <a:latin typeface="Arial"/>
+                <a:latin typeface="Roboto"/>
               </a:rPr>
               <a:t>Slide 8 of 9</a:t>
             </a:r>
@@ -6959,7 +7358,11 @@
           <a:bodyPr rtlCol="0" anchor="ctr"/>
           <a:lstStyle/>
           <a:p>
-            <a:pPr algn="ctr"/>
+            <a:pPr algn="ctr">
+              <a:defRPr>
+                <a:latin typeface="Roboto"/>
+              </a:defRPr>
+            </a:pPr>
           </a:p>
         </p:txBody>
       </p:sp>
@@ -6985,12 +7388,17 @@
           </a:bodyPr>
           <a:lstStyle/>
           <a:p>
+            <a:pPr>
+              <a:defRPr>
+                <a:latin typeface="Roboto"/>
+              </a:defRPr>
+            </a:pPr>
             <a:r>
               <a:rPr sz="1000" b="0">
                 <a:solidFill>
                   <a:srgbClr val="5F6F63"/>
                 </a:solidFill>
-                <a:latin typeface="Arial"/>
+                <a:latin typeface="Roboto"/>
               </a:rPr>
               <a:t>Sample Community Services Ltd · What does each program really cost?</a:t>
             </a:r>
@@ -7019,12 +7427,17 @@
           </a:bodyPr>
           <a:lstStyle/>
           <a:p>
+            <a:pPr>
+              <a:defRPr>
+                <a:latin typeface="Roboto"/>
+              </a:defRPr>
+            </a:pPr>
             <a:r>
               <a:rPr sz="2400" b="1">
                 <a:solidFill>
                   <a:srgbClr val="25342A"/>
                 </a:solidFill>
-                <a:latin typeface="Arial"/>
+                <a:latin typeface="Roboto"/>
               </a:rPr>
               <a:t>Grant spending, by month · Spend $ · Every program at once</a:t>
             </a:r>
@@ -7053,12 +7466,17 @@
           </a:bodyPr>
           <a:lstStyle/>
           <a:p>
+            <a:pPr>
+              <a:defRPr>
+                <a:latin typeface="Roboto"/>
+              </a:defRPr>
+            </a:pPr>
             <a:r>
               <a:rPr sz="1200" b="0">
                 <a:solidFill>
                   <a:srgbClr val="5F6F63"/>
                 </a:solidFill>
-                <a:latin typeface="Arial"/>
+                <a:latin typeface="Roboto"/>
               </a:rPr>
               <a:t>Grant spending only (the program's direct cost). All programs includes grants that have finished.</a:t>
             </a:r>
@@ -7105,12 +7523,17 @@
           </a:bodyPr>
           <a:lstStyle/>
           <a:p>
+            <a:pPr>
+              <a:defRPr>
+                <a:latin typeface="Roboto"/>
+              </a:defRPr>
+            </a:pPr>
             <a:r>
               <a:rPr sz="900" b="0">
                 <a:solidFill>
                   <a:srgbClr val="5F6F63"/>
                 </a:solidFill>
-                <a:latin typeface="Arial"/>
+                <a:latin typeface="Roboto"/>
               </a:rPr>
               <a:t>program-cost.pptx</a:t>
             </a:r>
@@ -7139,13 +7562,17 @@
           </a:bodyPr>
           <a:lstStyle/>
           <a:p>
-            <a:pPr algn="ctr"/>
+            <a:pPr algn="ctr">
+              <a:defRPr>
+                <a:latin typeface="Roboto"/>
+              </a:defRPr>
+            </a:pPr>
             <a:r>
               <a:rPr sz="900" b="0">
                 <a:solidFill>
                   <a:srgbClr val="5F6F63"/>
                 </a:solidFill>
-                <a:latin typeface="Arial"/>
+                <a:latin typeface="Roboto"/>
               </a:rPr>
               <a:t>Data retrieved 2pm, Tue 6 Oct 2026 · Sample data</a:t>
             </a:r>
@@ -7174,13 +7601,17 @@
           </a:bodyPr>
           <a:lstStyle/>
           <a:p>
-            <a:pPr algn="r"/>
+            <a:pPr algn="r">
+              <a:defRPr>
+                <a:latin typeface="Roboto"/>
+              </a:defRPr>
+            </a:pPr>
             <a:r>
               <a:rPr sz="900" b="0">
                 <a:solidFill>
                   <a:srgbClr val="5F6F63"/>
                 </a:solidFill>
-                <a:latin typeface="Arial"/>
+                <a:latin typeface="Roboto"/>
               </a:rPr>
               <a:t>Slide 9 of 9</a:t>
             </a:r>

--- a/media/exports/reports/2026-02/program-cost.pptx
+++ b/media/exports/reports/2026-02/program-cost.pptx
@@ -6,14 +6,11 @@
   </p:sldMasterIdLst>
   <p:sldIdLst>
     <p:sldId id="256" r:id="rId7"/>
-    <p:sldId id="257" r:id="rId8"/>
-    <p:sldId id="258" r:id="rId9"/>
-    <p:sldId id="259" r:id="rId10"/>
-    <p:sldId id="260" r:id="rId11"/>
-    <p:sldId id="261" r:id="rId12"/>
-    <p:sldId id="262" r:id="rId13"/>
-    <p:sldId id="263" r:id="rId14"/>
-    <p:sldId id="264" r:id="rId15"/>
+    <p:sldId id="257" r:id="rId9"/>
+    <p:sldId id="258" r:id="rId10"/>
+    <p:sldId id="259" r:id="rId11"/>
+    <p:sldId id="260" r:id="rId12"/>
+    <p:sldId id="261" r:id="rId13"/>
   </p:sldIdLst>
   <p:sldSz cx="12191695" cy="6858000" type="screen4x3"/>
   <p:notesSz cx="6858000" cy="9144000"/>
@@ -119,8 +116,19 @@
 <c:chartSpace xmlns:c="http://schemas.openxmlformats.org/drawingml/2006/chart" xmlns:a="http://schemas.openxmlformats.org/drawingml/2006/main" xmlns:r="http://schemas.openxmlformats.org/officeDocument/2006/relationships">
   <c:date1904 val="0"/>
   <c:chart>
-    <c:autoTitleDeleted val="0"/>
+    <c:autoTitleDeleted val="1"/>
     <c:plotArea>
+      <c:layout>
+        <c:manualLayout>
+          <c:layoutTarget val="inner"/>
+          <c:xMode val="edge"/>
+          <c:yMode val="edge"/>
+          <c:x val="0.3"/>
+          <c:y val="0.03"/>
+          <c:w val="0.58"/>
+          <c:h val="0.88"/>
+        </c:manualLayout>
+      </c:layout>
       <c:barChart>
         <c:barDir val="bar"/>
         <c:grouping val="clustered"/>
@@ -133,7 +141,7 @@
               <c:strCache>
                 <c:ptCount val="1"/>
                 <c:pt idx="0">
-                  <c:v>Value</c:v>
+                  <c:v>$</c:v>
                 </c:pt>
               </c:strCache>
             </c:strRef>
@@ -219,7 +227,7 @@
             <a:lstStyle/>
             <a:p>
               <a:pPr>
-                <a:defRPr sz="1100"/>
+                <a:defRPr sz="1000"/>
               </a:pPr>
             </a:p>
           </c:txPr>
@@ -256,7 +264,7 @@
           <a:lstStyle/>
           <a:p>
             <a:pPr>
-              <a:defRPr sz="1200"/>
+              <a:defRPr sz="1100"/>
             </a:pPr>
           </a:p>
         </c:txPr>
@@ -269,7 +277,10 @@
       </c:catAx>
       <c:valAx>
         <c:axId val="-2113994440"/>
-        <c:scaling/>
+        <c:scaling>
+          <c:max val="59241.1"/>
+          <c:min val="0.0"/>
+        </c:scaling>
         <c:delete/>
         <c:axPos val="b"/>
         <c:majorTickMark val="out"/>
@@ -302,195 +313,21 @@
 <file path=ppt/charts/chart2.xml><?xml version="1.0" encoding="utf-8"?>
 <c:chartSpace xmlns:c="http://schemas.openxmlformats.org/drawingml/2006/chart" xmlns:a="http://schemas.openxmlformats.org/drawingml/2006/main" xmlns:r="http://schemas.openxmlformats.org/officeDocument/2006/relationships">
   <c:date1904 val="0"/>
-  <c:chart>
-    <c:autoTitleDeleted val="0"/>
-    <c:plotArea>
-      <c:barChart>
-        <c:barDir val="bar"/>
-        <c:grouping val="clustered"/>
-        <c:ser>
-          <c:idx val="0"/>
-          <c:order val="0"/>
-          <c:tx>
-            <c:strRef>
-              <c:f>Sheet1!$B$1</c:f>
-              <c:strCache>
-                <c:ptCount val="1"/>
-                <c:pt idx="0">
-                  <c:v>Value</c:v>
-                </c:pt>
-              </c:strCache>
-            </c:strRef>
-          </c:tx>
-          <c:dPt>
-            <c:idx val="0"/>
-            <c:spPr>
-              <a:solidFill>
-                <a:srgbClr val="0E9F6E"/>
-              </a:solidFill>
-            </c:spPr>
-          </c:dPt>
-          <c:dPt>
-            <c:idx val="1"/>
-            <c:spPr>
-              <a:solidFill>
-                <a:srgbClr val="0E9F6E"/>
-              </a:solidFill>
-            </c:spPr>
-          </c:dPt>
-          <c:dPt>
-            <c:idx val="2"/>
-            <c:spPr>
-              <a:solidFill>
-                <a:srgbClr val="0E9F6E"/>
-              </a:solidFill>
-            </c:spPr>
-          </c:dPt>
-          <c:dPt>
-            <c:idx val="3"/>
-            <c:spPr>
-              <a:solidFill>
-                <a:srgbClr val="0E9F6E"/>
-              </a:solidFill>
-            </c:spPr>
-          </c:dPt>
-          <c:cat>
-            <c:strRef>
-              <c:f>Sheet1!$A$2:$A$5</c:f>
-              <c:strCache>
-                <c:ptCount val="4"/>
-                <c:pt idx="0">
-                  <c:v>Community meals (2025-26)</c:v>
-                </c:pt>
-                <c:pt idx="1">
-                  <c:v>Digital literacy</c:v>
-                </c:pt>
-                <c:pt idx="2">
-                  <c:v>Youth outreach</c:v>
-                </c:pt>
-                <c:pt idx="3">
-                  <c:v>Housing support</c:v>
-                </c:pt>
-              </c:strCache>
-            </c:strRef>
-          </c:cat>
-          <c:val>
-            <c:numRef>
-              <c:f>Sheet1!$B$2:$B$5</c:f>
-              <c:numCache>
-                <c:formatCode>0.0"%";[Red](0.0"%")</c:formatCode>
-                <c:ptCount val="4"/>
-                <c:pt idx="0">
-                  <c:v>5.6</c:v>
-                </c:pt>
-                <c:pt idx="1">
-                  <c:v>9.7</c:v>
-                </c:pt>
-                <c:pt idx="2">
-                  <c:v>37.2</c:v>
-                </c:pt>
-                <c:pt idx="3">
-                  <c:v>47.5</c:v>
-                </c:pt>
-              </c:numCache>
-            </c:numRef>
-          </c:val>
-        </c:ser>
-        <c:dLbls>
-          <c:numFmt formatCode="0.0&quot;%&quot;;[Red](0.0&quot;%&quot;)" sourceLinked="0"/>
-          <c:txPr>
-            <a:bodyPr/>
-            <a:lstStyle/>
-            <a:p>
-              <a:pPr>
-                <a:defRPr sz="1100"/>
-              </a:pPr>
-            </a:p>
-          </c:txPr>
-          <c:dLblPos val="outEnd"/>
-          <c:showLegendKey val="0"/>
-          <c:showVal val="1"/>
-          <c:showCatName val="0"/>
-          <c:showSerName val="0"/>
-          <c:showPercent val="0"/>
-          <c:showBubbleSize val="0"/>
-          <c:showLeaderLines val="1"/>
-        </c:dLbls>
-        <c:gapWidth val="60"/>
-        <c:axId val="-2068027336"/>
-        <c:axId val="-2113994440"/>
-      </c:barChart>
-      <c:catAx>
-        <c:axId val="-2068027336"/>
-        <c:scaling>
-          <c:orientation val="minMax"/>
-        </c:scaling>
-        <c:delete val="0"/>
-        <c:axPos val="l"/>
-        <c:majorTickMark val="out"/>
-        <c:minorTickMark val="none"/>
-        <c:tickLblPos val="nextTo"/>
-        <c:spPr>
-          <a:ln>
-            <a:noFill/>
-          </a:ln>
-        </c:spPr>
-        <c:txPr>
-          <a:bodyPr/>
-          <a:lstStyle/>
-          <a:p>
-            <a:pPr>
-              <a:defRPr sz="1200"/>
-            </a:pPr>
-          </a:p>
-        </c:txPr>
-        <c:crossAx val="-2113994440"/>
-        <c:crosses val="autoZero"/>
-        <c:auto val="1"/>
-        <c:lblAlgn val="ctr"/>
-        <c:lblOffset val="100"/>
-        <c:noMultiLvlLbl val="0"/>
-      </c:catAx>
-      <c:valAx>
-        <c:axId val="-2113994440"/>
-        <c:scaling/>
-        <c:delete/>
-        <c:axPos val="b"/>
-        <c:majorTickMark val="out"/>
-        <c:minorTickMark val="none"/>
-        <c:tickLblPos val="nextTo"/>
-        <c:crossAx val="-2068027336"/>
-        <c:crosses val="autoZero"/>
-      </c:valAx>
-    </c:plotArea>
-    <c:dispBlanksAs val="gap"/>
-  </c:chart>
-  <c:txPr>
-    <a:bodyPr/>
-    <a:lstStyle/>
-    <a:p>
-      <a:pPr>
-        <a:defRPr sz="1800">
-          <a:latin typeface="Roboto"/>
-        </a:defRPr>
-      </a:pPr>
-      <a:endParaRPr lang="en-US"/>
-    </a:p>
-  </c:txPr>
-  <c:externalData r:id="rId1">
-    <c:autoUpdate val="0"/>
-  </c:externalData>
-</c:chartSpace>
-</file>
-
-<file path=ppt/charts/chart3.xml><?xml version="1.0" encoding="utf-8"?>
-<c:chartSpace xmlns:c="http://schemas.openxmlformats.org/drawingml/2006/chart" xmlns:a="http://schemas.openxmlformats.org/drawingml/2006/main" xmlns:r="http://schemas.openxmlformats.org/officeDocument/2006/relationships">
-  <c:date1904 val="0"/>
   <c:roundedCorners val="0"/>
   <c:chart>
-    <c:autoTitleDeleted val="0"/>
+    <c:autoTitleDeleted val="1"/>
     <c:plotArea>
-      <c:layout/>
+      <c:layout>
+        <c:manualLayout>
+          <c:layoutTarget val="inner"/>
+          <c:xMode val="edge"/>
+          <c:yMode val="edge"/>
+          <c:x val="0.11"/>
+          <c:y val="0.05"/>
+          <c:w val="0.86"/>
+          <c:h val="0.8"/>
+        </c:manualLayout>
+      </c:layout>
       <c:areaChart>
         <c:grouping val="standard"/>
         <c:varyColors val="0"/>
@@ -503,7 +340,7 @@
               <c:strCache>
                 <c:ptCount val="1"/>
                 <c:pt idx="0">
-                  <c:v>Value</c:v>
+                  <c:v>Spend $</c:v>
                 </c:pt>
               </c:strCache>
             </c:strRef>
@@ -586,55 +423,55 @@
                 <c:formatCode>$#,##0;[Red]($#,##0);"-"</c:formatCode>
                 <c:ptCount val="17"/>
                 <c:pt idx="0">
-                  <c:v>26600</c:v>
+                  <c:v>0</c:v>
                 </c:pt>
                 <c:pt idx="1">
-                  <c:v>31800</c:v>
+                  <c:v>0</c:v>
                 </c:pt>
                 <c:pt idx="2">
-                  <c:v>29700</c:v>
+                  <c:v>0</c:v>
                 </c:pt>
                 <c:pt idx="3">
-                  <c:v>62700</c:v>
+                  <c:v>0</c:v>
                 </c:pt>
                 <c:pt idx="4">
-                  <c:v>61700</c:v>
+                  <c:v>0</c:v>
                 </c:pt>
                 <c:pt idx="5">
-                  <c:v>54500</c:v>
+                  <c:v>0</c:v>
                 </c:pt>
                 <c:pt idx="6">
-                  <c:v>61500</c:v>
+                  <c:v>0</c:v>
                 </c:pt>
                 <c:pt idx="7">
-                  <c:v>61700</c:v>
+                  <c:v>0</c:v>
                 </c:pt>
                 <c:pt idx="8">
-                  <c:v>52200</c:v>
+                  <c:v>0</c:v>
                 </c:pt>
                 <c:pt idx="9">
-                  <c:v>59063</c:v>
+                  <c:v>0</c:v>
                 </c:pt>
                 <c:pt idx="10">
-                  <c:v>61544</c:v>
+                  <c:v>0</c:v>
                 </c:pt>
                 <c:pt idx="11">
-                  <c:v>62137</c:v>
+                  <c:v>0</c:v>
                 </c:pt>
                 <c:pt idx="12">
-                  <c:v>69185</c:v>
+                  <c:v>0</c:v>
                 </c:pt>
                 <c:pt idx="13">
-                  <c:v>70164</c:v>
+                  <c:v>0</c:v>
                 </c:pt>
                 <c:pt idx="14">
-                  <c:v>68793</c:v>
+                  <c:v>0</c:v>
                 </c:pt>
                 <c:pt idx="15">
-                  <c:v>59785</c:v>
+                  <c:v>30502</c:v>
                 </c:pt>
                 <c:pt idx="16">
-                  <c:v>55759</c:v>
+                  <c:v>26508</c:v>
                 </c:pt>
               </c:numCache>
             </c:numRef>
@@ -676,12 +513,15 @@
         <c:auto val="1"/>
         <c:lblAlgn val="ctr"/>
         <c:lblOffset val="100"/>
+        <c:tickLblSkip val="2"/>
         <c:noMultiLvlLbl val="0"/>
       </c:catAx>
       <c:valAx>
         <c:axId val="-2100718248"/>
         <c:scaling>
           <c:orientation val="minMax"/>
+          <c:max val="40000.0"/>
+          <c:min val="0.0"/>
         </c:scaling>
         <c:delete val="0"/>
         <c:axPos val="l"/>
@@ -715,6 +555,7 @@
         <c:crossAx val="-2101159928"/>
         <c:crosses val="autoZero"/>
         <c:crossBetween val="midCat"/>
+        <c:majorUnit val="10000.0"/>
       </c:valAx>
     </c:plotArea>
     <c:plotVisOnly val="1"/>
@@ -737,6 +578,1586 @@
     <c:autoUpdate val="0"/>
   </c:externalData>
 </c:chartSpace>
+</file>
+
+<file path=ppt/charts/chart3.xml><?xml version="1.0" encoding="utf-8"?>
+<c:chartSpace xmlns:c="http://schemas.openxmlformats.org/drawingml/2006/chart" xmlns:a="http://schemas.openxmlformats.org/drawingml/2006/main" xmlns:r="http://schemas.openxmlformats.org/officeDocument/2006/relationships">
+  <c:date1904 val="0"/>
+  <c:roundedCorners val="0"/>
+  <c:chart>
+    <c:autoTitleDeleted val="1"/>
+    <c:plotArea>
+      <c:layout>
+        <c:manualLayout>
+          <c:layoutTarget val="inner"/>
+          <c:xMode val="edge"/>
+          <c:yMode val="edge"/>
+          <c:x val="0.11"/>
+          <c:y val="0.05"/>
+          <c:w val="0.86"/>
+          <c:h val="0.8"/>
+        </c:manualLayout>
+      </c:layout>
+      <c:areaChart>
+        <c:grouping val="standard"/>
+        <c:varyColors val="0"/>
+        <c:ser>
+          <c:idx val="0"/>
+          <c:order val="0"/>
+          <c:tx>
+            <c:strRef>
+              <c:f>Sheet1!$B$1</c:f>
+              <c:strCache>
+                <c:ptCount val="1"/>
+                <c:pt idx="0">
+                  <c:v>Spend $</c:v>
+                </c:pt>
+              </c:strCache>
+            </c:strRef>
+          </c:tx>
+          <c:spPr>
+            <a:solidFill>
+              <a:srgbClr val="0E9F6E">
+                <a:alpha val="25000"/>
+              </a:srgbClr>
+            </a:solidFill>
+            <a:ln w="31750">
+              <a:solidFill>
+                <a:srgbClr val="0E9F6E"/>
+              </a:solidFill>
+            </a:ln>
+          </c:spPr>
+          <c:cat>
+            <c:strRef>
+              <c:f>Sheet1!$A$2:$A$18</c:f>
+              <c:strCache>
+                <c:ptCount val="17"/>
+                <c:pt idx="0">
+                  <c:v>Oct 24</c:v>
+                </c:pt>
+                <c:pt idx="1">
+                  <c:v>Nov 24</c:v>
+                </c:pt>
+                <c:pt idx="2">
+                  <c:v>Dec 24</c:v>
+                </c:pt>
+                <c:pt idx="3">
+                  <c:v>Jan 25</c:v>
+                </c:pt>
+                <c:pt idx="4">
+                  <c:v>Feb 25</c:v>
+                </c:pt>
+                <c:pt idx="5">
+                  <c:v>Mar 25</c:v>
+                </c:pt>
+                <c:pt idx="6">
+                  <c:v>Apr 25</c:v>
+                </c:pt>
+                <c:pt idx="7">
+                  <c:v>May 25</c:v>
+                </c:pt>
+                <c:pt idx="8">
+                  <c:v>Jun 25</c:v>
+                </c:pt>
+                <c:pt idx="9">
+                  <c:v>Jul 25</c:v>
+                </c:pt>
+                <c:pt idx="10">
+                  <c:v>Aug 25</c:v>
+                </c:pt>
+                <c:pt idx="11">
+                  <c:v>Sep 25</c:v>
+                </c:pt>
+                <c:pt idx="12">
+                  <c:v>Oct 25</c:v>
+                </c:pt>
+                <c:pt idx="13">
+                  <c:v>Nov 25</c:v>
+                </c:pt>
+                <c:pt idx="14">
+                  <c:v>Dec 25</c:v>
+                </c:pt>
+                <c:pt idx="15">
+                  <c:v>Jan 26</c:v>
+                </c:pt>
+                <c:pt idx="16">
+                  <c:v>Feb 26</c:v>
+                </c:pt>
+              </c:strCache>
+            </c:strRef>
+          </c:cat>
+          <c:val>
+            <c:numRef>
+              <c:f>Sheet1!$B$2:$B$18</c:f>
+              <c:numCache>
+                <c:formatCode>$#,##0;[Red]($#,##0);"-"</c:formatCode>
+                <c:ptCount val="17"/>
+                <c:pt idx="0">
+                  <c:v>0</c:v>
+                </c:pt>
+                <c:pt idx="1">
+                  <c:v>0</c:v>
+                </c:pt>
+                <c:pt idx="2">
+                  <c:v>0</c:v>
+                </c:pt>
+                <c:pt idx="3">
+                  <c:v>0</c:v>
+                </c:pt>
+                <c:pt idx="4">
+                  <c:v>0</c:v>
+                </c:pt>
+                <c:pt idx="5">
+                  <c:v>0</c:v>
+                </c:pt>
+                <c:pt idx="6">
+                  <c:v>0</c:v>
+                </c:pt>
+                <c:pt idx="7">
+                  <c:v>0</c:v>
+                </c:pt>
+                <c:pt idx="8">
+                  <c:v>0</c:v>
+                </c:pt>
+                <c:pt idx="9">
+                  <c:v>17363</c:v>
+                </c:pt>
+                <c:pt idx="10">
+                  <c:v>21144</c:v>
+                </c:pt>
+                <c:pt idx="11">
+                  <c:v>17537</c:v>
+                </c:pt>
+                <c:pt idx="12">
+                  <c:v>21925</c:v>
+                </c:pt>
+                <c:pt idx="13">
+                  <c:v>21079</c:v>
+                </c:pt>
+                <c:pt idx="14">
+                  <c:v>19272</c:v>
+                </c:pt>
+                <c:pt idx="15">
+                  <c:v>21157</c:v>
+                </c:pt>
+                <c:pt idx="16">
+                  <c:v>20743</c:v>
+                </c:pt>
+              </c:numCache>
+            </c:numRef>
+          </c:val>
+        </c:ser>
+        <c:dLbls>
+          <c:showLegendKey val="0"/>
+          <c:showVal val="0"/>
+          <c:showCatName val="0"/>
+          <c:showSerName val="0"/>
+          <c:showPercent val="0"/>
+          <c:showBubbleSize val="0"/>
+        </c:dLbls>
+        <c:axId val="-2101159928"/>
+        <c:axId val="-2100718248"/>
+      </c:areaChart>
+      <c:catAx>
+        <c:axId val="-2101159928"/>
+        <c:scaling>
+          <c:orientation val="minMax"/>
+        </c:scaling>
+        <c:delete val="0"/>
+        <c:axPos val="b"/>
+        <c:numFmt formatCode="General" sourceLinked="1"/>
+        <c:majorTickMark val="out"/>
+        <c:minorTickMark val="none"/>
+        <c:tickLblPos val="nextTo"/>
+        <c:txPr>
+          <a:bodyPr/>
+          <a:lstStyle/>
+          <a:p>
+            <a:pPr>
+              <a:defRPr sz="1000"/>
+            </a:pPr>
+          </a:p>
+        </c:txPr>
+        <c:crossAx val="-2100718248"/>
+        <c:crosses val="autoZero"/>
+        <c:auto val="1"/>
+        <c:lblAlgn val="ctr"/>
+        <c:lblOffset val="100"/>
+        <c:tickLblSkip val="2"/>
+        <c:noMultiLvlLbl val="0"/>
+      </c:catAx>
+      <c:valAx>
+        <c:axId val="-2100718248"/>
+        <c:scaling>
+          <c:orientation val="minMax"/>
+          <c:max val="25000.0"/>
+          <c:min val="0.0"/>
+        </c:scaling>
+        <c:delete val="0"/>
+        <c:axPos val="l"/>
+        <c:majorGridlines>
+          <c:spPr>
+            <a:ln>
+              <a:solidFill>
+                <a:srgbClr val="E6EAE7"/>
+              </a:solidFill>
+            </a:ln>
+          </c:spPr>
+        </c:majorGridlines>
+        <c:numFmt formatCode="$#,##0;[Red]($#,##0);&quot;-&quot;" sourceLinked="0"/>
+        <c:majorTickMark val="out"/>
+        <c:minorTickMark val="none"/>
+        <c:tickLblPos val="nextTo"/>
+        <c:spPr>
+          <a:ln>
+            <a:noFill/>
+          </a:ln>
+        </c:spPr>
+        <c:txPr>
+          <a:bodyPr/>
+          <a:lstStyle/>
+          <a:p>
+            <a:pPr>
+              <a:defRPr sz="1000"/>
+            </a:pPr>
+          </a:p>
+        </c:txPr>
+        <c:crossAx val="-2101159928"/>
+        <c:crosses val="autoZero"/>
+        <c:crossBetween val="midCat"/>
+        <c:majorUnit val="5000.0"/>
+      </c:valAx>
+    </c:plotArea>
+    <c:plotVisOnly val="1"/>
+    <c:dispBlanksAs val="zero"/>
+    <c:showDLblsOverMax val="0"/>
+  </c:chart>
+  <c:txPr>
+    <a:bodyPr/>
+    <a:lstStyle/>
+    <a:p>
+      <a:pPr>
+        <a:defRPr sz="1800">
+          <a:latin typeface="Roboto"/>
+        </a:defRPr>
+      </a:pPr>
+      <a:endParaRPr/>
+    </a:p>
+  </c:txPr>
+  <c:externalData r:id="rId1">
+    <c:autoUpdate val="0"/>
+  </c:externalData>
+</c:chartSpace>
+</file>
+
+<file path=ppt/charts/chart4.xml><?xml version="1.0" encoding="utf-8"?>
+<c:chartSpace xmlns:c="http://schemas.openxmlformats.org/drawingml/2006/chart" xmlns:a="http://schemas.openxmlformats.org/drawingml/2006/main" xmlns:r="http://schemas.openxmlformats.org/officeDocument/2006/relationships">
+  <c:date1904 val="0"/>
+  <c:roundedCorners val="0"/>
+  <c:chart>
+    <c:autoTitleDeleted val="1"/>
+    <c:plotArea>
+      <c:layout>
+        <c:manualLayout>
+          <c:layoutTarget val="inner"/>
+          <c:xMode val="edge"/>
+          <c:yMode val="edge"/>
+          <c:x val="0.11"/>
+          <c:y val="0.05"/>
+          <c:w val="0.86"/>
+          <c:h val="0.8"/>
+        </c:manualLayout>
+      </c:layout>
+      <c:areaChart>
+        <c:grouping val="standard"/>
+        <c:varyColors val="0"/>
+        <c:ser>
+          <c:idx val="0"/>
+          <c:order val="0"/>
+          <c:tx>
+            <c:strRef>
+              <c:f>Sheet1!$B$1</c:f>
+              <c:strCache>
+                <c:ptCount val="1"/>
+                <c:pt idx="0">
+                  <c:v>Spend $</c:v>
+                </c:pt>
+              </c:strCache>
+            </c:strRef>
+          </c:tx>
+          <c:spPr>
+            <a:solidFill>
+              <a:srgbClr val="0E9F6E">
+                <a:alpha val="25000"/>
+              </a:srgbClr>
+            </a:solidFill>
+            <a:ln w="31750">
+              <a:solidFill>
+                <a:srgbClr val="0E9F6E"/>
+              </a:solidFill>
+            </a:ln>
+          </c:spPr>
+          <c:cat>
+            <c:strRef>
+              <c:f>Sheet1!$A$2:$A$18</c:f>
+              <c:strCache>
+                <c:ptCount val="17"/>
+                <c:pt idx="0">
+                  <c:v>Oct 24</c:v>
+                </c:pt>
+                <c:pt idx="1">
+                  <c:v>Nov 24</c:v>
+                </c:pt>
+                <c:pt idx="2">
+                  <c:v>Dec 24</c:v>
+                </c:pt>
+                <c:pt idx="3">
+                  <c:v>Jan 25</c:v>
+                </c:pt>
+                <c:pt idx="4">
+                  <c:v>Feb 25</c:v>
+                </c:pt>
+                <c:pt idx="5">
+                  <c:v>Mar 25</c:v>
+                </c:pt>
+                <c:pt idx="6">
+                  <c:v>Apr 25</c:v>
+                </c:pt>
+                <c:pt idx="7">
+                  <c:v>May 25</c:v>
+                </c:pt>
+                <c:pt idx="8">
+                  <c:v>Jun 25</c:v>
+                </c:pt>
+                <c:pt idx="9">
+                  <c:v>Jul 25</c:v>
+                </c:pt>
+                <c:pt idx="10">
+                  <c:v>Aug 25</c:v>
+                </c:pt>
+                <c:pt idx="11">
+                  <c:v>Sep 25</c:v>
+                </c:pt>
+                <c:pt idx="12">
+                  <c:v>Oct 25</c:v>
+                </c:pt>
+                <c:pt idx="13">
+                  <c:v>Nov 25</c:v>
+                </c:pt>
+                <c:pt idx="14">
+                  <c:v>Dec 25</c:v>
+                </c:pt>
+                <c:pt idx="15">
+                  <c:v>Jan 26</c:v>
+                </c:pt>
+                <c:pt idx="16">
+                  <c:v>Feb 26</c:v>
+                </c:pt>
+              </c:strCache>
+            </c:strRef>
+          </c:cat>
+          <c:val>
+            <c:numRef>
+              <c:f>Sheet1!$B$2:$B$18</c:f>
+              <c:numCache>
+                <c:formatCode>$#,##0;[Red]($#,##0);"-"</c:formatCode>
+                <c:ptCount val="17"/>
+                <c:pt idx="0">
+                  <c:v>0</c:v>
+                </c:pt>
+                <c:pt idx="1">
+                  <c:v>0</c:v>
+                </c:pt>
+                <c:pt idx="2">
+                  <c:v>0</c:v>
+                </c:pt>
+                <c:pt idx="3">
+                  <c:v>0</c:v>
+                </c:pt>
+                <c:pt idx="4">
+                  <c:v>0</c:v>
+                </c:pt>
+                <c:pt idx="5">
+                  <c:v>0</c:v>
+                </c:pt>
+                <c:pt idx="6">
+                  <c:v>0</c:v>
+                </c:pt>
+                <c:pt idx="7">
+                  <c:v>0</c:v>
+                </c:pt>
+                <c:pt idx="8">
+                  <c:v>0</c:v>
+                </c:pt>
+                <c:pt idx="9">
+                  <c:v>0</c:v>
+                </c:pt>
+                <c:pt idx="10">
+                  <c:v>0</c:v>
+                </c:pt>
+                <c:pt idx="11">
+                  <c:v>0</c:v>
+                </c:pt>
+                <c:pt idx="12">
+                  <c:v>5160</c:v>
+                </c:pt>
+                <c:pt idx="13">
+                  <c:v>4585</c:v>
+                </c:pt>
+                <c:pt idx="14">
+                  <c:v>5221</c:v>
+                </c:pt>
+                <c:pt idx="15">
+                  <c:v>4426</c:v>
+                </c:pt>
+                <c:pt idx="16">
+                  <c:v>5408</c:v>
+                </c:pt>
+              </c:numCache>
+            </c:numRef>
+          </c:val>
+        </c:ser>
+        <c:dLbls>
+          <c:showLegendKey val="0"/>
+          <c:showVal val="0"/>
+          <c:showCatName val="0"/>
+          <c:showSerName val="0"/>
+          <c:showPercent val="0"/>
+          <c:showBubbleSize val="0"/>
+        </c:dLbls>
+        <c:axId val="-2101159928"/>
+        <c:axId val="-2100718248"/>
+      </c:areaChart>
+      <c:catAx>
+        <c:axId val="-2101159928"/>
+        <c:scaling>
+          <c:orientation val="minMax"/>
+        </c:scaling>
+        <c:delete val="0"/>
+        <c:axPos val="b"/>
+        <c:numFmt formatCode="General" sourceLinked="1"/>
+        <c:majorTickMark val="out"/>
+        <c:minorTickMark val="none"/>
+        <c:tickLblPos val="nextTo"/>
+        <c:txPr>
+          <a:bodyPr/>
+          <a:lstStyle/>
+          <a:p>
+            <a:pPr>
+              <a:defRPr sz="1000"/>
+            </a:pPr>
+          </a:p>
+        </c:txPr>
+        <c:crossAx val="-2100718248"/>
+        <c:crosses val="autoZero"/>
+        <c:auto val="1"/>
+        <c:lblAlgn val="ctr"/>
+        <c:lblOffset val="100"/>
+        <c:tickLblSkip val="2"/>
+        <c:noMultiLvlLbl val="0"/>
+      </c:catAx>
+      <c:valAx>
+        <c:axId val="-2100718248"/>
+        <c:scaling>
+          <c:orientation val="minMax"/>
+          <c:max val="6000.0"/>
+          <c:min val="0.0"/>
+        </c:scaling>
+        <c:delete val="0"/>
+        <c:axPos val="l"/>
+        <c:majorGridlines>
+          <c:spPr>
+            <a:ln>
+              <a:solidFill>
+                <a:srgbClr val="E6EAE7"/>
+              </a:solidFill>
+            </a:ln>
+          </c:spPr>
+        </c:majorGridlines>
+        <c:numFmt formatCode="$#,##0;[Red]($#,##0);&quot;-&quot;" sourceLinked="0"/>
+        <c:majorTickMark val="out"/>
+        <c:minorTickMark val="none"/>
+        <c:tickLblPos val="nextTo"/>
+        <c:spPr>
+          <a:ln>
+            <a:noFill/>
+          </a:ln>
+        </c:spPr>
+        <c:txPr>
+          <a:bodyPr/>
+          <a:lstStyle/>
+          <a:p>
+            <a:pPr>
+              <a:defRPr sz="1000"/>
+            </a:pPr>
+          </a:p>
+        </c:txPr>
+        <c:crossAx val="-2101159928"/>
+        <c:crosses val="autoZero"/>
+        <c:crossBetween val="midCat"/>
+        <c:majorUnit val="2000.0"/>
+      </c:valAx>
+    </c:plotArea>
+    <c:plotVisOnly val="1"/>
+    <c:dispBlanksAs val="zero"/>
+    <c:showDLblsOverMax val="0"/>
+  </c:chart>
+  <c:txPr>
+    <a:bodyPr/>
+    <a:lstStyle/>
+    <a:p>
+      <a:pPr>
+        <a:defRPr sz="1800">
+          <a:latin typeface="Roboto"/>
+        </a:defRPr>
+      </a:pPr>
+      <a:endParaRPr/>
+    </a:p>
+  </c:txPr>
+  <c:externalData r:id="rId1">
+    <c:autoUpdate val="0"/>
+  </c:externalData>
+</c:chartSpace>
+</file>
+
+<file path=ppt/charts/chart5.xml><?xml version="1.0" encoding="utf-8"?>
+<c:chartSpace xmlns:c="http://schemas.openxmlformats.org/drawingml/2006/chart" xmlns:a="http://schemas.openxmlformats.org/drawingml/2006/main" xmlns:r="http://schemas.openxmlformats.org/officeDocument/2006/relationships">
+  <c:date1904 val="0"/>
+  <c:roundedCorners val="0"/>
+  <c:chart>
+    <c:autoTitleDeleted val="1"/>
+    <c:plotArea>
+      <c:layout>
+        <c:manualLayout>
+          <c:layoutTarget val="inner"/>
+          <c:xMode val="edge"/>
+          <c:yMode val="edge"/>
+          <c:x val="0.11"/>
+          <c:y val="0.05"/>
+          <c:w val="0.86"/>
+          <c:h val="0.8"/>
+        </c:manualLayout>
+      </c:layout>
+      <c:areaChart>
+        <c:grouping val="standard"/>
+        <c:varyColors val="0"/>
+        <c:ser>
+          <c:idx val="0"/>
+          <c:order val="0"/>
+          <c:tx>
+            <c:strRef>
+              <c:f>Sheet1!$B$1</c:f>
+              <c:strCache>
+                <c:ptCount val="1"/>
+                <c:pt idx="0">
+                  <c:v>Spend $</c:v>
+                </c:pt>
+              </c:strCache>
+            </c:strRef>
+          </c:tx>
+          <c:spPr>
+            <a:solidFill>
+              <a:srgbClr val="0E9F6E">
+                <a:alpha val="25000"/>
+              </a:srgbClr>
+            </a:solidFill>
+            <a:ln w="31750">
+              <a:solidFill>
+                <a:srgbClr val="0E9F6E"/>
+              </a:solidFill>
+            </a:ln>
+          </c:spPr>
+          <c:cat>
+            <c:strRef>
+              <c:f>Sheet1!$A$2:$A$18</c:f>
+              <c:strCache>
+                <c:ptCount val="17"/>
+                <c:pt idx="0">
+                  <c:v>Oct 24</c:v>
+                </c:pt>
+                <c:pt idx="1">
+                  <c:v>Nov 24</c:v>
+                </c:pt>
+                <c:pt idx="2">
+                  <c:v>Dec 24</c:v>
+                </c:pt>
+                <c:pt idx="3">
+                  <c:v>Jan 25</c:v>
+                </c:pt>
+                <c:pt idx="4">
+                  <c:v>Feb 25</c:v>
+                </c:pt>
+                <c:pt idx="5">
+                  <c:v>Mar 25</c:v>
+                </c:pt>
+                <c:pt idx="6">
+                  <c:v>Apr 25</c:v>
+                </c:pt>
+                <c:pt idx="7">
+                  <c:v>May 25</c:v>
+                </c:pt>
+                <c:pt idx="8">
+                  <c:v>Jun 25</c:v>
+                </c:pt>
+                <c:pt idx="9">
+                  <c:v>Jul 25</c:v>
+                </c:pt>
+                <c:pt idx="10">
+                  <c:v>Aug 25</c:v>
+                </c:pt>
+                <c:pt idx="11">
+                  <c:v>Sep 25</c:v>
+                </c:pt>
+                <c:pt idx="12">
+                  <c:v>Oct 25</c:v>
+                </c:pt>
+                <c:pt idx="13">
+                  <c:v>Nov 25</c:v>
+                </c:pt>
+                <c:pt idx="14">
+                  <c:v>Dec 25</c:v>
+                </c:pt>
+                <c:pt idx="15">
+                  <c:v>Jan 26</c:v>
+                </c:pt>
+                <c:pt idx="16">
+                  <c:v>Feb 26</c:v>
+                </c:pt>
+              </c:strCache>
+            </c:strRef>
+          </c:cat>
+          <c:val>
+            <c:numRef>
+              <c:f>Sheet1!$B$2:$B$18</c:f>
+              <c:numCache>
+                <c:formatCode>$#,##0;[Red]($#,##0);"-"</c:formatCode>
+                <c:ptCount val="17"/>
+                <c:pt idx="0">
+                  <c:v>0</c:v>
+                </c:pt>
+                <c:pt idx="1">
+                  <c:v>0</c:v>
+                </c:pt>
+                <c:pt idx="2">
+                  <c:v>0</c:v>
+                </c:pt>
+                <c:pt idx="3">
+                  <c:v>0</c:v>
+                </c:pt>
+                <c:pt idx="4">
+                  <c:v>0</c:v>
+                </c:pt>
+                <c:pt idx="5">
+                  <c:v>0</c:v>
+                </c:pt>
+                <c:pt idx="6">
+                  <c:v>0</c:v>
+                </c:pt>
+                <c:pt idx="7">
+                  <c:v>0</c:v>
+                </c:pt>
+                <c:pt idx="8">
+                  <c:v>0</c:v>
+                </c:pt>
+                <c:pt idx="9">
+                  <c:v>3400</c:v>
+                </c:pt>
+                <c:pt idx="10">
+                  <c:v>3500</c:v>
+                </c:pt>
+                <c:pt idx="11">
+                  <c:v>4000</c:v>
+                </c:pt>
+                <c:pt idx="12">
+                  <c:v>3200</c:v>
+                </c:pt>
+                <c:pt idx="13">
+                  <c:v>3100</c:v>
+                </c:pt>
+                <c:pt idx="14">
+                  <c:v>3800</c:v>
+                </c:pt>
+                <c:pt idx="15">
+                  <c:v>3700</c:v>
+                </c:pt>
+                <c:pt idx="16">
+                  <c:v>3100</c:v>
+                </c:pt>
+              </c:numCache>
+            </c:numRef>
+          </c:val>
+        </c:ser>
+        <c:dLbls>
+          <c:showLegendKey val="0"/>
+          <c:showVal val="0"/>
+          <c:showCatName val="0"/>
+          <c:showSerName val="0"/>
+          <c:showPercent val="0"/>
+          <c:showBubbleSize val="0"/>
+        </c:dLbls>
+        <c:axId val="-2101159928"/>
+        <c:axId val="-2100718248"/>
+      </c:areaChart>
+      <c:catAx>
+        <c:axId val="-2101159928"/>
+        <c:scaling>
+          <c:orientation val="minMax"/>
+        </c:scaling>
+        <c:delete val="0"/>
+        <c:axPos val="b"/>
+        <c:numFmt formatCode="General" sourceLinked="1"/>
+        <c:majorTickMark val="out"/>
+        <c:minorTickMark val="none"/>
+        <c:tickLblPos val="nextTo"/>
+        <c:txPr>
+          <a:bodyPr/>
+          <a:lstStyle/>
+          <a:p>
+            <a:pPr>
+              <a:defRPr sz="1000"/>
+            </a:pPr>
+          </a:p>
+        </c:txPr>
+        <c:crossAx val="-2100718248"/>
+        <c:crosses val="autoZero"/>
+        <c:auto val="1"/>
+        <c:lblAlgn val="ctr"/>
+        <c:lblOffset val="100"/>
+        <c:tickLblSkip val="2"/>
+        <c:noMultiLvlLbl val="0"/>
+      </c:catAx>
+      <c:valAx>
+        <c:axId val="-2100718248"/>
+        <c:scaling>
+          <c:orientation val="minMax"/>
+          <c:max val="5000.0"/>
+          <c:min val="0.0"/>
+        </c:scaling>
+        <c:delete val="0"/>
+        <c:axPos val="l"/>
+        <c:majorGridlines>
+          <c:spPr>
+            <a:ln>
+              <a:solidFill>
+                <a:srgbClr val="E6EAE7"/>
+              </a:solidFill>
+            </a:ln>
+          </c:spPr>
+        </c:majorGridlines>
+        <c:numFmt formatCode="$#,##0;[Red]($#,##0);&quot;-&quot;" sourceLinked="0"/>
+        <c:majorTickMark val="out"/>
+        <c:minorTickMark val="none"/>
+        <c:tickLblPos val="nextTo"/>
+        <c:spPr>
+          <a:ln>
+            <a:noFill/>
+          </a:ln>
+        </c:spPr>
+        <c:txPr>
+          <a:bodyPr/>
+          <a:lstStyle/>
+          <a:p>
+            <a:pPr>
+              <a:defRPr sz="1000"/>
+            </a:pPr>
+          </a:p>
+        </c:txPr>
+        <c:crossAx val="-2101159928"/>
+        <c:crosses val="autoZero"/>
+        <c:crossBetween val="midCat"/>
+        <c:majorUnit val="1000.0"/>
+      </c:valAx>
+    </c:plotArea>
+    <c:plotVisOnly val="1"/>
+    <c:dispBlanksAs val="zero"/>
+    <c:showDLblsOverMax val="0"/>
+  </c:chart>
+  <c:txPr>
+    <a:bodyPr/>
+    <a:lstStyle/>
+    <a:p>
+      <a:pPr>
+        <a:defRPr sz="1800">
+          <a:latin typeface="Roboto"/>
+        </a:defRPr>
+      </a:pPr>
+      <a:endParaRPr/>
+    </a:p>
+  </c:txPr>
+  <c:externalData r:id="rId1">
+    <c:autoUpdate val="0"/>
+  </c:externalData>
+</c:chartSpace>
+</file>
+
+<file path=ppt/notesMasters/notesMaster1.xml><?xml version="1.0" encoding="utf-8"?>
+<p:notesMaster xmlns:a="http://schemas.openxmlformats.org/drawingml/2006/main" xmlns:p="http://schemas.openxmlformats.org/presentationml/2006/main" xmlns:r="http://schemas.openxmlformats.org/officeDocument/2006/relationships">
+  <p:cSld>
+    <p:bg>
+      <p:bgRef idx="1001">
+        <a:schemeClr val="bg1"/>
+      </p:bgRef>
+    </p:bg>
+    <p:spTree>
+      <p:nvGrpSpPr>
+        <p:cNvPr id="1" name=""/>
+        <p:cNvGrpSpPr/>
+        <p:nvPr/>
+      </p:nvGrpSpPr>
+      <p:grpSpPr>
+        <a:xfrm>
+          <a:off x="0" y="0"/>
+          <a:ext cx="0" cy="0"/>
+          <a:chOff x="0" y="0"/>
+          <a:chExt cx="0" cy="0"/>
+        </a:xfrm>
+      </p:grpSpPr>
+      <p:sp>
+        <p:nvSpPr>
+          <p:cNvPr id="2" name="Header Placeholder 1"/>
+          <p:cNvSpPr>
+            <a:spLocks noGrp="1"/>
+          </p:cNvSpPr>
+          <p:nvPr>
+            <p:ph type="hdr" sz="quarter"/>
+          </p:nvPr>
+        </p:nvSpPr>
+        <p:spPr>
+          <a:xfrm>
+            <a:off x="0" y="0"/>
+            <a:ext cx="2971800" cy="457200"/>
+          </a:xfrm>
+          <a:prstGeom prst="rect">
+            <a:avLst/>
+          </a:prstGeom>
+        </p:spPr>
+        <p:txBody>
+          <a:bodyPr vert="horz" lIns="91440" tIns="45720" rIns="91440" bIns="45720" rtlCol="0"/>
+          <a:lstStyle>
+            <a:lvl1pPr algn="l">
+              <a:defRPr sz="1200"/>
+            </a:lvl1pPr>
+          </a:lstStyle>
+          <a:p>
+            <a:endParaRPr lang="en-US"/>
+          </a:p>
+        </p:txBody>
+      </p:sp>
+      <p:sp>
+        <p:nvSpPr>
+          <p:cNvPr id="3" name="Date Placeholder 2"/>
+          <p:cNvSpPr>
+            <a:spLocks noGrp="1"/>
+          </p:cNvSpPr>
+          <p:nvPr>
+            <p:ph type="dt" idx="1"/>
+          </p:nvPr>
+        </p:nvSpPr>
+        <p:spPr>
+          <a:xfrm>
+            <a:off x="3884613" y="0"/>
+            <a:ext cx="2971800" cy="457200"/>
+          </a:xfrm>
+          <a:prstGeom prst="rect">
+            <a:avLst/>
+          </a:prstGeom>
+        </p:spPr>
+        <p:txBody>
+          <a:bodyPr vert="horz" lIns="91440" tIns="45720" rIns="91440" bIns="45720" rtlCol="0"/>
+          <a:lstStyle>
+            <a:lvl1pPr algn="r">
+              <a:defRPr sz="1200"/>
+            </a:lvl1pPr>
+          </a:lstStyle>
+          <a:p>
+            <a:fld id="{0F89C1C7-3DCD-1040-A9CF-14679D8B5DDD}" type="datetimeFigureOut">
+              <a:rPr lang="en-US" smtClean="0"/>
+              <a:t>10/17/16</a:t>
+            </a:fld>
+            <a:endParaRPr lang="en-US"/>
+          </a:p>
+        </p:txBody>
+      </p:sp>
+      <p:sp>
+        <p:nvSpPr>
+          <p:cNvPr id="4" name="Slide Image Placeholder 3"/>
+          <p:cNvSpPr>
+            <a:spLocks noGrp="1" noRot="1" noChangeAspect="1"/>
+          </p:cNvSpPr>
+          <p:nvPr>
+            <p:ph type="sldImg" idx="2"/>
+          </p:nvPr>
+        </p:nvSpPr>
+        <p:spPr>
+          <a:xfrm>
+            <a:off x="1143000" y="685800"/>
+            <a:ext cx="4572000" cy="3429000"/>
+          </a:xfrm>
+          <a:prstGeom prst="rect">
+            <a:avLst/>
+          </a:prstGeom>
+          <a:noFill/>
+          <a:ln w="12700">
+            <a:solidFill>
+              <a:prstClr val="black"/>
+            </a:solidFill>
+          </a:ln>
+        </p:spPr>
+        <p:txBody>
+          <a:bodyPr vert="horz" lIns="91440" tIns="45720" rIns="91440" bIns="45720" rtlCol="0" anchor="ctr"/>
+          <a:lstStyle/>
+          <a:p>
+            <a:endParaRPr lang="en-US"/>
+          </a:p>
+        </p:txBody>
+      </p:sp>
+      <p:sp>
+        <p:nvSpPr>
+          <p:cNvPr id="5" name="Notes Placeholder 4"/>
+          <p:cNvSpPr>
+            <a:spLocks noGrp="1"/>
+          </p:cNvSpPr>
+          <p:nvPr>
+            <p:ph type="body" sz="quarter" idx="3"/>
+          </p:nvPr>
+        </p:nvSpPr>
+        <p:spPr>
+          <a:xfrm>
+            <a:off x="685800" y="4343400"/>
+            <a:ext cx="5486400" cy="4114800"/>
+          </a:xfrm>
+          <a:prstGeom prst="rect">
+            <a:avLst/>
+          </a:prstGeom>
+        </p:spPr>
+        <p:txBody>
+          <a:bodyPr vert="horz" lIns="91440" tIns="45720" rIns="91440" bIns="45720" rtlCol="0"/>
+          <a:lstStyle/>
+          <a:p>
+            <a:pPr lvl="0"/>
+            <a:r>
+              <a:rPr lang="en-US" smtClean="0"/>
+              <a:t>Click to edit Master text styles</a:t>
+            </a:r>
+          </a:p>
+          <a:p>
+            <a:pPr lvl="1"/>
+            <a:r>
+              <a:rPr lang="en-US" smtClean="0"/>
+              <a:t>Second level</a:t>
+            </a:r>
+          </a:p>
+          <a:p>
+            <a:pPr lvl="2"/>
+            <a:r>
+              <a:rPr lang="en-US" smtClean="0"/>
+              <a:t>Third level</a:t>
+            </a:r>
+          </a:p>
+          <a:p>
+            <a:pPr lvl="3"/>
+            <a:r>
+              <a:rPr lang="en-US" smtClean="0"/>
+              <a:t>Fourth level</a:t>
+            </a:r>
+          </a:p>
+          <a:p>
+            <a:pPr lvl="4"/>
+            <a:r>
+              <a:rPr lang="en-US" smtClean="0"/>
+              <a:t>Fifth level</a:t>
+            </a:r>
+            <a:endParaRPr lang="en-US"/>
+          </a:p>
+        </p:txBody>
+      </p:sp>
+      <p:sp>
+        <p:nvSpPr>
+          <p:cNvPr id="6" name="Footer Placeholder 5"/>
+          <p:cNvSpPr>
+            <a:spLocks noGrp="1"/>
+          </p:cNvSpPr>
+          <p:nvPr>
+            <p:ph type="ftr" sz="quarter" idx="4"/>
+          </p:nvPr>
+        </p:nvSpPr>
+        <p:spPr>
+          <a:xfrm>
+            <a:off x="0" y="8685213"/>
+            <a:ext cx="2971800" cy="457200"/>
+          </a:xfrm>
+          <a:prstGeom prst="rect">
+            <a:avLst/>
+          </a:prstGeom>
+        </p:spPr>
+        <p:txBody>
+          <a:bodyPr vert="horz" lIns="91440" tIns="45720" rIns="91440" bIns="45720" rtlCol="0" anchor="b"/>
+          <a:lstStyle>
+            <a:lvl1pPr algn="l">
+              <a:defRPr sz="1200"/>
+            </a:lvl1pPr>
+          </a:lstStyle>
+          <a:p>
+            <a:endParaRPr lang="en-US"/>
+          </a:p>
+        </p:txBody>
+      </p:sp>
+      <p:sp>
+        <p:nvSpPr>
+          <p:cNvPr id="7" name="Slide Number Placeholder 6"/>
+          <p:cNvSpPr>
+            <a:spLocks noGrp="1"/>
+          </p:cNvSpPr>
+          <p:nvPr>
+            <p:ph type="sldNum" sz="quarter" idx="5"/>
+          </p:nvPr>
+        </p:nvSpPr>
+        <p:spPr>
+          <a:xfrm>
+            <a:off x="3884613" y="8685213"/>
+            <a:ext cx="2971800" cy="457200"/>
+          </a:xfrm>
+          <a:prstGeom prst="rect">
+            <a:avLst/>
+          </a:prstGeom>
+        </p:spPr>
+        <p:txBody>
+          <a:bodyPr vert="horz" lIns="91440" tIns="45720" rIns="91440" bIns="45720" rtlCol="0" anchor="b"/>
+          <a:lstStyle>
+            <a:lvl1pPr algn="r">
+              <a:defRPr sz="1200"/>
+            </a:lvl1pPr>
+          </a:lstStyle>
+          <a:p>
+            <a:fld id="{BB5E49A5-4136-284D-997B-48E1D791AD67}" type="slidenum">
+              <a:rPr lang="en-US" smtClean="0"/>
+              <a:t>‹#›</a:t>
+            </a:fld>
+            <a:endParaRPr lang="en-US"/>
+          </a:p>
+        </p:txBody>
+      </p:sp>
+    </p:spTree>
+    <p:extLst>
+      <p:ext uri="{BB962C8B-B14F-4D97-AF65-F5344CB8AC3E}">
+        <p14:creationId xmlns:p14="http://schemas.microsoft.com/office/powerpoint/2010/main" val="2623252185"/>
+      </p:ext>
+    </p:extLst>
+  </p:cSld>
+  <p:clrMap bg1="lt1" tx1="dk1" bg2="lt2" tx2="dk2" accent1="accent1" accent2="accent2" accent3="accent3" accent4="accent4" accent5="accent5" accent6="accent6" hlink="hlink" folHlink="folHlink"/>
+  <p:notesStyle>
+    <a:lvl1pPr marL="0" algn="l" defTabSz="457200" rtl="0" eaLnBrk="1" latinLnBrk="0" hangingPunct="1">
+      <a:defRPr sz="1200" kern="1200">
+        <a:solidFill>
+          <a:schemeClr val="tx1"/>
+        </a:solidFill>
+        <a:latin typeface="+mn-lt"/>
+        <a:ea typeface="+mn-ea"/>
+        <a:cs typeface="+mn-cs"/>
+      </a:defRPr>
+    </a:lvl1pPr>
+    <a:lvl2pPr marL="457200" algn="l" defTabSz="457200" rtl="0" eaLnBrk="1" latinLnBrk="0" hangingPunct="1">
+      <a:defRPr sz="1200" kern="1200">
+        <a:solidFill>
+          <a:schemeClr val="tx1"/>
+        </a:solidFill>
+        <a:latin typeface="+mn-lt"/>
+        <a:ea typeface="+mn-ea"/>
+        <a:cs typeface="+mn-cs"/>
+      </a:defRPr>
+    </a:lvl2pPr>
+    <a:lvl3pPr marL="914400" algn="l" defTabSz="457200" rtl="0" eaLnBrk="1" latinLnBrk="0" hangingPunct="1">
+      <a:defRPr sz="1200" kern="1200">
+        <a:solidFill>
+          <a:schemeClr val="tx1"/>
+        </a:solidFill>
+        <a:latin typeface="+mn-lt"/>
+        <a:ea typeface="+mn-ea"/>
+        <a:cs typeface="+mn-cs"/>
+      </a:defRPr>
+    </a:lvl3pPr>
+    <a:lvl4pPr marL="1371600" algn="l" defTabSz="457200" rtl="0" eaLnBrk="1" latinLnBrk="0" hangingPunct="1">
+      <a:defRPr sz="1200" kern="1200">
+        <a:solidFill>
+          <a:schemeClr val="tx1"/>
+        </a:solidFill>
+        <a:latin typeface="+mn-lt"/>
+        <a:ea typeface="+mn-ea"/>
+        <a:cs typeface="+mn-cs"/>
+      </a:defRPr>
+    </a:lvl4pPr>
+    <a:lvl5pPr marL="1828800" algn="l" defTabSz="457200" rtl="0" eaLnBrk="1" latinLnBrk="0" hangingPunct="1">
+      <a:defRPr sz="1200" kern="1200">
+        <a:solidFill>
+          <a:schemeClr val="tx1"/>
+        </a:solidFill>
+        <a:latin typeface="+mn-lt"/>
+        <a:ea typeface="+mn-ea"/>
+        <a:cs typeface="+mn-cs"/>
+      </a:defRPr>
+    </a:lvl5pPr>
+    <a:lvl6pPr marL="2286000" algn="l" defTabSz="457200" rtl="0" eaLnBrk="1" latinLnBrk="0" hangingPunct="1">
+      <a:defRPr sz="1200" kern="1200">
+        <a:solidFill>
+          <a:schemeClr val="tx1"/>
+        </a:solidFill>
+        <a:latin typeface="+mn-lt"/>
+        <a:ea typeface="+mn-ea"/>
+        <a:cs typeface="+mn-cs"/>
+      </a:defRPr>
+    </a:lvl6pPr>
+    <a:lvl7pPr marL="2743200" algn="l" defTabSz="457200" rtl="0" eaLnBrk="1" latinLnBrk="0" hangingPunct="1">
+      <a:defRPr sz="1200" kern="1200">
+        <a:solidFill>
+          <a:schemeClr val="tx1"/>
+        </a:solidFill>
+        <a:latin typeface="+mn-lt"/>
+        <a:ea typeface="+mn-ea"/>
+        <a:cs typeface="+mn-cs"/>
+      </a:defRPr>
+    </a:lvl7pPr>
+    <a:lvl8pPr marL="3200400" algn="l" defTabSz="457200" rtl="0" eaLnBrk="1" latinLnBrk="0" hangingPunct="1">
+      <a:defRPr sz="1200" kern="1200">
+        <a:solidFill>
+          <a:schemeClr val="tx1"/>
+        </a:solidFill>
+        <a:latin typeface="+mn-lt"/>
+        <a:ea typeface="+mn-ea"/>
+        <a:cs typeface="+mn-cs"/>
+      </a:defRPr>
+    </a:lvl8pPr>
+    <a:lvl9pPr marL="3657600" algn="l" defTabSz="457200" rtl="0" eaLnBrk="1" latinLnBrk="0" hangingPunct="1">
+      <a:defRPr sz="1200" kern="1200">
+        <a:solidFill>
+          <a:schemeClr val="tx1"/>
+        </a:solidFill>
+        <a:latin typeface="+mn-lt"/>
+        <a:ea typeface="+mn-ea"/>
+        <a:cs typeface="+mn-cs"/>
+      </a:defRPr>
+    </a:lvl9pPr>
+  </p:notesStyle>
+</p:notesMaster>
+</file>
+
+<file path=ppt/notesSlides/notesSlide1.xml><?xml version="1.0" encoding="utf-8"?>
+<p:notes xmlns:a="http://schemas.openxmlformats.org/drawingml/2006/main" xmlns:p="http://schemas.openxmlformats.org/presentationml/2006/main" xmlns:r="http://schemas.openxmlformats.org/officeDocument/2006/relationships">
+  <p:cSld>
+    <p:spTree>
+      <p:nvGrpSpPr>
+        <p:cNvPr id="1" name=""/>
+        <p:cNvGrpSpPr/>
+        <p:nvPr/>
+      </p:nvGrpSpPr>
+      <p:grpSpPr>
+        <a:xfrm>
+          <a:off x="0" y="0"/>
+          <a:ext cx="0" cy="0"/>
+          <a:chOff x="0" y="0"/>
+          <a:chExt cx="0" cy="0"/>
+        </a:xfrm>
+      </p:grpSpPr>
+      <p:sp>
+        <p:nvSpPr>
+          <p:cNvPr id="2" name="Slide Image Placeholder 1"/>
+          <p:cNvSpPr>
+            <a:spLocks noGrp="1"/>
+          </p:cNvSpPr>
+          <p:nvPr>
+            <p:ph type="sldImg" idx="2"/>
+          </p:nvPr>
+        </p:nvSpPr>
+        <p:spPr/>
+      </p:sp>
+      <p:sp>
+        <p:nvSpPr>
+          <p:cNvPr id="3" name="Notes Placeholder 2"/>
+          <p:cNvSpPr>
+            <a:spLocks noGrp="1"/>
+          </p:cNvSpPr>
+          <p:nvPr>
+            <p:ph type="body" idx="3" sz="quarter"/>
+          </p:nvPr>
+        </p:nvSpPr>
+        <p:spPr/>
+        <p:txBody>
+          <a:bodyPr/>
+          <a:lstStyle/>
+          <a:p>
+            <a:r>
+              <a:t>What does each program really cost?. Sample Community Services Ltd. Period: February 2026. Each program's full cost: what its grant pays for, plus its fair share of the costs no single grant covers (untied program costs and administration, shared by grant spending). Pick a program and every chart and note follows it.</a:t>
+            </a:r>
+          </a:p>
+        </p:txBody>
+      </p:sp>
+      <p:sp>
+        <p:nvSpPr>
+          <p:cNvPr id="4" name="Slide Number Placeholder 3"/>
+          <p:cNvSpPr>
+            <a:spLocks noGrp="1"/>
+          </p:cNvSpPr>
+          <p:nvPr>
+            <p:ph type="sldNum" idx="5" sz="quarter"/>
+          </p:nvPr>
+        </p:nvSpPr>
+        <p:spPr/>
+      </p:sp>
+    </p:spTree>
+  </p:cSld>
+  <p:clrMapOvr>
+    <a:masterClrMapping/>
+  </p:clrMapOvr>
+</p:notes>
+</file>
+
+<file path=ppt/notesSlides/notesSlide2.xml><?xml version="1.0" encoding="utf-8"?>
+<p:notes xmlns:a="http://schemas.openxmlformats.org/drawingml/2006/main" xmlns:p="http://schemas.openxmlformats.org/presentationml/2006/main" xmlns:r="http://schemas.openxmlformats.org/officeDocument/2006/relationships">
+  <p:cSld>
+    <p:spTree>
+      <p:nvGrpSpPr>
+        <p:cNvPr id="1" name=""/>
+        <p:cNvGrpSpPr/>
+        <p:nvPr/>
+      </p:nvGrpSpPr>
+      <p:grpSpPr>
+        <a:xfrm>
+          <a:off x="0" y="0"/>
+          <a:ext cx="0" cy="0"/>
+          <a:chOff x="0" y="0"/>
+          <a:chExt cx="0" cy="0"/>
+        </a:xfrm>
+      </p:grpSpPr>
+      <p:sp>
+        <p:nvSpPr>
+          <p:cNvPr id="2" name="Slide Image Placeholder 1"/>
+          <p:cNvSpPr>
+            <a:spLocks noGrp="1"/>
+          </p:cNvSpPr>
+          <p:nvPr>
+            <p:ph type="sldImg" idx="2"/>
+          </p:nvPr>
+        </p:nvSpPr>
+        <p:spPr/>
+      </p:sp>
+      <p:sp>
+        <p:nvSpPr>
+          <p:cNvPr id="3" name="Notes Placeholder 2"/>
+          <p:cNvSpPr>
+            <a:spLocks noGrp="1"/>
+          </p:cNvSpPr>
+          <p:nvPr>
+            <p:ph type="body" idx="3" sz="quarter"/>
+          </p:nvPr>
+        </p:nvSpPr>
+        <p:spPr/>
+        <p:txBody>
+          <a:bodyPr/>
+          <a:lstStyle/>
+          <a:p>
+            <a:r>
+              <a:t>All programs. Housing support is the biggest program: $51,514 in February once its share of untied program costs and administration is added to $26,508 of grant spending. Shared costs add 94.3% on top of grant spending across all programs. The full cost (not just the grant line) is the number for renewal applications, where the funder lets you recover a share of overheads. Pick a program above to see it on its own.</a:t>
+            </a:r>
+          </a:p>
+        </p:txBody>
+      </p:sp>
+      <p:sp>
+        <p:nvSpPr>
+          <p:cNvPr id="4" name="Slide Number Placeholder 3"/>
+          <p:cNvSpPr>
+            <a:spLocks noGrp="1"/>
+          </p:cNvSpPr>
+          <p:nvPr>
+            <p:ph type="sldNum" idx="5" sz="quarter"/>
+          </p:nvPr>
+        </p:nvSpPr>
+        <p:spPr/>
+      </p:sp>
+    </p:spTree>
+  </p:cSld>
+  <p:clrMapOvr>
+    <a:masterClrMapping/>
+  </p:clrMapOvr>
+</p:notes>
+</file>
+
+<file path=ppt/notesSlides/notesSlide3.xml><?xml version="1.0" encoding="utf-8"?>
+<p:notes xmlns:a="http://schemas.openxmlformats.org/drawingml/2006/main" xmlns:p="http://schemas.openxmlformats.org/presentationml/2006/main" xmlns:r="http://schemas.openxmlformats.org/officeDocument/2006/relationships">
+  <p:cSld>
+    <p:spTree>
+      <p:nvGrpSpPr>
+        <p:cNvPr id="1" name=""/>
+        <p:cNvGrpSpPr/>
+        <p:nvPr/>
+      </p:nvGrpSpPr>
+      <p:grpSpPr>
+        <a:xfrm>
+          <a:off x="0" y="0"/>
+          <a:ext cx="0" cy="0"/>
+          <a:chOff x="0" y="0"/>
+          <a:chExt cx="0" cy="0"/>
+        </a:xfrm>
+      </p:grpSpPr>
+      <p:sp>
+        <p:nvSpPr>
+          <p:cNvPr id="2" name="Slide Image Placeholder 1"/>
+          <p:cNvSpPr>
+            <a:spLocks noGrp="1"/>
+          </p:cNvSpPr>
+          <p:nvPr>
+            <p:ph type="sldImg" idx="2"/>
+          </p:nvPr>
+        </p:nvSpPr>
+        <p:spPr/>
+      </p:sp>
+      <p:sp>
+        <p:nvSpPr>
+          <p:cNvPr id="3" name="Notes Placeholder 2"/>
+          <p:cNvSpPr>
+            <a:spLocks noGrp="1"/>
+          </p:cNvSpPr>
+          <p:nvPr>
+            <p:ph type="body" idx="3" sz="quarter"/>
+          </p:nvPr>
+        </p:nvSpPr>
+        <p:spPr/>
+        <p:txBody>
+          <a:bodyPr/>
+          <a:lstStyle/>
+          <a:p>
+            <a:r>
+              <a:t>Housing support. Housing support cost $51,514 in full in February: $26,508 paid by the State Housing Program grant, and $25,006 of shared costs no grant covers. It has spent 95.0% of its budget to date, with $302,990 left and 10 months to go. The full cost is $51,514 a month; $25,006 of it is shared cost the grant doesn't pay for. Worth asking for as much of it as the funder allows at renewal.</a:t>
+            </a:r>
+          </a:p>
+        </p:txBody>
+      </p:sp>
+      <p:sp>
+        <p:nvSpPr>
+          <p:cNvPr id="4" name="Slide Number Placeholder 3"/>
+          <p:cNvSpPr>
+            <a:spLocks noGrp="1"/>
+          </p:cNvSpPr>
+          <p:nvPr>
+            <p:ph type="sldNum" idx="5" sz="quarter"/>
+          </p:nvPr>
+        </p:nvSpPr>
+        <p:spPr/>
+      </p:sp>
+    </p:spTree>
+  </p:cSld>
+  <p:clrMapOvr>
+    <a:masterClrMapping/>
+  </p:clrMapOvr>
+</p:notes>
+</file>
+
+<file path=ppt/notesSlides/notesSlide4.xml><?xml version="1.0" encoding="utf-8"?>
+<p:notes xmlns:a="http://schemas.openxmlformats.org/drawingml/2006/main" xmlns:p="http://schemas.openxmlformats.org/presentationml/2006/main" xmlns:r="http://schemas.openxmlformats.org/officeDocument/2006/relationships">
+  <p:cSld>
+    <p:spTree>
+      <p:nvGrpSpPr>
+        <p:cNvPr id="1" name=""/>
+        <p:cNvGrpSpPr/>
+        <p:nvPr/>
+      </p:nvGrpSpPr>
+      <p:grpSpPr>
+        <a:xfrm>
+          <a:off x="0" y="0"/>
+          <a:ext cx="0" cy="0"/>
+          <a:chOff x="0" y="0"/>
+          <a:chExt cx="0" cy="0"/>
+        </a:xfrm>
+      </p:grpSpPr>
+      <p:sp>
+        <p:nvSpPr>
+          <p:cNvPr id="2" name="Slide Image Placeholder 1"/>
+          <p:cNvSpPr>
+            <a:spLocks noGrp="1"/>
+          </p:cNvSpPr>
+          <p:nvPr>
+            <p:ph type="sldImg" idx="2"/>
+          </p:nvPr>
+        </p:nvSpPr>
+        <p:spPr/>
+      </p:sp>
+      <p:sp>
+        <p:nvSpPr>
+          <p:cNvPr id="3" name="Notes Placeholder 2"/>
+          <p:cNvSpPr>
+            <a:spLocks noGrp="1"/>
+          </p:cNvSpPr>
+          <p:nvPr>
+            <p:ph type="body" idx="3" sz="quarter"/>
+          </p:nvPr>
+        </p:nvSpPr>
+        <p:spPr/>
+        <p:txBody>
+          <a:bodyPr/>
+          <a:lstStyle/>
+          <a:p>
+            <a:r>
+              <a:t>Youth outreach. Youth outreach cost $40,311 in full in February: $20,743 paid by the State Department of Families grant, and $19,568 of shared costs no grant covers. It has spent 100.1% of its budget to date, with $319,780 left and 16 months to go. The full cost is $40,311 a month; $19,568 of it is shared cost the grant doesn't pay for. Worth asking for as much of it as the funder allows at renewal.</a:t>
+            </a:r>
+          </a:p>
+        </p:txBody>
+      </p:sp>
+      <p:sp>
+        <p:nvSpPr>
+          <p:cNvPr id="4" name="Slide Number Placeholder 3"/>
+          <p:cNvSpPr>
+            <a:spLocks noGrp="1"/>
+          </p:cNvSpPr>
+          <p:nvPr>
+            <p:ph type="sldNum" idx="5" sz="quarter"/>
+          </p:nvPr>
+        </p:nvSpPr>
+        <p:spPr/>
+      </p:sp>
+    </p:spTree>
+  </p:cSld>
+  <p:clrMapOvr>
+    <a:masterClrMapping/>
+  </p:clrMapOvr>
+</p:notes>
+</file>
+
+<file path=ppt/notesSlides/notesSlide5.xml><?xml version="1.0" encoding="utf-8"?>
+<p:notes xmlns:a="http://schemas.openxmlformats.org/drawingml/2006/main" xmlns:p="http://schemas.openxmlformats.org/presentationml/2006/main" xmlns:r="http://schemas.openxmlformats.org/officeDocument/2006/relationships">
+  <p:cSld>
+    <p:spTree>
+      <p:nvGrpSpPr>
+        <p:cNvPr id="1" name=""/>
+        <p:cNvGrpSpPr/>
+        <p:nvPr/>
+      </p:nvGrpSpPr>
+      <p:grpSpPr>
+        <a:xfrm>
+          <a:off x="0" y="0"/>
+          <a:ext cx="0" cy="0"/>
+          <a:chOff x="0" y="0"/>
+          <a:chExt cx="0" cy="0"/>
+        </a:xfrm>
+      </p:grpSpPr>
+      <p:sp>
+        <p:nvSpPr>
+          <p:cNvPr id="2" name="Slide Image Placeholder 1"/>
+          <p:cNvSpPr>
+            <a:spLocks noGrp="1"/>
+          </p:cNvSpPr>
+          <p:nvPr>
+            <p:ph type="sldImg" idx="2"/>
+          </p:nvPr>
+        </p:nvSpPr>
+        <p:spPr/>
+      </p:sp>
+      <p:sp>
+        <p:nvSpPr>
+          <p:cNvPr id="3" name="Notes Placeholder 2"/>
+          <p:cNvSpPr>
+            <a:spLocks noGrp="1"/>
+          </p:cNvSpPr>
+          <p:nvPr>
+            <p:ph type="body" idx="3" sz="quarter"/>
+          </p:nvPr>
+        </p:nvSpPr>
+        <p:spPr/>
+        <p:txBody>
+          <a:bodyPr/>
+          <a:lstStyle/>
+          <a:p>
+            <a:r>
+              <a:t>Digital literacy. Digital literacy cost $10,510 in full in February: $5,408 paid by the Philanthropic foundation grant, and $5,102 of shared costs no grant covers. It has spent 99.2% of its budget to date, with $65,200 left and 13 months to go. The full cost is $10,510 a month; $5,102 of it is shared cost the grant doesn't pay for. Worth asking for as much of it as the funder allows at renewal.</a:t>
+            </a:r>
+          </a:p>
+        </p:txBody>
+      </p:sp>
+      <p:sp>
+        <p:nvSpPr>
+          <p:cNvPr id="4" name="Slide Number Placeholder 3"/>
+          <p:cNvSpPr>
+            <a:spLocks noGrp="1"/>
+          </p:cNvSpPr>
+          <p:nvPr>
+            <p:ph type="sldNum" idx="5" sz="quarter"/>
+          </p:nvPr>
+        </p:nvSpPr>
+        <p:spPr/>
+      </p:sp>
+    </p:spTree>
+  </p:cSld>
+  <p:clrMapOvr>
+    <a:masterClrMapping/>
+  </p:clrMapOvr>
+</p:notes>
+</file>
+
+<file path=ppt/notesSlides/notesSlide6.xml><?xml version="1.0" encoding="utf-8"?>
+<p:notes xmlns:a="http://schemas.openxmlformats.org/drawingml/2006/main" xmlns:p="http://schemas.openxmlformats.org/presentationml/2006/main" xmlns:r="http://schemas.openxmlformats.org/officeDocument/2006/relationships">
+  <p:cSld>
+    <p:spTree>
+      <p:nvGrpSpPr>
+        <p:cNvPr id="1" name=""/>
+        <p:cNvGrpSpPr/>
+        <p:nvPr/>
+      </p:nvGrpSpPr>
+      <p:grpSpPr>
+        <a:xfrm>
+          <a:off x="0" y="0"/>
+          <a:ext cx="0" cy="0"/>
+          <a:chOff x="0" y="0"/>
+          <a:chExt cx="0" cy="0"/>
+        </a:xfrm>
+      </p:grpSpPr>
+      <p:sp>
+        <p:nvSpPr>
+          <p:cNvPr id="2" name="Slide Image Placeholder 1"/>
+          <p:cNvSpPr>
+            <a:spLocks noGrp="1"/>
+          </p:cNvSpPr>
+          <p:nvPr>
+            <p:ph type="sldImg" idx="2"/>
+          </p:nvPr>
+        </p:nvSpPr>
+        <p:spPr/>
+      </p:sp>
+      <p:sp>
+        <p:nvSpPr>
+          <p:cNvPr id="3" name="Notes Placeholder 2"/>
+          <p:cNvSpPr>
+            <a:spLocks noGrp="1"/>
+          </p:cNvSpPr>
+          <p:nvPr>
+            <p:ph type="body" idx="3" sz="quarter"/>
+          </p:nvPr>
+        </p:nvSpPr>
+        <p:spPr/>
+        <p:txBody>
+          <a:bodyPr/>
+          <a:lstStyle/>
+          <a:p>
+            <a:r>
+              <a:t>Community meals (2025-26). Community meals (2025-26) cost $6,024 in full in February: $3,100 paid by the Local council community grant grant, and $2,924 of shared costs no grant covers. It has spent 94.8% of its budget to date, with $16,200 left and 4 months to go. The full cost is $6,024 a month; $2,924 of it is shared cost the grant doesn't pay for. Worth asking for as much of it as the funder allows at renewal.</a:t>
+            </a:r>
+          </a:p>
+        </p:txBody>
+      </p:sp>
+      <p:sp>
+        <p:nvSpPr>
+          <p:cNvPr id="4" name="Slide Number Placeholder 3"/>
+          <p:cNvSpPr>
+            <a:spLocks noGrp="1"/>
+          </p:cNvSpPr>
+          <p:nvPr>
+            <p:ph type="sldNum" idx="5" sz="quarter"/>
+          </p:nvPr>
+        </p:nvSpPr>
+        <p:spPr/>
+      </p:sp>
+    </p:spTree>
+  </p:cSld>
+  <p:clrMapOvr>
+    <a:masterClrMapping/>
+  </p:clrMapOvr>
+</p:notes>
 </file>
 
 <file path=ppt/slideLayouts/slideLayout1.xml><?xml version="1.0" encoding="utf-8"?>
@@ -3722,7 +5143,44 @@
       <p:grpSpPr/>
       <p:sp>
         <p:nvSpPr>
-          <p:cNvPr id="2" name="Rectangle 1"/>
+          <p:cNvPr id="2" name="Title 1"/>
+          <p:cNvSpPr>
+            <a:spLocks noGrp="1"/>
+          </p:cNvSpPr>
+          <p:nvPr>
+            <p:ph type="ctrTitle"/>
+          </p:nvPr>
+        </p:nvSpPr>
+        <p:spPr>
+          <a:xfrm>
+            <a:off x="457200" y="1965960"/>
+            <a:ext cx="11277295" cy="1097280"/>
+          </a:xfrm>
+        </p:spPr>
+        <p:txBody>
+          <a:bodyPr wrap="square"/>
+          <a:lstStyle/>
+          <a:p>
+            <a:pPr algn="l">
+              <a:defRPr>
+                <a:latin typeface="Roboto"/>
+              </a:defRPr>
+            </a:pPr>
+            <a:r>
+              <a:rPr sz="3400" b="1">
+                <a:solidFill>
+                  <a:srgbClr val="25342A"/>
+                </a:solidFill>
+                <a:latin typeface="Roboto"/>
+              </a:rPr>
+              <a:t>What does each program really cost?</a:t>
+            </a:r>
+          </a:p>
+        </p:txBody>
+      </p:sp>
+      <p:sp>
+        <p:nvSpPr>
+          <p:cNvPr id="3" name="Rectangle 2"/>
           <p:cNvSpPr/>
           <p:nvPr/>
         </p:nvSpPr>
@@ -3778,7 +5236,7 @@
       </p:sp>
       <p:sp>
         <p:nvSpPr>
-          <p:cNvPr id="3" name="TextBox 2"/>
+          <p:cNvPr id="4" name="TextBox 3"/>
           <p:cNvSpPr txBox="1"/>
           <p:nvPr/>
         </p:nvSpPr>
@@ -3793,7 +5251,7 @@
           <a:noFill/>
         </p:spPr>
         <p:txBody>
-          <a:bodyPr wrap="square">
+          <a:bodyPr wrap="square" lIns="45720" rIns="45720">
             <a:spAutoFit/>
           </a:bodyPr>
           <a:lstStyle/>
@@ -3817,7 +5275,7 @@
       </p:sp>
       <p:sp>
         <p:nvSpPr>
-          <p:cNvPr id="4" name="TextBox 3"/>
+          <p:cNvPr id="5" name="TextBox 4"/>
           <p:cNvSpPr txBox="1"/>
           <p:nvPr/>
         </p:nvSpPr>
@@ -3832,7 +5290,7 @@
           <a:noFill/>
         </p:spPr>
         <p:txBody>
-          <a:bodyPr wrap="square">
+          <a:bodyPr wrap="square" lIns="45720" rIns="45720">
             <a:spAutoFit/>
           </a:bodyPr>
           <a:lstStyle/>
@@ -3856,14 +5314,14 @@
       </p:sp>
       <p:sp>
         <p:nvSpPr>
-          <p:cNvPr id="5" name="TextBox 4"/>
+          <p:cNvPr id="6" name="TextBox 5"/>
           <p:cNvSpPr txBox="1"/>
           <p:nvPr/>
         </p:nvSpPr>
         <p:spPr>
           <a:xfrm>
-            <a:off x="457200" y="2011680"/>
-            <a:ext cx="11247120" cy="1097280"/>
+            <a:off x="457200" y="3154680"/>
+            <a:ext cx="11277295" cy="457200"/>
           </a:xfrm>
           <a:prstGeom prst="rect">
             <a:avLst/>
@@ -3871,7 +5329,7 @@
           <a:noFill/>
         </p:spPr>
         <p:txBody>
-          <a:bodyPr wrap="square">
+          <a:bodyPr wrap="square" lIns="45720" rIns="45720">
             <a:spAutoFit/>
           </a:bodyPr>
           <a:lstStyle/>
@@ -3882,27 +5340,27 @@
               </a:defRPr>
             </a:pPr>
             <a:r>
-              <a:rPr sz="3400" b="1">
+              <a:rPr sz="1600" b="0">
                 <a:solidFill>
-                  <a:srgbClr val="25342A"/>
+                  <a:srgbClr val="5F6F63"/>
                 </a:solidFill>
                 <a:latin typeface="Roboto"/>
               </a:rPr>
-              <a:t>What does each program really cost?</a:t>
-            </a:r>
-          </a:p>
-        </p:txBody>
-      </p:sp>
-      <p:sp>
-        <p:nvSpPr>
-          <p:cNvPr id="6" name="TextBox 5"/>
+              <a:t>Sample Community Services Ltd</a:t>
+            </a:r>
+          </a:p>
+        </p:txBody>
+      </p:sp>
+      <p:sp>
+        <p:nvSpPr>
+          <p:cNvPr id="7" name="TextBox 6"/>
           <p:cNvSpPr txBox="1"/>
           <p:nvPr/>
         </p:nvSpPr>
         <p:spPr>
           <a:xfrm>
-            <a:off x="457200" y="3154680"/>
-            <a:ext cx="11247120" cy="457200"/>
+            <a:off x="457200" y="3703320"/>
+            <a:ext cx="11277295" cy="535940"/>
           </a:xfrm>
           <a:prstGeom prst="rect">
             <a:avLst/>
@@ -3910,7 +5368,7 @@
           <a:noFill/>
         </p:spPr>
         <p:txBody>
-          <a:bodyPr wrap="square">
+          <a:bodyPr wrap="square" lIns="45720" rIns="45720">
             <a:spAutoFit/>
           </a:bodyPr>
           <a:lstStyle/>
@@ -3921,27 +5379,27 @@
               </a:defRPr>
             </a:pPr>
             <a:r>
-              <a:rPr sz="1600" b="0">
+              <a:rPr sz="1400" b="0">
                 <a:solidFill>
-                  <a:srgbClr val="5F6F63"/>
+                  <a:srgbClr val="25342A"/>
                 </a:solidFill>
                 <a:latin typeface="Roboto"/>
               </a:rPr>
-              <a:t>Sample Community Services Ltd</a:t>
-            </a:r>
-          </a:p>
-        </p:txBody>
-      </p:sp>
-      <p:sp>
-        <p:nvSpPr>
-          <p:cNvPr id="7" name="TextBox 6"/>
+              <a:t>Period: February 2026. Each program's full cost: what its grant pays for, plus its fair share of the costs no single grant covers (untied program costs and administration, shared by grant spending). Pick a program and every chart and note follows it.</a:t>
+            </a:r>
+          </a:p>
+        </p:txBody>
+      </p:sp>
+      <p:sp>
+        <p:nvSpPr>
+          <p:cNvPr id="8" name="TextBox 7"/>
           <p:cNvSpPr txBox="1"/>
           <p:nvPr/>
         </p:nvSpPr>
         <p:spPr>
           <a:xfrm>
-            <a:off x="457200" y="3703320"/>
-            <a:ext cx="11247120" cy="1097280"/>
+            <a:off x="457200" y="4330700"/>
+            <a:ext cx="11277295" cy="1097280"/>
           </a:xfrm>
           <a:prstGeom prst="rect">
             <a:avLst/>
@@ -3949,7 +5407,7 @@
           <a:noFill/>
         </p:spPr>
         <p:txBody>
-          <a:bodyPr wrap="square">
+          <a:bodyPr wrap="square" lIns="45720" rIns="45720">
             <a:spAutoFit/>
           </a:bodyPr>
           <a:lstStyle/>
@@ -3960,27 +5418,75 @@
               </a:defRPr>
             </a:pPr>
             <a:r>
-              <a:rPr sz="1400" b="0">
+              <a:rPr sz="1100" b="0">
                 <a:solidFill>
-                  <a:srgbClr val="25342A"/>
+                  <a:srgbClr val="5F6F63"/>
                 </a:solidFill>
                 <a:latin typeface="Roboto"/>
               </a:rPr>
-              <a:t>Period: February 2026. Each program's full cost: what its grant pays for, plus its fair share of the costs no single grant covers (untied program costs and administration, shared by grant spending). Pick a program and every chart and note follows it.</a:t>
-            </a:r>
-          </a:p>
-        </p:txBody>
-      </p:sp>
-      <p:sp>
-        <p:nvSpPr>
-          <p:cNvPr id="8" name="TextBox 7"/>
+              <a:t>How final is this data?</a:t>
+            </a:r>
+          </a:p>
+          <a:p>
+            <a:pPr>
+              <a:defRPr>
+                <a:latin typeface="Roboto"/>
+              </a:defRPr>
+            </a:pPr>
+            <a:r>
+              <a:rPr sz="1100" b="0">
+                <a:solidFill>
+                  <a:srgbClr val="5F6F63"/>
+                </a:solidFill>
+                <a:latin typeface="Roboto"/>
+              </a:rPr>
+              <a:t>January 2026: Locked. January 2026 is locked (closed 3 Feb 2026). These numbers won't change.</a:t>
+            </a:r>
+          </a:p>
+          <a:p>
+            <a:pPr>
+              <a:defRPr>
+                <a:latin typeface="Roboto"/>
+              </a:defRPr>
+            </a:pPr>
+            <a:r>
+              <a:rPr sz="1100" b="0">
+                <a:solidFill>
+                  <a:srgbClr val="5F6F63"/>
+                </a:solidFill>
+                <a:latin typeface="Roboto"/>
+              </a:rPr>
+              <a:t>February 2026: Locked. February 2026 is locked (closed 3 Mar 2026). These numbers won't change.</a:t>
+            </a:r>
+          </a:p>
+          <a:p>
+            <a:pPr>
+              <a:defRPr>
+                <a:latin typeface="Roboto"/>
+              </a:defRPr>
+            </a:pPr>
+            <a:r>
+              <a:rPr sz="1100" b="0">
+                <a:solidFill>
+                  <a:srgbClr val="5F6F63"/>
+                </a:solidFill>
+                <a:latin typeface="Roboto"/>
+              </a:rPr>
+              <a:t>October 2026: Incomplete. October 2026 is still in progress: figures to 6 Oct only.</a:t>
+            </a:r>
+          </a:p>
+        </p:txBody>
+      </p:sp>
+      <p:sp>
+        <p:nvSpPr>
+          <p:cNvPr id="9" name="TextBox 8"/>
           <p:cNvSpPr txBox="1"/>
           <p:nvPr/>
         </p:nvSpPr>
         <p:spPr>
           <a:xfrm>
-            <a:off x="457200" y="4937760"/>
-            <a:ext cx="11247120" cy="1097280"/>
+            <a:off x="457200" y="6492240"/>
+            <a:ext cx="2926080" cy="274320"/>
           </a:xfrm>
           <a:prstGeom prst="rect">
             <a:avLst/>
@@ -3988,7 +5494,7 @@
           <a:noFill/>
         </p:spPr>
         <p:txBody>
-          <a:bodyPr wrap="square">
+          <a:bodyPr wrap="square" lIns="45720" rIns="45720">
             <a:spAutoFit/>
           </a:bodyPr>
           <a:lstStyle/>
@@ -3999,75 +5505,27 @@
               </a:defRPr>
             </a:pPr>
             <a:r>
-              <a:rPr sz="1100" b="0">
+              <a:rPr sz="900" b="0">
                 <a:solidFill>
                   <a:srgbClr val="5F6F63"/>
                 </a:solidFill>
                 <a:latin typeface="Roboto"/>
               </a:rPr>
-              <a:t>How final is this data?</a:t>
-            </a:r>
-          </a:p>
-          <a:p>
-            <a:pPr>
-              <a:defRPr>
-                <a:latin typeface="Roboto"/>
-              </a:defRPr>
-            </a:pPr>
-            <a:r>
-              <a:rPr sz="1100" b="0">
-                <a:solidFill>
-                  <a:srgbClr val="5F6F63"/>
-                </a:solidFill>
-                <a:latin typeface="Roboto"/>
-              </a:rPr>
-              <a:t>January 2026: Locked. January 2026 is locked (closed 3 Feb 2026). These numbers won't change.</a:t>
-            </a:r>
-          </a:p>
-          <a:p>
-            <a:pPr>
-              <a:defRPr>
-                <a:latin typeface="Roboto"/>
-              </a:defRPr>
-            </a:pPr>
-            <a:r>
-              <a:rPr sz="1100" b="0">
-                <a:solidFill>
-                  <a:srgbClr val="5F6F63"/>
-                </a:solidFill>
-                <a:latin typeface="Roboto"/>
-              </a:rPr>
-              <a:t>February 2026: Locked. February 2026 is locked (closed 3 Mar 2026). These numbers won't change.</a:t>
-            </a:r>
-          </a:p>
-          <a:p>
-            <a:pPr>
-              <a:defRPr>
-                <a:latin typeface="Roboto"/>
-              </a:defRPr>
-            </a:pPr>
-            <a:r>
-              <a:rPr sz="1100" b="0">
-                <a:solidFill>
-                  <a:srgbClr val="5F6F63"/>
-                </a:solidFill>
-                <a:latin typeface="Roboto"/>
-              </a:rPr>
-              <a:t>October 2026: Incomplete. October 2026 is still in progress: figures to 6 Oct only.</a:t>
-            </a:r>
-          </a:p>
-        </p:txBody>
-      </p:sp>
-      <p:sp>
-        <p:nvSpPr>
-          <p:cNvPr id="9" name="TextBox 8"/>
+              <a:t>program-cost.pptx</a:t>
+            </a:r>
+          </a:p>
+        </p:txBody>
+      </p:sp>
+      <p:sp>
+        <p:nvSpPr>
+          <p:cNvPr id="10" name="TextBox 9"/>
           <p:cNvSpPr txBox="1"/>
           <p:nvPr/>
         </p:nvSpPr>
         <p:spPr>
           <a:xfrm>
-            <a:off x="457200" y="6492240"/>
-            <a:ext cx="3657600" cy="274320"/>
+            <a:off x="3108960" y="6492240"/>
+            <a:ext cx="5943600" cy="274320"/>
           </a:xfrm>
           <a:prstGeom prst="rect">
             <a:avLst/>
@@ -4075,12 +5533,12 @@
           <a:noFill/>
         </p:spPr>
         <p:txBody>
-          <a:bodyPr wrap="square">
+          <a:bodyPr wrap="square" lIns="45720" rIns="45720">
             <a:spAutoFit/>
           </a:bodyPr>
           <a:lstStyle/>
           <a:p>
-            <a:pPr>
+            <a:pPr algn="ctr">
               <a:defRPr>
                 <a:latin typeface="Roboto"/>
               </a:defRPr>
@@ -4092,21 +5550,21 @@
                 </a:solidFill>
                 <a:latin typeface="Roboto"/>
               </a:rPr>
-              <a:t>program-cost.pptx</a:t>
-            </a:r>
-          </a:p>
-        </p:txBody>
-      </p:sp>
-      <p:sp>
-        <p:nvSpPr>
-          <p:cNvPr id="10" name="TextBox 9"/>
+              <a:t>Data retrieved 2pm, Tue 6 Oct 2026 · Generated 8 Oct 2026, 9:35am · Sample data · Made with Python (python-pptx)</a:t>
+            </a:r>
+          </a:p>
+        </p:txBody>
+      </p:sp>
+      <p:sp>
+        <p:nvSpPr>
+          <p:cNvPr id="11" name="TextBox 10"/>
           <p:cNvSpPr txBox="1"/>
           <p:nvPr/>
         </p:nvSpPr>
         <p:spPr>
           <a:xfrm>
-            <a:off x="4297680" y="6492240"/>
-            <a:ext cx="3657600" cy="274320"/>
+            <a:off x="8503920" y="6492240"/>
+            <a:ext cx="3200400" cy="274320"/>
           </a:xfrm>
           <a:prstGeom prst="rect">
             <a:avLst/>
@@ -4114,12 +5572,12 @@
           <a:noFill/>
         </p:spPr>
         <p:txBody>
-          <a:bodyPr wrap="square">
+          <a:bodyPr wrap="square" lIns="45720" rIns="45720">
             <a:spAutoFit/>
           </a:bodyPr>
           <a:lstStyle/>
           <a:p>
-            <a:pPr algn="ctr">
+            <a:pPr algn="r">
               <a:defRPr>
                 <a:latin typeface="Roboto"/>
               </a:defRPr>
@@ -4131,46 +5589,7 @@
                 </a:solidFill>
                 <a:latin typeface="Roboto"/>
               </a:rPr>
-              <a:t>Data retrieved 2pm, Tue 6 Oct 2026 · Sample data</a:t>
-            </a:r>
-          </a:p>
-        </p:txBody>
-      </p:sp>
-      <p:sp>
-        <p:nvSpPr>
-          <p:cNvPr id="11" name="TextBox 10"/>
-          <p:cNvSpPr txBox="1"/>
-          <p:nvPr/>
-        </p:nvSpPr>
-        <p:spPr>
-          <a:xfrm>
-            <a:off x="8503920" y="6492240"/>
-            <a:ext cx="3200400" cy="274320"/>
-          </a:xfrm>
-          <a:prstGeom prst="rect">
-            <a:avLst/>
-          </a:prstGeom>
-          <a:noFill/>
-        </p:spPr>
-        <p:txBody>
-          <a:bodyPr wrap="square">
-            <a:spAutoFit/>
-          </a:bodyPr>
-          <a:lstStyle/>
-          <a:p>
-            <a:pPr algn="r">
-              <a:defRPr>
-                <a:latin typeface="Roboto"/>
-              </a:defRPr>
-            </a:pPr>
-            <a:r>
-              <a:rPr sz="900" b="0">
-                <a:solidFill>
-                  <a:srgbClr val="5F6F63"/>
-                </a:solidFill>
-                <a:latin typeface="Roboto"/>
-              </a:rPr>
-              <a:t>Slide 1 of 9</a:t>
+              <a:t>Slide 1 of 6</a:t>
             </a:r>
           </a:p>
         </p:txBody>
@@ -4195,7 +5614,44 @@
       <p:grpSpPr/>
       <p:sp>
         <p:nvSpPr>
-          <p:cNvPr id="2" name="Rectangle 1"/>
+          <p:cNvPr id="2" name="Title 1"/>
+          <p:cNvSpPr>
+            <a:spLocks noGrp="1"/>
+          </p:cNvSpPr>
+          <p:nvPr>
+            <p:ph type="title"/>
+          </p:nvPr>
+        </p:nvSpPr>
+        <p:spPr>
+          <a:xfrm>
+            <a:off x="457200" y="384048"/>
+            <a:ext cx="11277295" cy="475488"/>
+          </a:xfrm>
+        </p:spPr>
+        <p:txBody>
+          <a:bodyPr wrap="square" lIns="45720" rIns="45720" tIns="0" bIns="0" anchor="t"/>
+          <a:lstStyle/>
+          <a:p>
+            <a:pPr algn="l">
+              <a:defRPr>
+                <a:latin typeface="Roboto"/>
+              </a:defRPr>
+            </a:pPr>
+            <a:r>
+              <a:rPr sz="2400" b="1">
+                <a:solidFill>
+                  <a:srgbClr val="25342A"/>
+                </a:solidFill>
+                <a:latin typeface="Roboto"/>
+              </a:rPr>
+              <a:t>All programs</a:t>
+            </a:r>
+          </a:p>
+        </p:txBody>
+      </p:sp>
+      <p:sp>
+        <p:nvSpPr>
+          <p:cNvPr id="3" name="Rectangle 2"/>
           <p:cNvSpPr/>
           <p:nvPr/>
         </p:nvSpPr>
@@ -4242,14 +5698,14 @@
       </p:sp>
       <p:sp>
         <p:nvSpPr>
-          <p:cNvPr id="3" name="TextBox 2"/>
+          <p:cNvPr id="4" name="TextBox 3"/>
           <p:cNvSpPr txBox="1"/>
           <p:nvPr/>
         </p:nvSpPr>
         <p:spPr>
           <a:xfrm>
-            <a:off x="457200" y="164592"/>
-            <a:ext cx="7315200" cy="274320"/>
+            <a:off x="457200" y="146304"/>
+            <a:ext cx="8229600" cy="256032"/>
           </a:xfrm>
           <a:prstGeom prst="rect">
             <a:avLst/>
@@ -4257,7 +5713,7 @@
           <a:noFill/>
         </p:spPr>
         <p:txBody>
-          <a:bodyPr wrap="square">
+          <a:bodyPr wrap="square" lIns="45720" rIns="45720">
             <a:spAutoFit/>
           </a:bodyPr>
           <a:lstStyle/>
@@ -4281,14 +5737,14 @@
       </p:sp>
       <p:sp>
         <p:nvSpPr>
-          <p:cNvPr id="4" name="TextBox 3"/>
+          <p:cNvPr id="5" name="TextBox 4"/>
           <p:cNvSpPr txBox="1"/>
           <p:nvPr/>
         </p:nvSpPr>
         <p:spPr>
           <a:xfrm>
-            <a:off x="457200" y="411480"/>
-            <a:ext cx="11247120" cy="548640"/>
+            <a:off x="457200" y="914400"/>
+            <a:ext cx="11277295" cy="263652"/>
           </a:xfrm>
           <a:prstGeom prst="rect">
             <a:avLst/>
@@ -4296,7 +5752,7 @@
           <a:noFill/>
         </p:spPr>
         <p:txBody>
-          <a:bodyPr wrap="square">
+          <a:bodyPr wrap="square" lIns="45720" rIns="45720">
             <a:spAutoFit/>
           </a:bodyPr>
           <a:lstStyle/>
@@ -4307,45 +5763,94 @@
               </a:defRPr>
             </a:pPr>
             <a:r>
-              <a:rPr sz="2400" b="1">
+              <a:rPr sz="1200" b="0">
                 <a:solidFill>
-                  <a:srgbClr val="25342A"/>
+                  <a:srgbClr val="5F6F63"/>
                 </a:solidFill>
                 <a:latin typeface="Roboto"/>
               </a:rPr>
-              <a:t>Full cost of each program, February 2026 · $ · Program: All programs</a:t>
+              <a:t>Full cost of each program, February 2026</a:t>
             </a:r>
           </a:p>
         </p:txBody>
       </p:sp>
       <p:graphicFrame>
         <p:nvGraphicFramePr>
-          <p:cNvPr id="5" name="Chart 4"/>
+          <p:cNvPr id="6" name="Chart 5"/>
           <p:cNvGraphicFramePr>
             <a:graphicFrameLocks noGrp="1"/>
           </p:cNvGraphicFramePr>
           <p:nvPr/>
         </p:nvGraphicFramePr>
         <p:xfrm>
-          <a:off x="457200" y="1188720"/>
-          <a:ext cx="11247120" cy="5029200"/>
+          <a:off x="457200" y="1278636"/>
+          <a:ext cx="11277295" cy="2267712"/>
         </p:xfrm>
         <a:graphic>
           <a:graphicData uri="http://schemas.openxmlformats.org/drawingml/2006/chart">
-            <c:chart xmlns:c="http://schemas.openxmlformats.org/drawingml/2006/chart" r:id="rId2"/>
+            <c:chart xmlns:c="http://schemas.openxmlformats.org/drawingml/2006/chart" r:id="rId3"/>
           </a:graphicData>
         </a:graphic>
       </p:graphicFrame>
       <p:sp>
         <p:nvSpPr>
-          <p:cNvPr id="6" name="TextBox 5"/>
+          <p:cNvPr id="7" name="Rectangle 6"/>
+          <p:cNvSpPr/>
+          <p:nvPr/>
+        </p:nvSpPr>
+        <p:spPr>
+          <a:xfrm>
+            <a:off x="457200" y="3637788"/>
+            <a:ext cx="5501487" cy="1295400"/>
+          </a:xfrm>
+          <a:prstGeom prst="rect">
+            <a:avLst/>
+          </a:prstGeom>
+          <a:solidFill>
+            <a:srgbClr val="FFFFFF"/>
+          </a:solidFill>
+          <a:ln>
+            <a:solidFill>
+              <a:srgbClr val="DCE8DC"/>
+            </a:solidFill>
+          </a:ln>
+        </p:spPr>
+        <p:style>
+          <a:lnRef idx="1">
+            <a:schemeClr val="accent1"/>
+          </a:lnRef>
+          <a:fillRef idx="3">
+            <a:schemeClr val="accent1"/>
+          </a:fillRef>
+          <a:effectRef idx="2">
+            <a:schemeClr val="accent1"/>
+          </a:effectRef>
+          <a:fontRef idx="minor">
+            <a:schemeClr val="lt1"/>
+          </a:fontRef>
+        </p:style>
+        <p:txBody>
+          <a:bodyPr rtlCol="0" anchor="ctr"/>
+          <a:lstStyle/>
+          <a:p>
+            <a:pPr algn="ctr">
+              <a:defRPr>
+                <a:latin typeface="Roboto"/>
+              </a:defRPr>
+            </a:pPr>
+          </a:p>
+        </p:txBody>
+      </p:sp>
+      <p:sp>
+        <p:nvSpPr>
+          <p:cNvPr id="8" name="TextBox 7"/>
           <p:cNvSpPr txBox="1"/>
           <p:nvPr/>
         </p:nvSpPr>
         <p:spPr>
           <a:xfrm>
-            <a:off x="457200" y="6492240"/>
-            <a:ext cx="3657600" cy="274320"/>
+            <a:off x="594360" y="3692652"/>
+            <a:ext cx="5227167" cy="274320"/>
           </a:xfrm>
           <a:prstGeom prst="rect">
             <a:avLst/>
@@ -4353,7 +5858,212 @@
           <a:noFill/>
         </p:spPr>
         <p:txBody>
-          <a:bodyPr wrap="square">
+          <a:bodyPr wrap="square" lIns="45720" rIns="45720">
+            <a:spAutoFit/>
+          </a:bodyPr>
+          <a:lstStyle/>
+          <a:p>
+            <a:pPr>
+              <a:defRPr>
+                <a:latin typeface="Roboto"/>
+              </a:defRPr>
+            </a:pPr>
+            <a:r>
+              <a:rPr sz="1000" b="1">
+                <a:solidFill>
+                  <a:srgbClr val="5F6F63"/>
+                </a:solidFill>
+                <a:latin typeface="Roboto"/>
+              </a:rPr>
+              <a:t>WHAT IT SHOWS</a:t>
+            </a:r>
+          </a:p>
+        </p:txBody>
+      </p:sp>
+      <p:sp>
+        <p:nvSpPr>
+          <p:cNvPr id="9" name="TextBox 8"/>
+          <p:cNvSpPr txBox="1"/>
+          <p:nvPr/>
+        </p:nvSpPr>
+        <p:spPr>
+          <a:xfrm>
+            <a:off x="594360" y="3966972"/>
+            <a:ext cx="5227167" cy="929640"/>
+          </a:xfrm>
+          <a:prstGeom prst="rect">
+            <a:avLst/>
+          </a:prstGeom>
+          <a:noFill/>
+        </p:spPr>
+        <p:txBody>
+          <a:bodyPr wrap="square" lIns="45720" rIns="45720">
+            <a:spAutoFit/>
+          </a:bodyPr>
+          <a:lstStyle/>
+          <a:p>
+            <a:pPr>
+              <a:defRPr>
+                <a:latin typeface="Roboto"/>
+              </a:defRPr>
+            </a:pPr>
+            <a:r>
+              <a:rPr sz="1200" b="0">
+                <a:solidFill>
+                  <a:srgbClr val="25342A"/>
+                </a:solidFill>
+                <a:latin typeface="Roboto"/>
+              </a:rPr>
+              <a:t>Housing support is the biggest program: $51,514 in February once its share of untied program costs and administration is added to $26,508 of grant spending. Shared costs add 94.3% on top of grant spending across all programs.</a:t>
+            </a:r>
+          </a:p>
+        </p:txBody>
+      </p:sp>
+      <p:sp>
+        <p:nvSpPr>
+          <p:cNvPr id="10" name="Rectangle 9"/>
+          <p:cNvSpPr/>
+          <p:nvPr/>
+        </p:nvSpPr>
+        <p:spPr>
+          <a:xfrm>
+            <a:off x="6233007" y="3637788"/>
+            <a:ext cx="5501487" cy="1295400"/>
+          </a:xfrm>
+          <a:prstGeom prst="rect">
+            <a:avLst/>
+          </a:prstGeom>
+          <a:solidFill>
+            <a:srgbClr val="EEF5F0"/>
+          </a:solidFill>
+          <a:ln>
+            <a:solidFill>
+              <a:srgbClr val="DCE8DC"/>
+            </a:solidFill>
+          </a:ln>
+        </p:spPr>
+        <p:style>
+          <a:lnRef idx="1">
+            <a:schemeClr val="accent1"/>
+          </a:lnRef>
+          <a:fillRef idx="3">
+            <a:schemeClr val="accent1"/>
+          </a:fillRef>
+          <a:effectRef idx="2">
+            <a:schemeClr val="accent1"/>
+          </a:effectRef>
+          <a:fontRef idx="minor">
+            <a:schemeClr val="lt1"/>
+          </a:fontRef>
+        </p:style>
+        <p:txBody>
+          <a:bodyPr rtlCol="0" anchor="ctr"/>
+          <a:lstStyle/>
+          <a:p>
+            <a:pPr algn="ctr">
+              <a:defRPr>
+                <a:latin typeface="Roboto"/>
+              </a:defRPr>
+            </a:pPr>
+          </a:p>
+        </p:txBody>
+      </p:sp>
+      <p:sp>
+        <p:nvSpPr>
+          <p:cNvPr id="11" name="TextBox 10"/>
+          <p:cNvSpPr txBox="1"/>
+          <p:nvPr/>
+        </p:nvSpPr>
+        <p:spPr>
+          <a:xfrm>
+            <a:off x="6370167" y="3692652"/>
+            <a:ext cx="5227167" cy="274320"/>
+          </a:xfrm>
+          <a:prstGeom prst="rect">
+            <a:avLst/>
+          </a:prstGeom>
+          <a:noFill/>
+        </p:spPr>
+        <p:txBody>
+          <a:bodyPr wrap="square" lIns="45720" rIns="45720">
+            <a:spAutoFit/>
+          </a:bodyPr>
+          <a:lstStyle/>
+          <a:p>
+            <a:pPr>
+              <a:defRPr>
+                <a:latin typeface="Roboto"/>
+              </a:defRPr>
+            </a:pPr>
+            <a:r>
+              <a:rPr sz="1000" b="1">
+                <a:solidFill>
+                  <a:srgbClr val="5F6F63"/>
+                </a:solidFill>
+                <a:latin typeface="Roboto"/>
+              </a:rPr>
+              <a:t>WHAT YOU'D DO ABOUT IT</a:t>
+            </a:r>
+          </a:p>
+        </p:txBody>
+      </p:sp>
+      <p:sp>
+        <p:nvSpPr>
+          <p:cNvPr id="12" name="TextBox 11"/>
+          <p:cNvSpPr txBox="1"/>
+          <p:nvPr/>
+        </p:nvSpPr>
+        <p:spPr>
+          <a:xfrm>
+            <a:off x="6370167" y="3966972"/>
+            <a:ext cx="5227167" cy="929640"/>
+          </a:xfrm>
+          <a:prstGeom prst="rect">
+            <a:avLst/>
+          </a:prstGeom>
+          <a:noFill/>
+        </p:spPr>
+        <p:txBody>
+          <a:bodyPr wrap="square" lIns="45720" rIns="45720">
+            <a:spAutoFit/>
+          </a:bodyPr>
+          <a:lstStyle/>
+          <a:p>
+            <a:pPr>
+              <a:defRPr>
+                <a:latin typeface="Roboto"/>
+              </a:defRPr>
+            </a:pPr>
+            <a:r>
+              <a:rPr sz="1200" b="0">
+                <a:solidFill>
+                  <a:srgbClr val="25342A"/>
+                </a:solidFill>
+                <a:latin typeface="Roboto"/>
+              </a:rPr>
+              <a:t>The full cost (not just the grant line) is the number for renewal applications, where the funder lets you recover a share of overheads. Pick a program above to see it on its own.</a:t>
+            </a:r>
+          </a:p>
+        </p:txBody>
+      </p:sp>
+      <p:sp>
+        <p:nvSpPr>
+          <p:cNvPr id="13" name="TextBox 12"/>
+          <p:cNvSpPr txBox="1"/>
+          <p:nvPr/>
+        </p:nvSpPr>
+        <p:spPr>
+          <a:xfrm>
+            <a:off x="457200" y="6492240"/>
+            <a:ext cx="2926080" cy="274320"/>
+          </a:xfrm>
+          <a:prstGeom prst="rect">
+            <a:avLst/>
+          </a:prstGeom>
+          <a:noFill/>
+        </p:spPr>
+        <p:txBody>
+          <a:bodyPr wrap="square" lIns="45720" rIns="45720">
             <a:spAutoFit/>
           </a:bodyPr>
           <a:lstStyle/>
@@ -4377,14 +6087,14 @@
       </p:sp>
       <p:sp>
         <p:nvSpPr>
-          <p:cNvPr id="7" name="TextBox 6"/>
+          <p:cNvPr id="14" name="TextBox 13"/>
           <p:cNvSpPr txBox="1"/>
           <p:nvPr/>
         </p:nvSpPr>
         <p:spPr>
           <a:xfrm>
-            <a:off x="4297680" y="6492240"/>
-            <a:ext cx="3657600" cy="274320"/>
+            <a:off x="3108960" y="6492240"/>
+            <a:ext cx="5943600" cy="274320"/>
           </a:xfrm>
           <a:prstGeom prst="rect">
             <a:avLst/>
@@ -4392,7 +6102,7 @@
           <a:noFill/>
         </p:spPr>
         <p:txBody>
-          <a:bodyPr wrap="square">
+          <a:bodyPr wrap="square" lIns="45720" rIns="45720">
             <a:spAutoFit/>
           </a:bodyPr>
           <a:lstStyle/>
@@ -4409,14 +6119,14 @@
                 </a:solidFill>
                 <a:latin typeface="Roboto"/>
               </a:rPr>
-              <a:t>Data retrieved 2pm, Tue 6 Oct 2026 · Sample data</a:t>
-            </a:r>
-          </a:p>
-        </p:txBody>
-      </p:sp>
-      <p:sp>
-        <p:nvSpPr>
-          <p:cNvPr id="8" name="TextBox 7"/>
+              <a:t>Data retrieved 2pm, Tue 6 Oct 2026 · Generated 8 Oct 2026, 9:35am · Sample data · Made with Python (python-pptx)</a:t>
+            </a:r>
+          </a:p>
+        </p:txBody>
+      </p:sp>
+      <p:sp>
+        <p:nvSpPr>
+          <p:cNvPr id="15" name="TextBox 14"/>
           <p:cNvSpPr txBox="1"/>
           <p:nvPr/>
         </p:nvSpPr>
@@ -4431,7 +6141,7 @@
           <a:noFill/>
         </p:spPr>
         <p:txBody>
-          <a:bodyPr wrap="square">
+          <a:bodyPr wrap="square" lIns="45720" rIns="45720">
             <a:spAutoFit/>
           </a:bodyPr>
           <a:lstStyle/>
@@ -4448,7 +6158,7 @@
                 </a:solidFill>
                 <a:latin typeface="Roboto"/>
               </a:rPr>
-              <a:t>Slide 2 of 9</a:t>
+              <a:t>Slide 2 of 6</a:t>
             </a:r>
           </a:p>
         </p:txBody>
@@ -4473,7 +6183,44 @@
       <p:grpSpPr/>
       <p:sp>
         <p:nvSpPr>
-          <p:cNvPr id="2" name="Rectangle 1"/>
+          <p:cNvPr id="2" name="Title 1"/>
+          <p:cNvSpPr>
+            <a:spLocks noGrp="1"/>
+          </p:cNvSpPr>
+          <p:nvPr>
+            <p:ph type="title"/>
+          </p:nvPr>
+        </p:nvSpPr>
+        <p:spPr>
+          <a:xfrm>
+            <a:off x="457200" y="384048"/>
+            <a:ext cx="11277295" cy="475488"/>
+          </a:xfrm>
+        </p:spPr>
+        <p:txBody>
+          <a:bodyPr wrap="square" lIns="45720" rIns="45720" tIns="0" bIns="0" anchor="t"/>
+          <a:lstStyle/>
+          <a:p>
+            <a:pPr algn="l">
+              <a:defRPr>
+                <a:latin typeface="Roboto"/>
+              </a:defRPr>
+            </a:pPr>
+            <a:r>
+              <a:rPr sz="2400" b="1">
+                <a:solidFill>
+                  <a:srgbClr val="25342A"/>
+                </a:solidFill>
+                <a:latin typeface="Roboto"/>
+              </a:rPr>
+              <a:t>Housing support</a:t>
+            </a:r>
+          </a:p>
+        </p:txBody>
+      </p:sp>
+      <p:sp>
+        <p:nvSpPr>
+          <p:cNvPr id="3" name="Rectangle 2"/>
           <p:cNvSpPr/>
           <p:nvPr/>
         </p:nvSpPr>
@@ -4520,14 +6267,14 @@
       </p:sp>
       <p:sp>
         <p:nvSpPr>
-          <p:cNvPr id="3" name="TextBox 2"/>
+          <p:cNvPr id="4" name="TextBox 3"/>
           <p:cNvSpPr txBox="1"/>
           <p:nvPr/>
         </p:nvSpPr>
         <p:spPr>
           <a:xfrm>
-            <a:off x="457200" y="164592"/>
-            <a:ext cx="7315200" cy="274320"/>
+            <a:off x="457200" y="146304"/>
+            <a:ext cx="8229600" cy="256032"/>
           </a:xfrm>
           <a:prstGeom prst="rect">
             <a:avLst/>
@@ -4535,7 +6282,7 @@
           <a:noFill/>
         </p:spPr>
         <p:txBody>
-          <a:bodyPr wrap="square">
+          <a:bodyPr wrap="square" lIns="45720" rIns="45720">
             <a:spAutoFit/>
           </a:bodyPr>
           <a:lstStyle/>
@@ -4559,14 +6306,14 @@
       </p:sp>
       <p:sp>
         <p:nvSpPr>
-          <p:cNvPr id="4" name="TextBox 3"/>
+          <p:cNvPr id="5" name="TextBox 4"/>
           <p:cNvSpPr txBox="1"/>
           <p:nvPr/>
         </p:nvSpPr>
         <p:spPr>
           <a:xfrm>
-            <a:off x="457200" y="411480"/>
-            <a:ext cx="11247120" cy="548640"/>
+            <a:off x="457200" y="914400"/>
+            <a:ext cx="11277295" cy="263652"/>
           </a:xfrm>
           <a:prstGeom prst="rect">
             <a:avLst/>
@@ -4574,7 +6321,7 @@
           <a:noFill/>
         </p:spPr>
         <p:txBody>
-          <a:bodyPr wrap="square">
+          <a:bodyPr wrap="square" lIns="45720" rIns="45720">
             <a:spAutoFit/>
           </a:bodyPr>
           <a:lstStyle/>
@@ -4585,45 +6332,94 @@
               </a:defRPr>
             </a:pPr>
             <a:r>
-              <a:rPr sz="2400" b="1">
+              <a:rPr sz="1200" b="0">
                 <a:solidFill>
-                  <a:srgbClr val="25342A"/>
+                  <a:srgbClr val="5F6F63"/>
                 </a:solidFill>
                 <a:latin typeface="Roboto"/>
               </a:rPr>
-              <a:t>Full cost of each program, February 2026 · % of total · Program: All programs</a:t>
+              <a:t>Grant spending, by month · Housing support</a:t>
             </a:r>
           </a:p>
         </p:txBody>
       </p:sp>
       <p:graphicFrame>
         <p:nvGraphicFramePr>
-          <p:cNvPr id="5" name="Chart 4"/>
+          <p:cNvPr id="6" name="Chart 5"/>
           <p:cNvGraphicFramePr>
             <a:graphicFrameLocks noGrp="1"/>
           </p:cNvGraphicFramePr>
           <p:nvPr/>
         </p:nvGraphicFramePr>
         <p:xfrm>
-          <a:off x="457200" y="1188720"/>
-          <a:ext cx="11247120" cy="5029200"/>
+          <a:off x="457200" y="1278636"/>
+          <a:ext cx="11277295" cy="3643884"/>
         </p:xfrm>
         <a:graphic>
           <a:graphicData uri="http://schemas.openxmlformats.org/drawingml/2006/chart">
-            <c:chart xmlns:c="http://schemas.openxmlformats.org/drawingml/2006/chart" r:id="rId2"/>
+            <c:chart xmlns:c="http://schemas.openxmlformats.org/drawingml/2006/chart" r:id="rId3"/>
           </a:graphicData>
         </a:graphic>
       </p:graphicFrame>
       <p:sp>
         <p:nvSpPr>
-          <p:cNvPr id="6" name="TextBox 5"/>
+          <p:cNvPr id="7" name="Rectangle 6"/>
+          <p:cNvSpPr/>
+          <p:nvPr/>
+        </p:nvSpPr>
+        <p:spPr>
+          <a:xfrm>
+            <a:off x="457200" y="5013960"/>
+            <a:ext cx="5501487" cy="1295400"/>
+          </a:xfrm>
+          <a:prstGeom prst="rect">
+            <a:avLst/>
+          </a:prstGeom>
+          <a:solidFill>
+            <a:srgbClr val="FFFFFF"/>
+          </a:solidFill>
+          <a:ln>
+            <a:solidFill>
+              <a:srgbClr val="DCE8DC"/>
+            </a:solidFill>
+          </a:ln>
+        </p:spPr>
+        <p:style>
+          <a:lnRef idx="1">
+            <a:schemeClr val="accent1"/>
+          </a:lnRef>
+          <a:fillRef idx="3">
+            <a:schemeClr val="accent1"/>
+          </a:fillRef>
+          <a:effectRef idx="2">
+            <a:schemeClr val="accent1"/>
+          </a:effectRef>
+          <a:fontRef idx="minor">
+            <a:schemeClr val="lt1"/>
+          </a:fontRef>
+        </p:style>
+        <p:txBody>
+          <a:bodyPr rtlCol="0" anchor="ctr"/>
+          <a:lstStyle/>
+          <a:p>
+            <a:pPr algn="ctr">
+              <a:defRPr>
+                <a:latin typeface="Roboto"/>
+              </a:defRPr>
+            </a:pPr>
+          </a:p>
+        </p:txBody>
+      </p:sp>
+      <p:sp>
+        <p:nvSpPr>
+          <p:cNvPr id="8" name="TextBox 7"/>
           <p:cNvSpPr txBox="1"/>
           <p:nvPr/>
         </p:nvSpPr>
         <p:spPr>
           <a:xfrm>
-            <a:off x="457200" y="6492240"/>
-            <a:ext cx="3657600" cy="274320"/>
+            <a:off x="594360" y="5068824"/>
+            <a:ext cx="5227167" cy="274320"/>
           </a:xfrm>
           <a:prstGeom prst="rect">
             <a:avLst/>
@@ -4631,7 +6427,212 @@
           <a:noFill/>
         </p:spPr>
         <p:txBody>
-          <a:bodyPr wrap="square">
+          <a:bodyPr wrap="square" lIns="45720" rIns="45720">
+            <a:spAutoFit/>
+          </a:bodyPr>
+          <a:lstStyle/>
+          <a:p>
+            <a:pPr>
+              <a:defRPr>
+                <a:latin typeface="Roboto"/>
+              </a:defRPr>
+            </a:pPr>
+            <a:r>
+              <a:rPr sz="1000" b="1">
+                <a:solidFill>
+                  <a:srgbClr val="5F6F63"/>
+                </a:solidFill>
+                <a:latin typeface="Roboto"/>
+              </a:rPr>
+              <a:t>WHAT IT SHOWS</a:t>
+            </a:r>
+          </a:p>
+        </p:txBody>
+      </p:sp>
+      <p:sp>
+        <p:nvSpPr>
+          <p:cNvPr id="9" name="TextBox 8"/>
+          <p:cNvSpPr txBox="1"/>
+          <p:nvPr/>
+        </p:nvSpPr>
+        <p:spPr>
+          <a:xfrm>
+            <a:off x="594360" y="5343144"/>
+            <a:ext cx="5227167" cy="929640"/>
+          </a:xfrm>
+          <a:prstGeom prst="rect">
+            <a:avLst/>
+          </a:prstGeom>
+          <a:noFill/>
+        </p:spPr>
+        <p:txBody>
+          <a:bodyPr wrap="square" lIns="45720" rIns="45720">
+            <a:spAutoFit/>
+          </a:bodyPr>
+          <a:lstStyle/>
+          <a:p>
+            <a:pPr>
+              <a:defRPr>
+                <a:latin typeface="Roboto"/>
+              </a:defRPr>
+            </a:pPr>
+            <a:r>
+              <a:rPr sz="1200" b="0">
+                <a:solidFill>
+                  <a:srgbClr val="25342A"/>
+                </a:solidFill>
+                <a:latin typeface="Roboto"/>
+              </a:rPr>
+              <a:t>Housing support cost $51,514 in full in February: $26,508 paid by the State Housing Program grant, and $25,006 of shared costs no grant covers. It has spent 95.0% of its budget to date, with $302,990 left and 10 months to go.</a:t>
+            </a:r>
+          </a:p>
+        </p:txBody>
+      </p:sp>
+      <p:sp>
+        <p:nvSpPr>
+          <p:cNvPr id="10" name="Rectangle 9"/>
+          <p:cNvSpPr/>
+          <p:nvPr/>
+        </p:nvSpPr>
+        <p:spPr>
+          <a:xfrm>
+            <a:off x="6233007" y="5013960"/>
+            <a:ext cx="5501487" cy="1295400"/>
+          </a:xfrm>
+          <a:prstGeom prst="rect">
+            <a:avLst/>
+          </a:prstGeom>
+          <a:solidFill>
+            <a:srgbClr val="EEF5F0"/>
+          </a:solidFill>
+          <a:ln>
+            <a:solidFill>
+              <a:srgbClr val="DCE8DC"/>
+            </a:solidFill>
+          </a:ln>
+        </p:spPr>
+        <p:style>
+          <a:lnRef idx="1">
+            <a:schemeClr val="accent1"/>
+          </a:lnRef>
+          <a:fillRef idx="3">
+            <a:schemeClr val="accent1"/>
+          </a:fillRef>
+          <a:effectRef idx="2">
+            <a:schemeClr val="accent1"/>
+          </a:effectRef>
+          <a:fontRef idx="minor">
+            <a:schemeClr val="lt1"/>
+          </a:fontRef>
+        </p:style>
+        <p:txBody>
+          <a:bodyPr rtlCol="0" anchor="ctr"/>
+          <a:lstStyle/>
+          <a:p>
+            <a:pPr algn="ctr">
+              <a:defRPr>
+                <a:latin typeface="Roboto"/>
+              </a:defRPr>
+            </a:pPr>
+          </a:p>
+        </p:txBody>
+      </p:sp>
+      <p:sp>
+        <p:nvSpPr>
+          <p:cNvPr id="11" name="TextBox 10"/>
+          <p:cNvSpPr txBox="1"/>
+          <p:nvPr/>
+        </p:nvSpPr>
+        <p:spPr>
+          <a:xfrm>
+            <a:off x="6370167" y="5068824"/>
+            <a:ext cx="5227167" cy="274320"/>
+          </a:xfrm>
+          <a:prstGeom prst="rect">
+            <a:avLst/>
+          </a:prstGeom>
+          <a:noFill/>
+        </p:spPr>
+        <p:txBody>
+          <a:bodyPr wrap="square" lIns="45720" rIns="45720">
+            <a:spAutoFit/>
+          </a:bodyPr>
+          <a:lstStyle/>
+          <a:p>
+            <a:pPr>
+              <a:defRPr>
+                <a:latin typeface="Roboto"/>
+              </a:defRPr>
+            </a:pPr>
+            <a:r>
+              <a:rPr sz="1000" b="1">
+                <a:solidFill>
+                  <a:srgbClr val="5F6F63"/>
+                </a:solidFill>
+                <a:latin typeface="Roboto"/>
+              </a:rPr>
+              <a:t>WHAT YOU'D DO ABOUT IT</a:t>
+            </a:r>
+          </a:p>
+        </p:txBody>
+      </p:sp>
+      <p:sp>
+        <p:nvSpPr>
+          <p:cNvPr id="12" name="TextBox 11"/>
+          <p:cNvSpPr txBox="1"/>
+          <p:nvPr/>
+        </p:nvSpPr>
+        <p:spPr>
+          <a:xfrm>
+            <a:off x="6370167" y="5343144"/>
+            <a:ext cx="5227167" cy="929640"/>
+          </a:xfrm>
+          <a:prstGeom prst="rect">
+            <a:avLst/>
+          </a:prstGeom>
+          <a:noFill/>
+        </p:spPr>
+        <p:txBody>
+          <a:bodyPr wrap="square" lIns="45720" rIns="45720">
+            <a:spAutoFit/>
+          </a:bodyPr>
+          <a:lstStyle/>
+          <a:p>
+            <a:pPr>
+              <a:defRPr>
+                <a:latin typeface="Roboto"/>
+              </a:defRPr>
+            </a:pPr>
+            <a:r>
+              <a:rPr sz="1200" b="0">
+                <a:solidFill>
+                  <a:srgbClr val="25342A"/>
+                </a:solidFill>
+                <a:latin typeface="Roboto"/>
+              </a:rPr>
+              <a:t>The full cost is $51,514 a month; $25,006 of it is shared cost the grant doesn't pay for. Worth asking for as much of it as the funder allows at renewal.</a:t>
+            </a:r>
+          </a:p>
+        </p:txBody>
+      </p:sp>
+      <p:sp>
+        <p:nvSpPr>
+          <p:cNvPr id="13" name="TextBox 12"/>
+          <p:cNvSpPr txBox="1"/>
+          <p:nvPr/>
+        </p:nvSpPr>
+        <p:spPr>
+          <a:xfrm>
+            <a:off x="457200" y="6492240"/>
+            <a:ext cx="2926080" cy="274320"/>
+          </a:xfrm>
+          <a:prstGeom prst="rect">
+            <a:avLst/>
+          </a:prstGeom>
+          <a:noFill/>
+        </p:spPr>
+        <p:txBody>
+          <a:bodyPr wrap="square" lIns="45720" rIns="45720">
             <a:spAutoFit/>
           </a:bodyPr>
           <a:lstStyle/>
@@ -4655,14 +6656,14 @@
       </p:sp>
       <p:sp>
         <p:nvSpPr>
-          <p:cNvPr id="7" name="TextBox 6"/>
+          <p:cNvPr id="14" name="TextBox 13"/>
           <p:cNvSpPr txBox="1"/>
           <p:nvPr/>
         </p:nvSpPr>
         <p:spPr>
           <a:xfrm>
-            <a:off x="4297680" y="6492240"/>
-            <a:ext cx="3657600" cy="274320"/>
+            <a:off x="3108960" y="6492240"/>
+            <a:ext cx="5943600" cy="274320"/>
           </a:xfrm>
           <a:prstGeom prst="rect">
             <a:avLst/>
@@ -4670,7 +6671,7 @@
           <a:noFill/>
         </p:spPr>
         <p:txBody>
-          <a:bodyPr wrap="square">
+          <a:bodyPr wrap="square" lIns="45720" rIns="45720">
             <a:spAutoFit/>
           </a:bodyPr>
           <a:lstStyle/>
@@ -4687,14 +6688,14 @@
                 </a:solidFill>
                 <a:latin typeface="Roboto"/>
               </a:rPr>
-              <a:t>Data retrieved 2pm, Tue 6 Oct 2026 · Sample data</a:t>
-            </a:r>
-          </a:p>
-        </p:txBody>
-      </p:sp>
-      <p:sp>
-        <p:nvSpPr>
-          <p:cNvPr id="8" name="TextBox 7"/>
+              <a:t>Data retrieved 2pm, Tue 6 Oct 2026 · Generated 8 Oct 2026, 9:35am · Sample data · Made with Python (python-pptx)</a:t>
+            </a:r>
+          </a:p>
+        </p:txBody>
+      </p:sp>
+      <p:sp>
+        <p:nvSpPr>
+          <p:cNvPr id="15" name="TextBox 14"/>
           <p:cNvSpPr txBox="1"/>
           <p:nvPr/>
         </p:nvSpPr>
@@ -4709,7 +6710,7 @@
           <a:noFill/>
         </p:spPr>
         <p:txBody>
-          <a:bodyPr wrap="square">
+          <a:bodyPr wrap="square" lIns="45720" rIns="45720">
             <a:spAutoFit/>
           </a:bodyPr>
           <a:lstStyle/>
@@ -4726,7 +6727,7 @@
                 </a:solidFill>
                 <a:latin typeface="Roboto"/>
               </a:rPr>
-              <a:t>Slide 3 of 9</a:t>
+              <a:t>Slide 3 of 6</a:t>
             </a:r>
           </a:p>
         </p:txBody>
@@ -4751,7 +6752,44 @@
       <p:grpSpPr/>
       <p:sp>
         <p:nvSpPr>
-          <p:cNvPr id="2" name="Rectangle 1"/>
+          <p:cNvPr id="2" name="Title 1"/>
+          <p:cNvSpPr>
+            <a:spLocks noGrp="1"/>
+          </p:cNvSpPr>
+          <p:nvPr>
+            <p:ph type="title"/>
+          </p:nvPr>
+        </p:nvSpPr>
+        <p:spPr>
+          <a:xfrm>
+            <a:off x="457200" y="384048"/>
+            <a:ext cx="11277295" cy="475488"/>
+          </a:xfrm>
+        </p:spPr>
+        <p:txBody>
+          <a:bodyPr wrap="square" lIns="45720" rIns="45720" tIns="0" bIns="0" anchor="t"/>
+          <a:lstStyle/>
+          <a:p>
+            <a:pPr algn="l">
+              <a:defRPr>
+                <a:latin typeface="Roboto"/>
+              </a:defRPr>
+            </a:pPr>
+            <a:r>
+              <a:rPr sz="2400" b="1">
+                <a:solidFill>
+                  <a:srgbClr val="25342A"/>
+                </a:solidFill>
+                <a:latin typeface="Roboto"/>
+              </a:rPr>
+              <a:t>Youth outreach</a:t>
+            </a:r>
+          </a:p>
+        </p:txBody>
+      </p:sp>
+      <p:sp>
+        <p:nvSpPr>
+          <p:cNvPr id="3" name="Rectangle 2"/>
           <p:cNvSpPr/>
           <p:nvPr/>
         </p:nvSpPr>
@@ -4798,14 +6836,14 @@
       </p:sp>
       <p:sp>
         <p:nvSpPr>
-          <p:cNvPr id="3" name="TextBox 2"/>
+          <p:cNvPr id="4" name="TextBox 3"/>
           <p:cNvSpPr txBox="1"/>
           <p:nvPr/>
         </p:nvSpPr>
         <p:spPr>
           <a:xfrm>
-            <a:off x="457200" y="164592"/>
-            <a:ext cx="7315200" cy="274320"/>
+            <a:off x="457200" y="146304"/>
+            <a:ext cx="8229600" cy="256032"/>
           </a:xfrm>
           <a:prstGeom prst="rect">
             <a:avLst/>
@@ -4813,7 +6851,7 @@
           <a:noFill/>
         </p:spPr>
         <p:txBody>
-          <a:bodyPr wrap="square">
+          <a:bodyPr wrap="square" lIns="45720" rIns="45720">
             <a:spAutoFit/>
           </a:bodyPr>
           <a:lstStyle/>
@@ -4837,14 +6875,14 @@
       </p:sp>
       <p:sp>
         <p:nvSpPr>
-          <p:cNvPr id="4" name="TextBox 3"/>
+          <p:cNvPr id="5" name="TextBox 4"/>
           <p:cNvSpPr txBox="1"/>
           <p:nvPr/>
         </p:nvSpPr>
         <p:spPr>
           <a:xfrm>
-            <a:off x="457200" y="411480"/>
-            <a:ext cx="11247120" cy="548640"/>
+            <a:off x="457200" y="914400"/>
+            <a:ext cx="11277295" cy="263652"/>
           </a:xfrm>
           <a:prstGeom prst="rect">
             <a:avLst/>
@@ -4852,7 +6890,7 @@
           <a:noFill/>
         </p:spPr>
         <p:txBody>
-          <a:bodyPr wrap="square">
+          <a:bodyPr wrap="square" lIns="45720" rIns="45720">
             <a:spAutoFit/>
           </a:bodyPr>
           <a:lstStyle/>
@@ -4863,27 +6901,45 @@
               </a:defRPr>
             </a:pPr>
             <a:r>
-              <a:rPr sz="2400" b="1">
+              <a:rPr sz="1200" b="0">
                 <a:solidFill>
-                  <a:srgbClr val="25342A"/>
+                  <a:srgbClr val="5F6F63"/>
                 </a:solidFill>
                 <a:latin typeface="Roboto"/>
               </a:rPr>
-              <a:t>What it shows · Program: All programs</a:t>
-            </a:r>
-          </a:p>
-        </p:txBody>
-      </p:sp>
-      <p:sp>
-        <p:nvSpPr>
-          <p:cNvPr id="5" name="Rectangle 4"/>
+              <a:t>Grant spending, by month · Youth outreach</a:t>
+            </a:r>
+          </a:p>
+        </p:txBody>
+      </p:sp>
+      <p:graphicFrame>
+        <p:nvGraphicFramePr>
+          <p:cNvPr id="6" name="Chart 5"/>
+          <p:cNvGraphicFramePr>
+            <a:graphicFrameLocks noGrp="1"/>
+          </p:cNvGraphicFramePr>
+          <p:nvPr/>
+        </p:nvGraphicFramePr>
+        <p:xfrm>
+          <a:off x="457200" y="1278636"/>
+          <a:ext cx="11277295" cy="3643884"/>
+        </p:xfrm>
+        <a:graphic>
+          <a:graphicData uri="http://schemas.openxmlformats.org/drawingml/2006/chart">
+            <c:chart xmlns:c="http://schemas.openxmlformats.org/drawingml/2006/chart" r:id="rId3"/>
+          </a:graphicData>
+        </a:graphic>
+      </p:graphicFrame>
+      <p:sp>
+        <p:nvSpPr>
+          <p:cNvPr id="7" name="Rectangle 6"/>
           <p:cNvSpPr/>
           <p:nvPr/>
         </p:nvSpPr>
         <p:spPr>
           <a:xfrm>
-            <a:off x="457200" y="1554480"/>
-            <a:ext cx="5501487" cy="4389120"/>
+            <a:off x="457200" y="5013960"/>
+            <a:ext cx="5501487" cy="1295400"/>
           </a:xfrm>
           <a:prstGeom prst="rect">
             <a:avLst/>
@@ -4925,14 +6981,14 @@
       </p:sp>
       <p:sp>
         <p:nvSpPr>
-          <p:cNvPr id="6" name="TextBox 5"/>
+          <p:cNvPr id="8" name="TextBox 7"/>
           <p:cNvSpPr txBox="1"/>
           <p:nvPr/>
         </p:nvSpPr>
         <p:spPr>
           <a:xfrm>
-            <a:off x="685800" y="1691640"/>
-            <a:ext cx="5044287" cy="365760"/>
+            <a:off x="594360" y="5068824"/>
+            <a:ext cx="5227167" cy="274320"/>
           </a:xfrm>
           <a:prstGeom prst="rect">
             <a:avLst/>
@@ -4940,7 +6996,7 @@
           <a:noFill/>
         </p:spPr>
         <p:txBody>
-          <a:bodyPr wrap="square">
+          <a:bodyPr wrap="square" lIns="45720" rIns="45720">
             <a:spAutoFit/>
           </a:bodyPr>
           <a:lstStyle/>
@@ -4951,7 +7007,7 @@
               </a:defRPr>
             </a:pPr>
             <a:r>
-              <a:rPr sz="1100" b="1">
+              <a:rPr sz="1000" b="1">
                 <a:solidFill>
                   <a:srgbClr val="5F6F63"/>
                 </a:solidFill>
@@ -4964,14 +7020,14 @@
       </p:sp>
       <p:sp>
         <p:nvSpPr>
-          <p:cNvPr id="7" name="TextBox 6"/>
+          <p:cNvPr id="9" name="TextBox 8"/>
           <p:cNvSpPr txBox="1"/>
           <p:nvPr/>
         </p:nvSpPr>
         <p:spPr>
           <a:xfrm>
-            <a:off x="685800" y="2103120"/>
-            <a:ext cx="5044287" cy="3749039"/>
+            <a:off x="594360" y="5343144"/>
+            <a:ext cx="5227167" cy="929640"/>
           </a:xfrm>
           <a:prstGeom prst="rect">
             <a:avLst/>
@@ -4979,7 +7035,7 @@
           <a:noFill/>
         </p:spPr>
         <p:txBody>
-          <a:bodyPr wrap="square">
+          <a:bodyPr wrap="square" lIns="45720" rIns="45720">
             <a:spAutoFit/>
           </a:bodyPr>
           <a:lstStyle/>
@@ -4990,27 +7046,27 @@
               </a:defRPr>
             </a:pPr>
             <a:r>
-              <a:rPr sz="1600" b="0">
+              <a:rPr sz="1200" b="0">
                 <a:solidFill>
                   <a:srgbClr val="25342A"/>
                 </a:solidFill>
                 <a:latin typeface="Roboto"/>
               </a:rPr>
-              <a:t>Housing support is the biggest program: $51,514 in February once its share of untied program costs and administration is added to $26,508 of grant spending. Shared costs add 94.3% on top of grant spending across all programs.</a:t>
-            </a:r>
-          </a:p>
-        </p:txBody>
-      </p:sp>
-      <p:sp>
-        <p:nvSpPr>
-          <p:cNvPr id="8" name="Rectangle 7"/>
+              <a:t>Youth outreach cost $40,311 in full in February: $20,743 paid by the State Department of Families grant, and $19,568 of shared costs no grant covers. It has spent 100.1% of its budget to date, with $319,780 left and 16 months to go.</a:t>
+            </a:r>
+          </a:p>
+        </p:txBody>
+      </p:sp>
+      <p:sp>
+        <p:nvSpPr>
+          <p:cNvPr id="10" name="Rectangle 9"/>
           <p:cNvSpPr/>
           <p:nvPr/>
         </p:nvSpPr>
         <p:spPr>
           <a:xfrm>
-            <a:off x="6233007" y="1554480"/>
-            <a:ext cx="5501487" cy="4389120"/>
+            <a:off x="6233007" y="5013960"/>
+            <a:ext cx="5501487" cy="1295400"/>
           </a:xfrm>
           <a:prstGeom prst="rect">
             <a:avLst/>
@@ -5052,14 +7108,14 @@
       </p:sp>
       <p:sp>
         <p:nvSpPr>
-          <p:cNvPr id="9" name="TextBox 8"/>
+          <p:cNvPr id="11" name="TextBox 10"/>
           <p:cNvSpPr txBox="1"/>
           <p:nvPr/>
         </p:nvSpPr>
         <p:spPr>
           <a:xfrm>
-            <a:off x="6461607" y="1691640"/>
-            <a:ext cx="5044287" cy="365760"/>
+            <a:off x="6370167" y="5068824"/>
+            <a:ext cx="5227167" cy="274320"/>
           </a:xfrm>
           <a:prstGeom prst="rect">
             <a:avLst/>
@@ -5067,7 +7123,7 @@
           <a:noFill/>
         </p:spPr>
         <p:txBody>
-          <a:bodyPr wrap="square">
+          <a:bodyPr wrap="square" lIns="45720" rIns="45720">
             <a:spAutoFit/>
           </a:bodyPr>
           <a:lstStyle/>
@@ -5078,7 +7134,7 @@
               </a:defRPr>
             </a:pPr>
             <a:r>
-              <a:rPr sz="1100" b="1">
+              <a:rPr sz="1000" b="1">
                 <a:solidFill>
                   <a:srgbClr val="5F6F63"/>
                 </a:solidFill>
@@ -5091,14 +7147,14 @@
       </p:sp>
       <p:sp>
         <p:nvSpPr>
-          <p:cNvPr id="10" name="TextBox 9"/>
+          <p:cNvPr id="12" name="TextBox 11"/>
           <p:cNvSpPr txBox="1"/>
           <p:nvPr/>
         </p:nvSpPr>
         <p:spPr>
           <a:xfrm>
-            <a:off x="6461607" y="2103120"/>
-            <a:ext cx="5044287" cy="3749039"/>
+            <a:off x="6370167" y="5343144"/>
+            <a:ext cx="5227167" cy="929640"/>
           </a:xfrm>
           <a:prstGeom prst="rect">
             <a:avLst/>
@@ -5106,7 +7162,7 @@
           <a:noFill/>
         </p:spPr>
         <p:txBody>
-          <a:bodyPr wrap="square">
+          <a:bodyPr wrap="square" lIns="45720" rIns="45720">
             <a:spAutoFit/>
           </a:bodyPr>
           <a:lstStyle/>
@@ -5117,27 +7173,27 @@
               </a:defRPr>
             </a:pPr>
             <a:r>
-              <a:rPr sz="1600" b="0">
+              <a:rPr sz="1200" b="0">
                 <a:solidFill>
                   <a:srgbClr val="25342A"/>
                 </a:solidFill>
                 <a:latin typeface="Roboto"/>
               </a:rPr>
-              <a:t>The full cost (not just the grant line) is the number for renewal applications, where the funder lets you recover a share of overheads. Pick a program above to see it on its own.</a:t>
-            </a:r>
-          </a:p>
-        </p:txBody>
-      </p:sp>
-      <p:sp>
-        <p:nvSpPr>
-          <p:cNvPr id="11" name="TextBox 10"/>
+              <a:t>The full cost is $40,311 a month; $19,568 of it is shared cost the grant doesn't pay for. Worth asking for as much of it as the funder allows at renewal.</a:t>
+            </a:r>
+          </a:p>
+        </p:txBody>
+      </p:sp>
+      <p:sp>
+        <p:nvSpPr>
+          <p:cNvPr id="13" name="TextBox 12"/>
           <p:cNvSpPr txBox="1"/>
           <p:nvPr/>
         </p:nvSpPr>
         <p:spPr>
           <a:xfrm>
             <a:off x="457200" y="6492240"/>
-            <a:ext cx="3657600" cy="274320"/>
+            <a:ext cx="2926080" cy="274320"/>
           </a:xfrm>
           <a:prstGeom prst="rect">
             <a:avLst/>
@@ -5145,7 +7201,7 @@
           <a:noFill/>
         </p:spPr>
         <p:txBody>
-          <a:bodyPr wrap="square">
+          <a:bodyPr wrap="square" lIns="45720" rIns="45720">
             <a:spAutoFit/>
           </a:bodyPr>
           <a:lstStyle/>
@@ -5169,14 +7225,14 @@
       </p:sp>
       <p:sp>
         <p:nvSpPr>
-          <p:cNvPr id="12" name="TextBox 11"/>
+          <p:cNvPr id="14" name="TextBox 13"/>
           <p:cNvSpPr txBox="1"/>
           <p:nvPr/>
         </p:nvSpPr>
         <p:spPr>
           <a:xfrm>
-            <a:off x="4297680" y="6492240"/>
-            <a:ext cx="3657600" cy="274320"/>
+            <a:off x="3108960" y="6492240"/>
+            <a:ext cx="5943600" cy="274320"/>
           </a:xfrm>
           <a:prstGeom prst="rect">
             <a:avLst/>
@@ -5184,7 +7240,7 @@
           <a:noFill/>
         </p:spPr>
         <p:txBody>
-          <a:bodyPr wrap="square">
+          <a:bodyPr wrap="square" lIns="45720" rIns="45720">
             <a:spAutoFit/>
           </a:bodyPr>
           <a:lstStyle/>
@@ -5201,14 +7257,14 @@
                 </a:solidFill>
                 <a:latin typeface="Roboto"/>
               </a:rPr>
-              <a:t>Data retrieved 2pm, Tue 6 Oct 2026 · Sample data</a:t>
-            </a:r>
-          </a:p>
-        </p:txBody>
-      </p:sp>
-      <p:sp>
-        <p:nvSpPr>
-          <p:cNvPr id="13" name="TextBox 12"/>
+              <a:t>Data retrieved 2pm, Tue 6 Oct 2026 · Generated 8 Oct 2026, 9:35am · Sample data · Made with Python (python-pptx)</a:t>
+            </a:r>
+          </a:p>
+        </p:txBody>
+      </p:sp>
+      <p:sp>
+        <p:nvSpPr>
+          <p:cNvPr id="15" name="TextBox 14"/>
           <p:cNvSpPr txBox="1"/>
           <p:nvPr/>
         </p:nvSpPr>
@@ -5223,7 +7279,7 @@
           <a:noFill/>
         </p:spPr>
         <p:txBody>
-          <a:bodyPr wrap="square">
+          <a:bodyPr wrap="square" lIns="45720" rIns="45720">
             <a:spAutoFit/>
           </a:bodyPr>
           <a:lstStyle/>
@@ -5240,7 +7296,7 @@
                 </a:solidFill>
                 <a:latin typeface="Roboto"/>
               </a:rPr>
-              <a:t>Slide 4 of 9</a:t>
+              <a:t>Slide 4 of 6</a:t>
             </a:r>
           </a:p>
         </p:txBody>
@@ -5265,7 +7321,44 @@
       <p:grpSpPr/>
       <p:sp>
         <p:nvSpPr>
-          <p:cNvPr id="2" name="Rectangle 1"/>
+          <p:cNvPr id="2" name="Title 1"/>
+          <p:cNvSpPr>
+            <a:spLocks noGrp="1"/>
+          </p:cNvSpPr>
+          <p:nvPr>
+            <p:ph type="title"/>
+          </p:nvPr>
+        </p:nvSpPr>
+        <p:spPr>
+          <a:xfrm>
+            <a:off x="457200" y="384048"/>
+            <a:ext cx="11277295" cy="475488"/>
+          </a:xfrm>
+        </p:spPr>
+        <p:txBody>
+          <a:bodyPr wrap="square" lIns="45720" rIns="45720" tIns="0" bIns="0" anchor="t"/>
+          <a:lstStyle/>
+          <a:p>
+            <a:pPr algn="l">
+              <a:defRPr>
+                <a:latin typeface="Roboto"/>
+              </a:defRPr>
+            </a:pPr>
+            <a:r>
+              <a:rPr sz="2400" b="1">
+                <a:solidFill>
+                  <a:srgbClr val="25342A"/>
+                </a:solidFill>
+                <a:latin typeface="Roboto"/>
+              </a:rPr>
+              <a:t>Digital literacy</a:t>
+            </a:r>
+          </a:p>
+        </p:txBody>
+      </p:sp>
+      <p:sp>
+        <p:nvSpPr>
+          <p:cNvPr id="3" name="Rectangle 2"/>
           <p:cNvSpPr/>
           <p:nvPr/>
         </p:nvSpPr>
@@ -5312,14 +7405,14 @@
       </p:sp>
       <p:sp>
         <p:nvSpPr>
-          <p:cNvPr id="3" name="TextBox 2"/>
+          <p:cNvPr id="4" name="TextBox 3"/>
           <p:cNvSpPr txBox="1"/>
           <p:nvPr/>
         </p:nvSpPr>
         <p:spPr>
           <a:xfrm>
-            <a:off x="457200" y="164592"/>
-            <a:ext cx="7315200" cy="274320"/>
+            <a:off x="457200" y="146304"/>
+            <a:ext cx="8229600" cy="256032"/>
           </a:xfrm>
           <a:prstGeom prst="rect">
             <a:avLst/>
@@ -5327,7 +7420,7 @@
           <a:noFill/>
         </p:spPr>
         <p:txBody>
-          <a:bodyPr wrap="square">
+          <a:bodyPr wrap="square" lIns="45720" rIns="45720">
             <a:spAutoFit/>
           </a:bodyPr>
           <a:lstStyle/>
@@ -5351,14 +7444,14 @@
       </p:sp>
       <p:sp>
         <p:nvSpPr>
-          <p:cNvPr id="4" name="TextBox 3"/>
+          <p:cNvPr id="5" name="TextBox 4"/>
           <p:cNvSpPr txBox="1"/>
           <p:nvPr/>
         </p:nvSpPr>
         <p:spPr>
           <a:xfrm>
-            <a:off x="457200" y="411480"/>
-            <a:ext cx="11247120" cy="548640"/>
+            <a:off x="457200" y="914400"/>
+            <a:ext cx="11277295" cy="263652"/>
           </a:xfrm>
           <a:prstGeom prst="rect">
             <a:avLst/>
@@ -5366,7 +7459,7 @@
           <a:noFill/>
         </p:spPr>
         <p:txBody>
-          <a:bodyPr wrap="square">
+          <a:bodyPr wrap="square" lIns="45720" rIns="45720">
             <a:spAutoFit/>
           </a:bodyPr>
           <a:lstStyle/>
@@ -5377,27 +7470,45 @@
               </a:defRPr>
             </a:pPr>
             <a:r>
-              <a:rPr sz="2400" b="1">
+              <a:rPr sz="1200" b="0">
                 <a:solidFill>
-                  <a:srgbClr val="25342A"/>
+                  <a:srgbClr val="5F6F63"/>
                 </a:solidFill>
                 <a:latin typeface="Roboto"/>
               </a:rPr>
-              <a:t>What it shows · Program: Housing support</a:t>
-            </a:r>
-          </a:p>
-        </p:txBody>
-      </p:sp>
-      <p:sp>
-        <p:nvSpPr>
-          <p:cNvPr id="5" name="Rectangle 4"/>
+              <a:t>Grant spending, by month · Digital literacy</a:t>
+            </a:r>
+          </a:p>
+        </p:txBody>
+      </p:sp>
+      <p:graphicFrame>
+        <p:nvGraphicFramePr>
+          <p:cNvPr id="6" name="Chart 5"/>
+          <p:cNvGraphicFramePr>
+            <a:graphicFrameLocks noGrp="1"/>
+          </p:cNvGraphicFramePr>
+          <p:nvPr/>
+        </p:nvGraphicFramePr>
+        <p:xfrm>
+          <a:off x="457200" y="1278636"/>
+          <a:ext cx="11277295" cy="3643884"/>
+        </p:xfrm>
+        <a:graphic>
+          <a:graphicData uri="http://schemas.openxmlformats.org/drawingml/2006/chart">
+            <c:chart xmlns:c="http://schemas.openxmlformats.org/drawingml/2006/chart" r:id="rId3"/>
+          </a:graphicData>
+        </a:graphic>
+      </p:graphicFrame>
+      <p:sp>
+        <p:nvSpPr>
+          <p:cNvPr id="7" name="Rectangle 6"/>
           <p:cNvSpPr/>
           <p:nvPr/>
         </p:nvSpPr>
         <p:spPr>
           <a:xfrm>
-            <a:off x="457200" y="1554480"/>
-            <a:ext cx="5501487" cy="4389120"/>
+            <a:off x="457200" y="5013960"/>
+            <a:ext cx="5501487" cy="1295400"/>
           </a:xfrm>
           <a:prstGeom prst="rect">
             <a:avLst/>
@@ -5439,14 +7550,14 @@
       </p:sp>
       <p:sp>
         <p:nvSpPr>
-          <p:cNvPr id="6" name="TextBox 5"/>
+          <p:cNvPr id="8" name="TextBox 7"/>
           <p:cNvSpPr txBox="1"/>
           <p:nvPr/>
         </p:nvSpPr>
         <p:spPr>
           <a:xfrm>
-            <a:off x="685800" y="1691640"/>
-            <a:ext cx="5044287" cy="365760"/>
+            <a:off x="594360" y="5068824"/>
+            <a:ext cx="5227167" cy="274320"/>
           </a:xfrm>
           <a:prstGeom prst="rect">
             <a:avLst/>
@@ -5454,7 +7565,7 @@
           <a:noFill/>
         </p:spPr>
         <p:txBody>
-          <a:bodyPr wrap="square">
+          <a:bodyPr wrap="square" lIns="45720" rIns="45720">
             <a:spAutoFit/>
           </a:bodyPr>
           <a:lstStyle/>
@@ -5465,7 +7576,7 @@
               </a:defRPr>
             </a:pPr>
             <a:r>
-              <a:rPr sz="1100" b="1">
+              <a:rPr sz="1000" b="1">
                 <a:solidFill>
                   <a:srgbClr val="5F6F63"/>
                 </a:solidFill>
@@ -5478,14 +7589,14 @@
       </p:sp>
       <p:sp>
         <p:nvSpPr>
-          <p:cNvPr id="7" name="TextBox 6"/>
+          <p:cNvPr id="9" name="TextBox 8"/>
           <p:cNvSpPr txBox="1"/>
           <p:nvPr/>
         </p:nvSpPr>
         <p:spPr>
           <a:xfrm>
-            <a:off x="685800" y="2103120"/>
-            <a:ext cx="5044287" cy="3749039"/>
+            <a:off x="594360" y="5343144"/>
+            <a:ext cx="5227167" cy="929640"/>
           </a:xfrm>
           <a:prstGeom prst="rect">
             <a:avLst/>
@@ -5493,7 +7604,7 @@
           <a:noFill/>
         </p:spPr>
         <p:txBody>
-          <a:bodyPr wrap="square">
+          <a:bodyPr wrap="square" lIns="45720" rIns="45720">
             <a:spAutoFit/>
           </a:bodyPr>
           <a:lstStyle/>
@@ -5504,27 +7615,27 @@
               </a:defRPr>
             </a:pPr>
             <a:r>
-              <a:rPr sz="1600" b="0">
+              <a:rPr sz="1200" b="0">
                 <a:solidFill>
                   <a:srgbClr val="25342A"/>
                 </a:solidFill>
                 <a:latin typeface="Roboto"/>
               </a:rPr>
-              <a:t>Housing support cost $51,514 in full in February: $26,508 paid by the State Housing Program grant, and $25,006 of shared costs no grant covers. It has spent 95.0% of its budget to date, with $302,990 left and 10 months to go.</a:t>
-            </a:r>
-          </a:p>
-        </p:txBody>
-      </p:sp>
-      <p:sp>
-        <p:nvSpPr>
-          <p:cNvPr id="8" name="Rectangle 7"/>
+              <a:t>Digital literacy cost $10,510 in full in February: $5,408 paid by the Philanthropic foundation grant, and $5,102 of shared costs no grant covers. It has spent 99.2% of its budget to date, with $65,200 left and 13 months to go.</a:t>
+            </a:r>
+          </a:p>
+        </p:txBody>
+      </p:sp>
+      <p:sp>
+        <p:nvSpPr>
+          <p:cNvPr id="10" name="Rectangle 9"/>
           <p:cNvSpPr/>
           <p:nvPr/>
         </p:nvSpPr>
         <p:spPr>
           <a:xfrm>
-            <a:off x="6233007" y="1554480"/>
-            <a:ext cx="5501487" cy="4389120"/>
+            <a:off x="6233007" y="5013960"/>
+            <a:ext cx="5501487" cy="1295400"/>
           </a:xfrm>
           <a:prstGeom prst="rect">
             <a:avLst/>
@@ -5566,14 +7677,14 @@
       </p:sp>
       <p:sp>
         <p:nvSpPr>
-          <p:cNvPr id="9" name="TextBox 8"/>
+          <p:cNvPr id="11" name="TextBox 10"/>
           <p:cNvSpPr txBox="1"/>
           <p:nvPr/>
         </p:nvSpPr>
         <p:spPr>
           <a:xfrm>
-            <a:off x="6461607" y="1691640"/>
-            <a:ext cx="5044287" cy="365760"/>
+            <a:off x="6370167" y="5068824"/>
+            <a:ext cx="5227167" cy="274320"/>
           </a:xfrm>
           <a:prstGeom prst="rect">
             <a:avLst/>
@@ -5581,7 +7692,7 @@
           <a:noFill/>
         </p:spPr>
         <p:txBody>
-          <a:bodyPr wrap="square">
+          <a:bodyPr wrap="square" lIns="45720" rIns="45720">
             <a:spAutoFit/>
           </a:bodyPr>
           <a:lstStyle/>
@@ -5592,7 +7703,7 @@
               </a:defRPr>
             </a:pPr>
             <a:r>
-              <a:rPr sz="1100" b="1">
+              <a:rPr sz="1000" b="1">
                 <a:solidFill>
                   <a:srgbClr val="5F6F63"/>
                 </a:solidFill>
@@ -5605,14 +7716,14 @@
       </p:sp>
       <p:sp>
         <p:nvSpPr>
-          <p:cNvPr id="10" name="TextBox 9"/>
+          <p:cNvPr id="12" name="TextBox 11"/>
           <p:cNvSpPr txBox="1"/>
           <p:nvPr/>
         </p:nvSpPr>
         <p:spPr>
           <a:xfrm>
-            <a:off x="6461607" y="2103120"/>
-            <a:ext cx="5044287" cy="3749039"/>
+            <a:off x="6370167" y="5343144"/>
+            <a:ext cx="5227167" cy="929640"/>
           </a:xfrm>
           <a:prstGeom prst="rect">
             <a:avLst/>
@@ -5620,7 +7731,7 @@
           <a:noFill/>
         </p:spPr>
         <p:txBody>
-          <a:bodyPr wrap="square">
+          <a:bodyPr wrap="square" lIns="45720" rIns="45720">
             <a:spAutoFit/>
           </a:bodyPr>
           <a:lstStyle/>
@@ -5631,27 +7742,27 @@
               </a:defRPr>
             </a:pPr>
             <a:r>
-              <a:rPr sz="1600" b="0">
+              <a:rPr sz="1200" b="0">
                 <a:solidFill>
                   <a:srgbClr val="25342A"/>
                 </a:solidFill>
                 <a:latin typeface="Roboto"/>
               </a:rPr>
-              <a:t>The full cost is $51,514 a month; $25,006 of it is shared cost the grant doesn't pay for. Worth asking for as much of it as the funder allows at renewal.</a:t>
-            </a:r>
-          </a:p>
-        </p:txBody>
-      </p:sp>
-      <p:sp>
-        <p:nvSpPr>
-          <p:cNvPr id="11" name="TextBox 10"/>
+              <a:t>The full cost is $10,510 a month; $5,102 of it is shared cost the grant doesn't pay for. Worth asking for as much of it as the funder allows at renewal.</a:t>
+            </a:r>
+          </a:p>
+        </p:txBody>
+      </p:sp>
+      <p:sp>
+        <p:nvSpPr>
+          <p:cNvPr id="13" name="TextBox 12"/>
           <p:cNvSpPr txBox="1"/>
           <p:nvPr/>
         </p:nvSpPr>
         <p:spPr>
           <a:xfrm>
             <a:off x="457200" y="6492240"/>
-            <a:ext cx="3657600" cy="274320"/>
+            <a:ext cx="2926080" cy="274320"/>
           </a:xfrm>
           <a:prstGeom prst="rect">
             <a:avLst/>
@@ -5659,7 +7770,7 @@
           <a:noFill/>
         </p:spPr>
         <p:txBody>
-          <a:bodyPr wrap="square">
+          <a:bodyPr wrap="square" lIns="45720" rIns="45720">
             <a:spAutoFit/>
           </a:bodyPr>
           <a:lstStyle/>
@@ -5683,14 +7794,14 @@
       </p:sp>
       <p:sp>
         <p:nvSpPr>
-          <p:cNvPr id="12" name="TextBox 11"/>
+          <p:cNvPr id="14" name="TextBox 13"/>
           <p:cNvSpPr txBox="1"/>
           <p:nvPr/>
         </p:nvSpPr>
         <p:spPr>
           <a:xfrm>
-            <a:off x="4297680" y="6492240"/>
-            <a:ext cx="3657600" cy="274320"/>
+            <a:off x="3108960" y="6492240"/>
+            <a:ext cx="5943600" cy="274320"/>
           </a:xfrm>
           <a:prstGeom prst="rect">
             <a:avLst/>
@@ -5698,7 +7809,7 @@
           <a:noFill/>
         </p:spPr>
         <p:txBody>
-          <a:bodyPr wrap="square">
+          <a:bodyPr wrap="square" lIns="45720" rIns="45720">
             <a:spAutoFit/>
           </a:bodyPr>
           <a:lstStyle/>
@@ -5715,14 +7826,14 @@
                 </a:solidFill>
                 <a:latin typeface="Roboto"/>
               </a:rPr>
-              <a:t>Data retrieved 2pm, Tue 6 Oct 2026 · Sample data</a:t>
-            </a:r>
-          </a:p>
-        </p:txBody>
-      </p:sp>
-      <p:sp>
-        <p:nvSpPr>
-          <p:cNvPr id="13" name="TextBox 12"/>
+              <a:t>Data retrieved 2pm, Tue 6 Oct 2026 · Generated 8 Oct 2026, 9:35am · Sample data · Made with Python (python-pptx)</a:t>
+            </a:r>
+          </a:p>
+        </p:txBody>
+      </p:sp>
+      <p:sp>
+        <p:nvSpPr>
+          <p:cNvPr id="15" name="TextBox 14"/>
           <p:cNvSpPr txBox="1"/>
           <p:nvPr/>
         </p:nvSpPr>
@@ -5737,7 +7848,7 @@
           <a:noFill/>
         </p:spPr>
         <p:txBody>
-          <a:bodyPr wrap="square">
+          <a:bodyPr wrap="square" lIns="45720" rIns="45720">
             <a:spAutoFit/>
           </a:bodyPr>
           <a:lstStyle/>
@@ -5754,7 +7865,7 @@
                 </a:solidFill>
                 <a:latin typeface="Roboto"/>
               </a:rPr>
-              <a:t>Slide 5 of 9</a:t>
+              <a:t>Slide 5 of 6</a:t>
             </a:r>
           </a:p>
         </p:txBody>
@@ -5779,7 +7890,44 @@
       <p:grpSpPr/>
       <p:sp>
         <p:nvSpPr>
-          <p:cNvPr id="2" name="Rectangle 1"/>
+          <p:cNvPr id="2" name="Title 1"/>
+          <p:cNvSpPr>
+            <a:spLocks noGrp="1"/>
+          </p:cNvSpPr>
+          <p:nvPr>
+            <p:ph type="title"/>
+          </p:nvPr>
+        </p:nvSpPr>
+        <p:spPr>
+          <a:xfrm>
+            <a:off x="457200" y="384048"/>
+            <a:ext cx="11277295" cy="475488"/>
+          </a:xfrm>
+        </p:spPr>
+        <p:txBody>
+          <a:bodyPr wrap="square" lIns="45720" rIns="45720" tIns="0" bIns="0" anchor="t"/>
+          <a:lstStyle/>
+          <a:p>
+            <a:pPr algn="l">
+              <a:defRPr>
+                <a:latin typeface="Roboto"/>
+              </a:defRPr>
+            </a:pPr>
+            <a:r>
+              <a:rPr sz="2400" b="1">
+                <a:solidFill>
+                  <a:srgbClr val="25342A"/>
+                </a:solidFill>
+                <a:latin typeface="Roboto"/>
+              </a:rPr>
+              <a:t>Community meals (2025-26)</a:t>
+            </a:r>
+          </a:p>
+        </p:txBody>
+      </p:sp>
+      <p:sp>
+        <p:nvSpPr>
+          <p:cNvPr id="3" name="Rectangle 2"/>
           <p:cNvSpPr/>
           <p:nvPr/>
         </p:nvSpPr>
@@ -5826,14 +7974,14 @@
       </p:sp>
       <p:sp>
         <p:nvSpPr>
-          <p:cNvPr id="3" name="TextBox 2"/>
+          <p:cNvPr id="4" name="TextBox 3"/>
           <p:cNvSpPr txBox="1"/>
           <p:nvPr/>
         </p:nvSpPr>
         <p:spPr>
           <a:xfrm>
-            <a:off x="457200" y="164592"/>
-            <a:ext cx="7315200" cy="274320"/>
+            <a:off x="457200" y="146304"/>
+            <a:ext cx="8229600" cy="256032"/>
           </a:xfrm>
           <a:prstGeom prst="rect">
             <a:avLst/>
@@ -5841,7 +7989,7 @@
           <a:noFill/>
         </p:spPr>
         <p:txBody>
-          <a:bodyPr wrap="square">
+          <a:bodyPr wrap="square" lIns="45720" rIns="45720">
             <a:spAutoFit/>
           </a:bodyPr>
           <a:lstStyle/>
@@ -5865,14 +8013,14 @@
       </p:sp>
       <p:sp>
         <p:nvSpPr>
-          <p:cNvPr id="4" name="TextBox 3"/>
+          <p:cNvPr id="5" name="TextBox 4"/>
           <p:cNvSpPr txBox="1"/>
           <p:nvPr/>
         </p:nvSpPr>
         <p:spPr>
           <a:xfrm>
-            <a:off x="457200" y="411480"/>
-            <a:ext cx="11247120" cy="548640"/>
+            <a:off x="457200" y="914400"/>
+            <a:ext cx="11277295" cy="263652"/>
           </a:xfrm>
           <a:prstGeom prst="rect">
             <a:avLst/>
@@ -5880,7 +8028,7 @@
           <a:noFill/>
         </p:spPr>
         <p:txBody>
-          <a:bodyPr wrap="square">
+          <a:bodyPr wrap="square" lIns="45720" rIns="45720">
             <a:spAutoFit/>
           </a:bodyPr>
           <a:lstStyle/>
@@ -5891,27 +8039,45 @@
               </a:defRPr>
             </a:pPr>
             <a:r>
-              <a:rPr sz="2400" b="1">
+              <a:rPr sz="1200" b="0">
                 <a:solidFill>
-                  <a:srgbClr val="25342A"/>
+                  <a:srgbClr val="5F6F63"/>
                 </a:solidFill>
                 <a:latin typeface="Roboto"/>
               </a:rPr>
-              <a:t>What it shows · Program: Youth outreach</a:t>
-            </a:r>
-          </a:p>
-        </p:txBody>
-      </p:sp>
-      <p:sp>
-        <p:nvSpPr>
-          <p:cNvPr id="5" name="Rectangle 4"/>
+              <a:t>Grant spending, by month · Community meals (2025-26)</a:t>
+            </a:r>
+          </a:p>
+        </p:txBody>
+      </p:sp>
+      <p:graphicFrame>
+        <p:nvGraphicFramePr>
+          <p:cNvPr id="6" name="Chart 5"/>
+          <p:cNvGraphicFramePr>
+            <a:graphicFrameLocks noGrp="1"/>
+          </p:cNvGraphicFramePr>
+          <p:nvPr/>
+        </p:nvGraphicFramePr>
+        <p:xfrm>
+          <a:off x="457200" y="1278636"/>
+          <a:ext cx="11277295" cy="3643884"/>
+        </p:xfrm>
+        <a:graphic>
+          <a:graphicData uri="http://schemas.openxmlformats.org/drawingml/2006/chart">
+            <c:chart xmlns:c="http://schemas.openxmlformats.org/drawingml/2006/chart" r:id="rId3"/>
+          </a:graphicData>
+        </a:graphic>
+      </p:graphicFrame>
+      <p:sp>
+        <p:nvSpPr>
+          <p:cNvPr id="7" name="Rectangle 6"/>
           <p:cNvSpPr/>
           <p:nvPr/>
         </p:nvSpPr>
         <p:spPr>
           <a:xfrm>
-            <a:off x="457200" y="1554480"/>
-            <a:ext cx="5501487" cy="4389120"/>
+            <a:off x="457200" y="5013960"/>
+            <a:ext cx="5501487" cy="1295400"/>
           </a:xfrm>
           <a:prstGeom prst="rect">
             <a:avLst/>
@@ -5953,14 +8119,14 @@
       </p:sp>
       <p:sp>
         <p:nvSpPr>
-          <p:cNvPr id="6" name="TextBox 5"/>
+          <p:cNvPr id="8" name="TextBox 7"/>
           <p:cNvSpPr txBox="1"/>
           <p:nvPr/>
         </p:nvSpPr>
         <p:spPr>
           <a:xfrm>
-            <a:off x="685800" y="1691640"/>
-            <a:ext cx="5044287" cy="365760"/>
+            <a:off x="594360" y="5068824"/>
+            <a:ext cx="5227167" cy="274320"/>
           </a:xfrm>
           <a:prstGeom prst="rect">
             <a:avLst/>
@@ -5968,7 +8134,7 @@
           <a:noFill/>
         </p:spPr>
         <p:txBody>
-          <a:bodyPr wrap="square">
+          <a:bodyPr wrap="square" lIns="45720" rIns="45720">
             <a:spAutoFit/>
           </a:bodyPr>
           <a:lstStyle/>
@@ -5979,7 +8145,7 @@
               </a:defRPr>
             </a:pPr>
             <a:r>
-              <a:rPr sz="1100" b="1">
+              <a:rPr sz="1000" b="1">
                 <a:solidFill>
                   <a:srgbClr val="5F6F63"/>
                 </a:solidFill>
@@ -5992,14 +8158,14 @@
       </p:sp>
       <p:sp>
         <p:nvSpPr>
-          <p:cNvPr id="7" name="TextBox 6"/>
+          <p:cNvPr id="9" name="TextBox 8"/>
           <p:cNvSpPr txBox="1"/>
           <p:nvPr/>
         </p:nvSpPr>
         <p:spPr>
           <a:xfrm>
-            <a:off x="685800" y="2103120"/>
-            <a:ext cx="5044287" cy="3749039"/>
+            <a:off x="594360" y="5343144"/>
+            <a:ext cx="5227167" cy="929640"/>
           </a:xfrm>
           <a:prstGeom prst="rect">
             <a:avLst/>
@@ -6007,7 +8173,7 @@
           <a:noFill/>
         </p:spPr>
         <p:txBody>
-          <a:bodyPr wrap="square">
+          <a:bodyPr wrap="square" lIns="45720" rIns="45720">
             <a:spAutoFit/>
           </a:bodyPr>
           <a:lstStyle/>
@@ -6018,27 +8184,27 @@
               </a:defRPr>
             </a:pPr>
             <a:r>
-              <a:rPr sz="1600" b="0">
+              <a:rPr sz="1200" b="0">
                 <a:solidFill>
                   <a:srgbClr val="25342A"/>
                 </a:solidFill>
                 <a:latin typeface="Roboto"/>
               </a:rPr>
-              <a:t>Youth outreach cost $40,311 in full in February: $20,743 paid by the State Department of Families grant, and $19,568 of shared costs no grant covers. It has spent 100.1% of its budget to date, with $319,780 left and 16 months to go.</a:t>
-            </a:r>
-          </a:p>
-        </p:txBody>
-      </p:sp>
-      <p:sp>
-        <p:nvSpPr>
-          <p:cNvPr id="8" name="Rectangle 7"/>
+              <a:t>Community meals (2025-26) cost $6,024 in full in February: $3,100 paid by the Local council community grant grant, and $2,924 of shared costs no grant covers. It has spent 94.8% of its budget to date, with $16,200 left and 4 months to go.</a:t>
+            </a:r>
+          </a:p>
+        </p:txBody>
+      </p:sp>
+      <p:sp>
+        <p:nvSpPr>
+          <p:cNvPr id="10" name="Rectangle 9"/>
           <p:cNvSpPr/>
           <p:nvPr/>
         </p:nvSpPr>
         <p:spPr>
           <a:xfrm>
-            <a:off x="6233007" y="1554480"/>
-            <a:ext cx="5501487" cy="4389120"/>
+            <a:off x="6233007" y="5013960"/>
+            <a:ext cx="5501487" cy="1295400"/>
           </a:xfrm>
           <a:prstGeom prst="rect">
             <a:avLst/>
@@ -6080,14 +8246,14 @@
       </p:sp>
       <p:sp>
         <p:nvSpPr>
-          <p:cNvPr id="9" name="TextBox 8"/>
+          <p:cNvPr id="11" name="TextBox 10"/>
           <p:cNvSpPr txBox="1"/>
           <p:nvPr/>
         </p:nvSpPr>
         <p:spPr>
           <a:xfrm>
-            <a:off x="6461607" y="1691640"/>
-            <a:ext cx="5044287" cy="365760"/>
+            <a:off x="6370167" y="5068824"/>
+            <a:ext cx="5227167" cy="274320"/>
           </a:xfrm>
           <a:prstGeom prst="rect">
             <a:avLst/>
@@ -6095,7 +8261,7 @@
           <a:noFill/>
         </p:spPr>
         <p:txBody>
-          <a:bodyPr wrap="square">
+          <a:bodyPr wrap="square" lIns="45720" rIns="45720">
             <a:spAutoFit/>
           </a:bodyPr>
           <a:lstStyle/>
@@ -6106,7 +8272,7 @@
               </a:defRPr>
             </a:pPr>
             <a:r>
-              <a:rPr sz="1100" b="1">
+              <a:rPr sz="1000" b="1">
                 <a:solidFill>
                   <a:srgbClr val="5F6F63"/>
                 </a:solidFill>
@@ -6119,14 +8285,14 @@
       </p:sp>
       <p:sp>
         <p:nvSpPr>
-          <p:cNvPr id="10" name="TextBox 9"/>
+          <p:cNvPr id="12" name="TextBox 11"/>
           <p:cNvSpPr txBox="1"/>
           <p:nvPr/>
         </p:nvSpPr>
         <p:spPr>
           <a:xfrm>
-            <a:off x="6461607" y="2103120"/>
-            <a:ext cx="5044287" cy="3749039"/>
+            <a:off x="6370167" y="5343144"/>
+            <a:ext cx="5227167" cy="929640"/>
           </a:xfrm>
           <a:prstGeom prst="rect">
             <a:avLst/>
@@ -6134,7 +8300,7 @@
           <a:noFill/>
         </p:spPr>
         <p:txBody>
-          <a:bodyPr wrap="square">
+          <a:bodyPr wrap="square" lIns="45720" rIns="45720">
             <a:spAutoFit/>
           </a:bodyPr>
           <a:lstStyle/>
@@ -6145,27 +8311,27 @@
               </a:defRPr>
             </a:pPr>
             <a:r>
-              <a:rPr sz="1600" b="0">
+              <a:rPr sz="1200" b="0">
                 <a:solidFill>
                   <a:srgbClr val="25342A"/>
                 </a:solidFill>
                 <a:latin typeface="Roboto"/>
               </a:rPr>
-              <a:t>The full cost is $40,311 a month; $19,568 of it is shared cost the grant doesn't pay for. Worth asking for as much of it as the funder allows at renewal.</a:t>
-            </a:r>
-          </a:p>
-        </p:txBody>
-      </p:sp>
-      <p:sp>
-        <p:nvSpPr>
-          <p:cNvPr id="11" name="TextBox 10"/>
+              <a:t>The full cost is $6,024 a month; $2,924 of it is shared cost the grant doesn't pay for. Worth asking for as much of it as the funder allows at renewal.</a:t>
+            </a:r>
+          </a:p>
+        </p:txBody>
+      </p:sp>
+      <p:sp>
+        <p:nvSpPr>
+          <p:cNvPr id="13" name="TextBox 12"/>
           <p:cNvSpPr txBox="1"/>
           <p:nvPr/>
         </p:nvSpPr>
         <p:spPr>
           <a:xfrm>
             <a:off x="457200" y="6492240"/>
-            <a:ext cx="3657600" cy="274320"/>
+            <a:ext cx="2926080" cy="274320"/>
           </a:xfrm>
           <a:prstGeom prst="rect">
             <a:avLst/>
@@ -6173,7 +8339,7 @@
           <a:noFill/>
         </p:spPr>
         <p:txBody>
-          <a:bodyPr wrap="square">
+          <a:bodyPr wrap="square" lIns="45720" rIns="45720">
             <a:spAutoFit/>
           </a:bodyPr>
           <a:lstStyle/>
@@ -6197,14 +8363,14 @@
       </p:sp>
       <p:sp>
         <p:nvSpPr>
-          <p:cNvPr id="12" name="TextBox 11"/>
+          <p:cNvPr id="14" name="TextBox 13"/>
           <p:cNvSpPr txBox="1"/>
           <p:nvPr/>
         </p:nvSpPr>
         <p:spPr>
           <a:xfrm>
-            <a:off x="4297680" y="6492240"/>
-            <a:ext cx="3657600" cy="274320"/>
+            <a:off x="3108960" y="6492240"/>
+            <a:ext cx="5943600" cy="274320"/>
           </a:xfrm>
           <a:prstGeom prst="rect">
             <a:avLst/>
@@ -6212,7 +8378,7 @@
           <a:noFill/>
         </p:spPr>
         <p:txBody>
-          <a:bodyPr wrap="square">
+          <a:bodyPr wrap="square" lIns="45720" rIns="45720">
             <a:spAutoFit/>
           </a:bodyPr>
           <a:lstStyle/>
@@ -6229,14 +8395,14 @@
                 </a:solidFill>
                 <a:latin typeface="Roboto"/>
               </a:rPr>
-              <a:t>Data retrieved 2pm, Tue 6 Oct 2026 · Sample data</a:t>
-            </a:r>
-          </a:p>
-        </p:txBody>
-      </p:sp>
-      <p:sp>
-        <p:nvSpPr>
-          <p:cNvPr id="13" name="TextBox 12"/>
+              <a:t>Data retrieved 2pm, Tue 6 Oct 2026 · Generated 8 Oct 2026, 9:35am · Sample data · Made with Python (python-pptx)</a:t>
+            </a:r>
+          </a:p>
+        </p:txBody>
+      </p:sp>
+      <p:sp>
+        <p:nvSpPr>
+          <p:cNvPr id="15" name="TextBox 14"/>
           <p:cNvSpPr txBox="1"/>
           <p:nvPr/>
         </p:nvSpPr>
@@ -6251,7 +8417,7 @@
           <a:noFill/>
         </p:spPr>
         <p:txBody>
-          <a:bodyPr wrap="square">
+          <a:bodyPr wrap="square" lIns="45720" rIns="45720">
             <a:spAutoFit/>
           </a:bodyPr>
           <a:lstStyle/>
@@ -6268,1352 +8434,7 @@
                 </a:solidFill>
                 <a:latin typeface="Roboto"/>
               </a:rPr>
-              <a:t>Slide 6 of 9</a:t>
-            </a:r>
-          </a:p>
-        </p:txBody>
-      </p:sp>
-    </p:spTree>
-  </p:cSld>
-  <p:clrMapOvr>
-    <a:masterClrMapping/>
-  </p:clrMapOvr>
-</p:sld>
-</file>
-
-<file path=ppt/slides/slide7.xml><?xml version="1.0" encoding="utf-8"?>
-<p:sld xmlns:a="http://schemas.openxmlformats.org/drawingml/2006/main" xmlns:p="http://schemas.openxmlformats.org/presentationml/2006/main" xmlns:r="http://schemas.openxmlformats.org/officeDocument/2006/relationships">
-  <p:cSld>
-    <p:spTree>
-      <p:nvGrpSpPr>
-        <p:cNvPr id="1" name=""/>
-        <p:cNvGrpSpPr/>
-        <p:nvPr/>
-      </p:nvGrpSpPr>
-      <p:grpSpPr/>
-      <p:sp>
-        <p:nvSpPr>
-          <p:cNvPr id="2" name="Rectangle 1"/>
-          <p:cNvSpPr/>
-          <p:nvPr/>
-        </p:nvSpPr>
-        <p:spPr>
-          <a:xfrm>
-            <a:off x="0" y="0"/>
-            <a:ext cx="12191695" cy="73152"/>
-          </a:xfrm>
-          <a:prstGeom prst="rect">
-            <a:avLst/>
-          </a:prstGeom>
-          <a:solidFill>
-            <a:srgbClr val="2F7A5D"/>
-          </a:solidFill>
-          <a:ln>
-            <a:noFill/>
-          </a:ln>
-        </p:spPr>
-        <p:style>
-          <a:lnRef idx="1">
-            <a:schemeClr val="accent1"/>
-          </a:lnRef>
-          <a:fillRef idx="3">
-            <a:schemeClr val="accent1"/>
-          </a:fillRef>
-          <a:effectRef idx="2">
-            <a:schemeClr val="accent1"/>
-          </a:effectRef>
-          <a:fontRef idx="minor">
-            <a:schemeClr val="lt1"/>
-          </a:fontRef>
-        </p:style>
-        <p:txBody>
-          <a:bodyPr rtlCol="0" anchor="ctr"/>
-          <a:lstStyle/>
-          <a:p>
-            <a:pPr algn="ctr">
-              <a:defRPr>
-                <a:latin typeface="Roboto"/>
-              </a:defRPr>
-            </a:pPr>
-          </a:p>
-        </p:txBody>
-      </p:sp>
-      <p:sp>
-        <p:nvSpPr>
-          <p:cNvPr id="3" name="TextBox 2"/>
-          <p:cNvSpPr txBox="1"/>
-          <p:nvPr/>
-        </p:nvSpPr>
-        <p:spPr>
-          <a:xfrm>
-            <a:off x="457200" y="164592"/>
-            <a:ext cx="7315200" cy="274320"/>
-          </a:xfrm>
-          <a:prstGeom prst="rect">
-            <a:avLst/>
-          </a:prstGeom>
-          <a:noFill/>
-        </p:spPr>
-        <p:txBody>
-          <a:bodyPr wrap="square">
-            <a:spAutoFit/>
-          </a:bodyPr>
-          <a:lstStyle/>
-          <a:p>
-            <a:pPr>
-              <a:defRPr>
-                <a:latin typeface="Roboto"/>
-              </a:defRPr>
-            </a:pPr>
-            <a:r>
-              <a:rPr sz="1000" b="0">
-                <a:solidFill>
-                  <a:srgbClr val="5F6F63"/>
-                </a:solidFill>
-                <a:latin typeface="Roboto"/>
-              </a:rPr>
-              <a:t>Sample Community Services Ltd · What does each program really cost?</a:t>
-            </a:r>
-          </a:p>
-        </p:txBody>
-      </p:sp>
-      <p:sp>
-        <p:nvSpPr>
-          <p:cNvPr id="4" name="TextBox 3"/>
-          <p:cNvSpPr txBox="1"/>
-          <p:nvPr/>
-        </p:nvSpPr>
-        <p:spPr>
-          <a:xfrm>
-            <a:off x="457200" y="411480"/>
-            <a:ext cx="11247120" cy="548640"/>
-          </a:xfrm>
-          <a:prstGeom prst="rect">
-            <a:avLst/>
-          </a:prstGeom>
-          <a:noFill/>
-        </p:spPr>
-        <p:txBody>
-          <a:bodyPr wrap="square">
-            <a:spAutoFit/>
-          </a:bodyPr>
-          <a:lstStyle/>
-          <a:p>
-            <a:pPr>
-              <a:defRPr>
-                <a:latin typeface="Roboto"/>
-              </a:defRPr>
-            </a:pPr>
-            <a:r>
-              <a:rPr sz="2400" b="1">
-                <a:solidFill>
-                  <a:srgbClr val="25342A"/>
-                </a:solidFill>
-                <a:latin typeface="Roboto"/>
-              </a:rPr>
-              <a:t>What it shows · Program: Digital literacy</a:t>
-            </a:r>
-          </a:p>
-        </p:txBody>
-      </p:sp>
-      <p:sp>
-        <p:nvSpPr>
-          <p:cNvPr id="5" name="Rectangle 4"/>
-          <p:cNvSpPr/>
-          <p:nvPr/>
-        </p:nvSpPr>
-        <p:spPr>
-          <a:xfrm>
-            <a:off x="457200" y="1554480"/>
-            <a:ext cx="5501487" cy="4389120"/>
-          </a:xfrm>
-          <a:prstGeom prst="rect">
-            <a:avLst/>
-          </a:prstGeom>
-          <a:solidFill>
-            <a:srgbClr val="FFFFFF"/>
-          </a:solidFill>
-          <a:ln>
-            <a:solidFill>
-              <a:srgbClr val="DCE8DC"/>
-            </a:solidFill>
-          </a:ln>
-        </p:spPr>
-        <p:style>
-          <a:lnRef idx="1">
-            <a:schemeClr val="accent1"/>
-          </a:lnRef>
-          <a:fillRef idx="3">
-            <a:schemeClr val="accent1"/>
-          </a:fillRef>
-          <a:effectRef idx="2">
-            <a:schemeClr val="accent1"/>
-          </a:effectRef>
-          <a:fontRef idx="minor">
-            <a:schemeClr val="lt1"/>
-          </a:fontRef>
-        </p:style>
-        <p:txBody>
-          <a:bodyPr rtlCol="0" anchor="ctr"/>
-          <a:lstStyle/>
-          <a:p>
-            <a:pPr algn="ctr">
-              <a:defRPr>
-                <a:latin typeface="Roboto"/>
-              </a:defRPr>
-            </a:pPr>
-          </a:p>
-        </p:txBody>
-      </p:sp>
-      <p:sp>
-        <p:nvSpPr>
-          <p:cNvPr id="6" name="TextBox 5"/>
-          <p:cNvSpPr txBox="1"/>
-          <p:nvPr/>
-        </p:nvSpPr>
-        <p:spPr>
-          <a:xfrm>
-            <a:off x="685800" y="1691640"/>
-            <a:ext cx="5044287" cy="365760"/>
-          </a:xfrm>
-          <a:prstGeom prst="rect">
-            <a:avLst/>
-          </a:prstGeom>
-          <a:noFill/>
-        </p:spPr>
-        <p:txBody>
-          <a:bodyPr wrap="square">
-            <a:spAutoFit/>
-          </a:bodyPr>
-          <a:lstStyle/>
-          <a:p>
-            <a:pPr>
-              <a:defRPr>
-                <a:latin typeface="Roboto"/>
-              </a:defRPr>
-            </a:pPr>
-            <a:r>
-              <a:rPr sz="1100" b="1">
-                <a:solidFill>
-                  <a:srgbClr val="5F6F63"/>
-                </a:solidFill>
-                <a:latin typeface="Roboto"/>
-              </a:rPr>
-              <a:t>WHAT IT SHOWS</a:t>
-            </a:r>
-          </a:p>
-        </p:txBody>
-      </p:sp>
-      <p:sp>
-        <p:nvSpPr>
-          <p:cNvPr id="7" name="TextBox 6"/>
-          <p:cNvSpPr txBox="1"/>
-          <p:nvPr/>
-        </p:nvSpPr>
-        <p:spPr>
-          <a:xfrm>
-            <a:off x="685800" y="2103120"/>
-            <a:ext cx="5044287" cy="3749039"/>
-          </a:xfrm>
-          <a:prstGeom prst="rect">
-            <a:avLst/>
-          </a:prstGeom>
-          <a:noFill/>
-        </p:spPr>
-        <p:txBody>
-          <a:bodyPr wrap="square">
-            <a:spAutoFit/>
-          </a:bodyPr>
-          <a:lstStyle/>
-          <a:p>
-            <a:pPr>
-              <a:defRPr>
-                <a:latin typeface="Roboto"/>
-              </a:defRPr>
-            </a:pPr>
-            <a:r>
-              <a:rPr sz="1600" b="0">
-                <a:solidFill>
-                  <a:srgbClr val="25342A"/>
-                </a:solidFill>
-                <a:latin typeface="Roboto"/>
-              </a:rPr>
-              <a:t>Digital literacy cost $10,510 in full in February: $5,408 paid by the Philanthropic foundation grant, and $5,102 of shared costs no grant covers. It has spent 99.2% of its budget to date, with $65,200 left and 13 months to go.</a:t>
-            </a:r>
-          </a:p>
-        </p:txBody>
-      </p:sp>
-      <p:sp>
-        <p:nvSpPr>
-          <p:cNvPr id="8" name="Rectangle 7"/>
-          <p:cNvSpPr/>
-          <p:nvPr/>
-        </p:nvSpPr>
-        <p:spPr>
-          <a:xfrm>
-            <a:off x="6233007" y="1554480"/>
-            <a:ext cx="5501487" cy="4389120"/>
-          </a:xfrm>
-          <a:prstGeom prst="rect">
-            <a:avLst/>
-          </a:prstGeom>
-          <a:solidFill>
-            <a:srgbClr val="EEF5F0"/>
-          </a:solidFill>
-          <a:ln>
-            <a:solidFill>
-              <a:srgbClr val="DCE8DC"/>
-            </a:solidFill>
-          </a:ln>
-        </p:spPr>
-        <p:style>
-          <a:lnRef idx="1">
-            <a:schemeClr val="accent1"/>
-          </a:lnRef>
-          <a:fillRef idx="3">
-            <a:schemeClr val="accent1"/>
-          </a:fillRef>
-          <a:effectRef idx="2">
-            <a:schemeClr val="accent1"/>
-          </a:effectRef>
-          <a:fontRef idx="minor">
-            <a:schemeClr val="lt1"/>
-          </a:fontRef>
-        </p:style>
-        <p:txBody>
-          <a:bodyPr rtlCol="0" anchor="ctr"/>
-          <a:lstStyle/>
-          <a:p>
-            <a:pPr algn="ctr">
-              <a:defRPr>
-                <a:latin typeface="Roboto"/>
-              </a:defRPr>
-            </a:pPr>
-          </a:p>
-        </p:txBody>
-      </p:sp>
-      <p:sp>
-        <p:nvSpPr>
-          <p:cNvPr id="9" name="TextBox 8"/>
-          <p:cNvSpPr txBox="1"/>
-          <p:nvPr/>
-        </p:nvSpPr>
-        <p:spPr>
-          <a:xfrm>
-            <a:off x="6461607" y="1691640"/>
-            <a:ext cx="5044287" cy="365760"/>
-          </a:xfrm>
-          <a:prstGeom prst="rect">
-            <a:avLst/>
-          </a:prstGeom>
-          <a:noFill/>
-        </p:spPr>
-        <p:txBody>
-          <a:bodyPr wrap="square">
-            <a:spAutoFit/>
-          </a:bodyPr>
-          <a:lstStyle/>
-          <a:p>
-            <a:pPr>
-              <a:defRPr>
-                <a:latin typeface="Roboto"/>
-              </a:defRPr>
-            </a:pPr>
-            <a:r>
-              <a:rPr sz="1100" b="1">
-                <a:solidFill>
-                  <a:srgbClr val="5F6F63"/>
-                </a:solidFill>
-                <a:latin typeface="Roboto"/>
-              </a:rPr>
-              <a:t>WHAT YOU'D DO ABOUT IT</a:t>
-            </a:r>
-          </a:p>
-        </p:txBody>
-      </p:sp>
-      <p:sp>
-        <p:nvSpPr>
-          <p:cNvPr id="10" name="TextBox 9"/>
-          <p:cNvSpPr txBox="1"/>
-          <p:nvPr/>
-        </p:nvSpPr>
-        <p:spPr>
-          <a:xfrm>
-            <a:off x="6461607" y="2103120"/>
-            <a:ext cx="5044287" cy="3749039"/>
-          </a:xfrm>
-          <a:prstGeom prst="rect">
-            <a:avLst/>
-          </a:prstGeom>
-          <a:noFill/>
-        </p:spPr>
-        <p:txBody>
-          <a:bodyPr wrap="square">
-            <a:spAutoFit/>
-          </a:bodyPr>
-          <a:lstStyle/>
-          <a:p>
-            <a:pPr>
-              <a:defRPr>
-                <a:latin typeface="Roboto"/>
-              </a:defRPr>
-            </a:pPr>
-            <a:r>
-              <a:rPr sz="1600" b="0">
-                <a:solidFill>
-                  <a:srgbClr val="25342A"/>
-                </a:solidFill>
-                <a:latin typeface="Roboto"/>
-              </a:rPr>
-              <a:t>The full cost is $10,510 a month; $5,102 of it is shared cost the grant doesn't pay for. Worth asking for as much of it as the funder allows at renewal.</a:t>
-            </a:r>
-          </a:p>
-        </p:txBody>
-      </p:sp>
-      <p:sp>
-        <p:nvSpPr>
-          <p:cNvPr id="11" name="TextBox 10"/>
-          <p:cNvSpPr txBox="1"/>
-          <p:nvPr/>
-        </p:nvSpPr>
-        <p:spPr>
-          <a:xfrm>
-            <a:off x="457200" y="6492240"/>
-            <a:ext cx="3657600" cy="274320"/>
-          </a:xfrm>
-          <a:prstGeom prst="rect">
-            <a:avLst/>
-          </a:prstGeom>
-          <a:noFill/>
-        </p:spPr>
-        <p:txBody>
-          <a:bodyPr wrap="square">
-            <a:spAutoFit/>
-          </a:bodyPr>
-          <a:lstStyle/>
-          <a:p>
-            <a:pPr>
-              <a:defRPr>
-                <a:latin typeface="Roboto"/>
-              </a:defRPr>
-            </a:pPr>
-            <a:r>
-              <a:rPr sz="900" b="0">
-                <a:solidFill>
-                  <a:srgbClr val="5F6F63"/>
-                </a:solidFill>
-                <a:latin typeface="Roboto"/>
-              </a:rPr>
-              <a:t>program-cost.pptx</a:t>
-            </a:r>
-          </a:p>
-        </p:txBody>
-      </p:sp>
-      <p:sp>
-        <p:nvSpPr>
-          <p:cNvPr id="12" name="TextBox 11"/>
-          <p:cNvSpPr txBox="1"/>
-          <p:nvPr/>
-        </p:nvSpPr>
-        <p:spPr>
-          <a:xfrm>
-            <a:off x="4297680" y="6492240"/>
-            <a:ext cx="3657600" cy="274320"/>
-          </a:xfrm>
-          <a:prstGeom prst="rect">
-            <a:avLst/>
-          </a:prstGeom>
-          <a:noFill/>
-        </p:spPr>
-        <p:txBody>
-          <a:bodyPr wrap="square">
-            <a:spAutoFit/>
-          </a:bodyPr>
-          <a:lstStyle/>
-          <a:p>
-            <a:pPr algn="ctr">
-              <a:defRPr>
-                <a:latin typeface="Roboto"/>
-              </a:defRPr>
-            </a:pPr>
-            <a:r>
-              <a:rPr sz="900" b="0">
-                <a:solidFill>
-                  <a:srgbClr val="5F6F63"/>
-                </a:solidFill>
-                <a:latin typeface="Roboto"/>
-              </a:rPr>
-              <a:t>Data retrieved 2pm, Tue 6 Oct 2026 · Sample data</a:t>
-            </a:r>
-          </a:p>
-        </p:txBody>
-      </p:sp>
-      <p:sp>
-        <p:nvSpPr>
-          <p:cNvPr id="13" name="TextBox 12"/>
-          <p:cNvSpPr txBox="1"/>
-          <p:nvPr/>
-        </p:nvSpPr>
-        <p:spPr>
-          <a:xfrm>
-            <a:off x="8503920" y="6492240"/>
-            <a:ext cx="3200400" cy="274320"/>
-          </a:xfrm>
-          <a:prstGeom prst="rect">
-            <a:avLst/>
-          </a:prstGeom>
-          <a:noFill/>
-        </p:spPr>
-        <p:txBody>
-          <a:bodyPr wrap="square">
-            <a:spAutoFit/>
-          </a:bodyPr>
-          <a:lstStyle/>
-          <a:p>
-            <a:pPr algn="r">
-              <a:defRPr>
-                <a:latin typeface="Roboto"/>
-              </a:defRPr>
-            </a:pPr>
-            <a:r>
-              <a:rPr sz="900" b="0">
-                <a:solidFill>
-                  <a:srgbClr val="5F6F63"/>
-                </a:solidFill>
-                <a:latin typeface="Roboto"/>
-              </a:rPr>
-              <a:t>Slide 7 of 9</a:t>
-            </a:r>
-          </a:p>
-        </p:txBody>
-      </p:sp>
-    </p:spTree>
-  </p:cSld>
-  <p:clrMapOvr>
-    <a:masterClrMapping/>
-  </p:clrMapOvr>
-</p:sld>
-</file>
-
-<file path=ppt/slides/slide8.xml><?xml version="1.0" encoding="utf-8"?>
-<p:sld xmlns:a="http://schemas.openxmlformats.org/drawingml/2006/main" xmlns:p="http://schemas.openxmlformats.org/presentationml/2006/main" xmlns:r="http://schemas.openxmlformats.org/officeDocument/2006/relationships">
-  <p:cSld>
-    <p:spTree>
-      <p:nvGrpSpPr>
-        <p:cNvPr id="1" name=""/>
-        <p:cNvGrpSpPr/>
-        <p:nvPr/>
-      </p:nvGrpSpPr>
-      <p:grpSpPr/>
-      <p:sp>
-        <p:nvSpPr>
-          <p:cNvPr id="2" name="Rectangle 1"/>
-          <p:cNvSpPr/>
-          <p:nvPr/>
-        </p:nvSpPr>
-        <p:spPr>
-          <a:xfrm>
-            <a:off x="0" y="0"/>
-            <a:ext cx="12191695" cy="73152"/>
-          </a:xfrm>
-          <a:prstGeom prst="rect">
-            <a:avLst/>
-          </a:prstGeom>
-          <a:solidFill>
-            <a:srgbClr val="2F7A5D"/>
-          </a:solidFill>
-          <a:ln>
-            <a:noFill/>
-          </a:ln>
-        </p:spPr>
-        <p:style>
-          <a:lnRef idx="1">
-            <a:schemeClr val="accent1"/>
-          </a:lnRef>
-          <a:fillRef idx="3">
-            <a:schemeClr val="accent1"/>
-          </a:fillRef>
-          <a:effectRef idx="2">
-            <a:schemeClr val="accent1"/>
-          </a:effectRef>
-          <a:fontRef idx="minor">
-            <a:schemeClr val="lt1"/>
-          </a:fontRef>
-        </p:style>
-        <p:txBody>
-          <a:bodyPr rtlCol="0" anchor="ctr"/>
-          <a:lstStyle/>
-          <a:p>
-            <a:pPr algn="ctr">
-              <a:defRPr>
-                <a:latin typeface="Roboto"/>
-              </a:defRPr>
-            </a:pPr>
-          </a:p>
-        </p:txBody>
-      </p:sp>
-      <p:sp>
-        <p:nvSpPr>
-          <p:cNvPr id="3" name="TextBox 2"/>
-          <p:cNvSpPr txBox="1"/>
-          <p:nvPr/>
-        </p:nvSpPr>
-        <p:spPr>
-          <a:xfrm>
-            <a:off x="457200" y="164592"/>
-            <a:ext cx="7315200" cy="274320"/>
-          </a:xfrm>
-          <a:prstGeom prst="rect">
-            <a:avLst/>
-          </a:prstGeom>
-          <a:noFill/>
-        </p:spPr>
-        <p:txBody>
-          <a:bodyPr wrap="square">
-            <a:spAutoFit/>
-          </a:bodyPr>
-          <a:lstStyle/>
-          <a:p>
-            <a:pPr>
-              <a:defRPr>
-                <a:latin typeface="Roboto"/>
-              </a:defRPr>
-            </a:pPr>
-            <a:r>
-              <a:rPr sz="1000" b="0">
-                <a:solidFill>
-                  <a:srgbClr val="5F6F63"/>
-                </a:solidFill>
-                <a:latin typeface="Roboto"/>
-              </a:rPr>
-              <a:t>Sample Community Services Ltd · What does each program really cost?</a:t>
-            </a:r>
-          </a:p>
-        </p:txBody>
-      </p:sp>
-      <p:sp>
-        <p:nvSpPr>
-          <p:cNvPr id="4" name="TextBox 3"/>
-          <p:cNvSpPr txBox="1"/>
-          <p:nvPr/>
-        </p:nvSpPr>
-        <p:spPr>
-          <a:xfrm>
-            <a:off x="457200" y="411480"/>
-            <a:ext cx="11247120" cy="548640"/>
-          </a:xfrm>
-          <a:prstGeom prst="rect">
-            <a:avLst/>
-          </a:prstGeom>
-          <a:noFill/>
-        </p:spPr>
-        <p:txBody>
-          <a:bodyPr wrap="square">
-            <a:spAutoFit/>
-          </a:bodyPr>
-          <a:lstStyle/>
-          <a:p>
-            <a:pPr>
-              <a:defRPr>
-                <a:latin typeface="Roboto"/>
-              </a:defRPr>
-            </a:pPr>
-            <a:r>
-              <a:rPr sz="2400" b="1">
-                <a:solidFill>
-                  <a:srgbClr val="25342A"/>
-                </a:solidFill>
-                <a:latin typeface="Roboto"/>
-              </a:rPr>
-              <a:t>What it shows · Program: Community meals (2025-26)</a:t>
-            </a:r>
-          </a:p>
-        </p:txBody>
-      </p:sp>
-      <p:sp>
-        <p:nvSpPr>
-          <p:cNvPr id="5" name="Rectangle 4"/>
-          <p:cNvSpPr/>
-          <p:nvPr/>
-        </p:nvSpPr>
-        <p:spPr>
-          <a:xfrm>
-            <a:off x="457200" y="1554480"/>
-            <a:ext cx="5501487" cy="4389120"/>
-          </a:xfrm>
-          <a:prstGeom prst="rect">
-            <a:avLst/>
-          </a:prstGeom>
-          <a:solidFill>
-            <a:srgbClr val="FFFFFF"/>
-          </a:solidFill>
-          <a:ln>
-            <a:solidFill>
-              <a:srgbClr val="DCE8DC"/>
-            </a:solidFill>
-          </a:ln>
-        </p:spPr>
-        <p:style>
-          <a:lnRef idx="1">
-            <a:schemeClr val="accent1"/>
-          </a:lnRef>
-          <a:fillRef idx="3">
-            <a:schemeClr val="accent1"/>
-          </a:fillRef>
-          <a:effectRef idx="2">
-            <a:schemeClr val="accent1"/>
-          </a:effectRef>
-          <a:fontRef idx="minor">
-            <a:schemeClr val="lt1"/>
-          </a:fontRef>
-        </p:style>
-        <p:txBody>
-          <a:bodyPr rtlCol="0" anchor="ctr"/>
-          <a:lstStyle/>
-          <a:p>
-            <a:pPr algn="ctr">
-              <a:defRPr>
-                <a:latin typeface="Roboto"/>
-              </a:defRPr>
-            </a:pPr>
-          </a:p>
-        </p:txBody>
-      </p:sp>
-      <p:sp>
-        <p:nvSpPr>
-          <p:cNvPr id="6" name="TextBox 5"/>
-          <p:cNvSpPr txBox="1"/>
-          <p:nvPr/>
-        </p:nvSpPr>
-        <p:spPr>
-          <a:xfrm>
-            <a:off x="685800" y="1691640"/>
-            <a:ext cx="5044287" cy="365760"/>
-          </a:xfrm>
-          <a:prstGeom prst="rect">
-            <a:avLst/>
-          </a:prstGeom>
-          <a:noFill/>
-        </p:spPr>
-        <p:txBody>
-          <a:bodyPr wrap="square">
-            <a:spAutoFit/>
-          </a:bodyPr>
-          <a:lstStyle/>
-          <a:p>
-            <a:pPr>
-              <a:defRPr>
-                <a:latin typeface="Roboto"/>
-              </a:defRPr>
-            </a:pPr>
-            <a:r>
-              <a:rPr sz="1100" b="1">
-                <a:solidFill>
-                  <a:srgbClr val="5F6F63"/>
-                </a:solidFill>
-                <a:latin typeface="Roboto"/>
-              </a:rPr>
-              <a:t>WHAT IT SHOWS</a:t>
-            </a:r>
-          </a:p>
-        </p:txBody>
-      </p:sp>
-      <p:sp>
-        <p:nvSpPr>
-          <p:cNvPr id="7" name="TextBox 6"/>
-          <p:cNvSpPr txBox="1"/>
-          <p:nvPr/>
-        </p:nvSpPr>
-        <p:spPr>
-          <a:xfrm>
-            <a:off x="685800" y="2103120"/>
-            <a:ext cx="5044287" cy="3749039"/>
-          </a:xfrm>
-          <a:prstGeom prst="rect">
-            <a:avLst/>
-          </a:prstGeom>
-          <a:noFill/>
-        </p:spPr>
-        <p:txBody>
-          <a:bodyPr wrap="square">
-            <a:spAutoFit/>
-          </a:bodyPr>
-          <a:lstStyle/>
-          <a:p>
-            <a:pPr>
-              <a:defRPr>
-                <a:latin typeface="Roboto"/>
-              </a:defRPr>
-            </a:pPr>
-            <a:r>
-              <a:rPr sz="1600" b="0">
-                <a:solidFill>
-                  <a:srgbClr val="25342A"/>
-                </a:solidFill>
-                <a:latin typeface="Roboto"/>
-              </a:rPr>
-              <a:t>Community meals (2025-26) cost $6,024 in full in February: $3,100 paid by the Local council community grant grant, and $2,924 of shared costs no grant covers. It has spent 94.8% of its budget to date, with $16,200 left and 4 months to go.</a:t>
-            </a:r>
-          </a:p>
-        </p:txBody>
-      </p:sp>
-      <p:sp>
-        <p:nvSpPr>
-          <p:cNvPr id="8" name="Rectangle 7"/>
-          <p:cNvSpPr/>
-          <p:nvPr/>
-        </p:nvSpPr>
-        <p:spPr>
-          <a:xfrm>
-            <a:off x="6233007" y="1554480"/>
-            <a:ext cx="5501487" cy="4389120"/>
-          </a:xfrm>
-          <a:prstGeom prst="rect">
-            <a:avLst/>
-          </a:prstGeom>
-          <a:solidFill>
-            <a:srgbClr val="EEF5F0"/>
-          </a:solidFill>
-          <a:ln>
-            <a:solidFill>
-              <a:srgbClr val="DCE8DC"/>
-            </a:solidFill>
-          </a:ln>
-        </p:spPr>
-        <p:style>
-          <a:lnRef idx="1">
-            <a:schemeClr val="accent1"/>
-          </a:lnRef>
-          <a:fillRef idx="3">
-            <a:schemeClr val="accent1"/>
-          </a:fillRef>
-          <a:effectRef idx="2">
-            <a:schemeClr val="accent1"/>
-          </a:effectRef>
-          <a:fontRef idx="minor">
-            <a:schemeClr val="lt1"/>
-          </a:fontRef>
-        </p:style>
-        <p:txBody>
-          <a:bodyPr rtlCol="0" anchor="ctr"/>
-          <a:lstStyle/>
-          <a:p>
-            <a:pPr algn="ctr">
-              <a:defRPr>
-                <a:latin typeface="Roboto"/>
-              </a:defRPr>
-            </a:pPr>
-          </a:p>
-        </p:txBody>
-      </p:sp>
-      <p:sp>
-        <p:nvSpPr>
-          <p:cNvPr id="9" name="TextBox 8"/>
-          <p:cNvSpPr txBox="1"/>
-          <p:nvPr/>
-        </p:nvSpPr>
-        <p:spPr>
-          <a:xfrm>
-            <a:off x="6461607" y="1691640"/>
-            <a:ext cx="5044287" cy="365760"/>
-          </a:xfrm>
-          <a:prstGeom prst="rect">
-            <a:avLst/>
-          </a:prstGeom>
-          <a:noFill/>
-        </p:spPr>
-        <p:txBody>
-          <a:bodyPr wrap="square">
-            <a:spAutoFit/>
-          </a:bodyPr>
-          <a:lstStyle/>
-          <a:p>
-            <a:pPr>
-              <a:defRPr>
-                <a:latin typeface="Roboto"/>
-              </a:defRPr>
-            </a:pPr>
-            <a:r>
-              <a:rPr sz="1100" b="1">
-                <a:solidFill>
-                  <a:srgbClr val="5F6F63"/>
-                </a:solidFill>
-                <a:latin typeface="Roboto"/>
-              </a:rPr>
-              <a:t>WHAT YOU'D DO ABOUT IT</a:t>
-            </a:r>
-          </a:p>
-        </p:txBody>
-      </p:sp>
-      <p:sp>
-        <p:nvSpPr>
-          <p:cNvPr id="10" name="TextBox 9"/>
-          <p:cNvSpPr txBox="1"/>
-          <p:nvPr/>
-        </p:nvSpPr>
-        <p:spPr>
-          <a:xfrm>
-            <a:off x="6461607" y="2103120"/>
-            <a:ext cx="5044287" cy="3749039"/>
-          </a:xfrm>
-          <a:prstGeom prst="rect">
-            <a:avLst/>
-          </a:prstGeom>
-          <a:noFill/>
-        </p:spPr>
-        <p:txBody>
-          <a:bodyPr wrap="square">
-            <a:spAutoFit/>
-          </a:bodyPr>
-          <a:lstStyle/>
-          <a:p>
-            <a:pPr>
-              <a:defRPr>
-                <a:latin typeface="Roboto"/>
-              </a:defRPr>
-            </a:pPr>
-            <a:r>
-              <a:rPr sz="1600" b="0">
-                <a:solidFill>
-                  <a:srgbClr val="25342A"/>
-                </a:solidFill>
-                <a:latin typeface="Roboto"/>
-              </a:rPr>
-              <a:t>The full cost is $6,024 a month; $2,924 of it is shared cost the grant doesn't pay for. Worth asking for as much of it as the funder allows at renewal.</a:t>
-            </a:r>
-          </a:p>
-        </p:txBody>
-      </p:sp>
-      <p:sp>
-        <p:nvSpPr>
-          <p:cNvPr id="11" name="TextBox 10"/>
-          <p:cNvSpPr txBox="1"/>
-          <p:nvPr/>
-        </p:nvSpPr>
-        <p:spPr>
-          <a:xfrm>
-            <a:off x="457200" y="6492240"/>
-            <a:ext cx="3657600" cy="274320"/>
-          </a:xfrm>
-          <a:prstGeom prst="rect">
-            <a:avLst/>
-          </a:prstGeom>
-          <a:noFill/>
-        </p:spPr>
-        <p:txBody>
-          <a:bodyPr wrap="square">
-            <a:spAutoFit/>
-          </a:bodyPr>
-          <a:lstStyle/>
-          <a:p>
-            <a:pPr>
-              <a:defRPr>
-                <a:latin typeface="Roboto"/>
-              </a:defRPr>
-            </a:pPr>
-            <a:r>
-              <a:rPr sz="900" b="0">
-                <a:solidFill>
-                  <a:srgbClr val="5F6F63"/>
-                </a:solidFill>
-                <a:latin typeface="Roboto"/>
-              </a:rPr>
-              <a:t>program-cost.pptx</a:t>
-            </a:r>
-          </a:p>
-        </p:txBody>
-      </p:sp>
-      <p:sp>
-        <p:nvSpPr>
-          <p:cNvPr id="12" name="TextBox 11"/>
-          <p:cNvSpPr txBox="1"/>
-          <p:nvPr/>
-        </p:nvSpPr>
-        <p:spPr>
-          <a:xfrm>
-            <a:off x="4297680" y="6492240"/>
-            <a:ext cx="3657600" cy="274320"/>
-          </a:xfrm>
-          <a:prstGeom prst="rect">
-            <a:avLst/>
-          </a:prstGeom>
-          <a:noFill/>
-        </p:spPr>
-        <p:txBody>
-          <a:bodyPr wrap="square">
-            <a:spAutoFit/>
-          </a:bodyPr>
-          <a:lstStyle/>
-          <a:p>
-            <a:pPr algn="ctr">
-              <a:defRPr>
-                <a:latin typeface="Roboto"/>
-              </a:defRPr>
-            </a:pPr>
-            <a:r>
-              <a:rPr sz="900" b="0">
-                <a:solidFill>
-                  <a:srgbClr val="5F6F63"/>
-                </a:solidFill>
-                <a:latin typeface="Roboto"/>
-              </a:rPr>
-              <a:t>Data retrieved 2pm, Tue 6 Oct 2026 · Sample data</a:t>
-            </a:r>
-          </a:p>
-        </p:txBody>
-      </p:sp>
-      <p:sp>
-        <p:nvSpPr>
-          <p:cNvPr id="13" name="TextBox 12"/>
-          <p:cNvSpPr txBox="1"/>
-          <p:nvPr/>
-        </p:nvSpPr>
-        <p:spPr>
-          <a:xfrm>
-            <a:off x="8503920" y="6492240"/>
-            <a:ext cx="3200400" cy="274320"/>
-          </a:xfrm>
-          <a:prstGeom prst="rect">
-            <a:avLst/>
-          </a:prstGeom>
-          <a:noFill/>
-        </p:spPr>
-        <p:txBody>
-          <a:bodyPr wrap="square">
-            <a:spAutoFit/>
-          </a:bodyPr>
-          <a:lstStyle/>
-          <a:p>
-            <a:pPr algn="r">
-              <a:defRPr>
-                <a:latin typeface="Roboto"/>
-              </a:defRPr>
-            </a:pPr>
-            <a:r>
-              <a:rPr sz="900" b="0">
-                <a:solidFill>
-                  <a:srgbClr val="5F6F63"/>
-                </a:solidFill>
-                <a:latin typeface="Roboto"/>
-              </a:rPr>
-              <a:t>Slide 8 of 9</a:t>
-            </a:r>
-          </a:p>
-        </p:txBody>
-      </p:sp>
-    </p:spTree>
-  </p:cSld>
-  <p:clrMapOvr>
-    <a:masterClrMapping/>
-  </p:clrMapOvr>
-</p:sld>
-</file>
-
-<file path=ppt/slides/slide9.xml><?xml version="1.0" encoding="utf-8"?>
-<p:sld xmlns:a="http://schemas.openxmlformats.org/drawingml/2006/main" xmlns:p="http://schemas.openxmlformats.org/presentationml/2006/main" xmlns:r="http://schemas.openxmlformats.org/officeDocument/2006/relationships">
-  <p:cSld>
-    <p:spTree>
-      <p:nvGrpSpPr>
-        <p:cNvPr id="1" name=""/>
-        <p:cNvGrpSpPr/>
-        <p:nvPr/>
-      </p:nvGrpSpPr>
-      <p:grpSpPr/>
-      <p:sp>
-        <p:nvSpPr>
-          <p:cNvPr id="2" name="Rectangle 1"/>
-          <p:cNvSpPr/>
-          <p:nvPr/>
-        </p:nvSpPr>
-        <p:spPr>
-          <a:xfrm>
-            <a:off x="0" y="0"/>
-            <a:ext cx="12191695" cy="73152"/>
-          </a:xfrm>
-          <a:prstGeom prst="rect">
-            <a:avLst/>
-          </a:prstGeom>
-          <a:solidFill>
-            <a:srgbClr val="2F7A5D"/>
-          </a:solidFill>
-          <a:ln>
-            <a:noFill/>
-          </a:ln>
-        </p:spPr>
-        <p:style>
-          <a:lnRef idx="1">
-            <a:schemeClr val="accent1"/>
-          </a:lnRef>
-          <a:fillRef idx="3">
-            <a:schemeClr val="accent1"/>
-          </a:fillRef>
-          <a:effectRef idx="2">
-            <a:schemeClr val="accent1"/>
-          </a:effectRef>
-          <a:fontRef idx="minor">
-            <a:schemeClr val="lt1"/>
-          </a:fontRef>
-        </p:style>
-        <p:txBody>
-          <a:bodyPr rtlCol="0" anchor="ctr"/>
-          <a:lstStyle/>
-          <a:p>
-            <a:pPr algn="ctr">
-              <a:defRPr>
-                <a:latin typeface="Roboto"/>
-              </a:defRPr>
-            </a:pPr>
-          </a:p>
-        </p:txBody>
-      </p:sp>
-      <p:sp>
-        <p:nvSpPr>
-          <p:cNvPr id="3" name="TextBox 2"/>
-          <p:cNvSpPr txBox="1"/>
-          <p:nvPr/>
-        </p:nvSpPr>
-        <p:spPr>
-          <a:xfrm>
-            <a:off x="457200" y="164592"/>
-            <a:ext cx="7315200" cy="274320"/>
-          </a:xfrm>
-          <a:prstGeom prst="rect">
-            <a:avLst/>
-          </a:prstGeom>
-          <a:noFill/>
-        </p:spPr>
-        <p:txBody>
-          <a:bodyPr wrap="square">
-            <a:spAutoFit/>
-          </a:bodyPr>
-          <a:lstStyle/>
-          <a:p>
-            <a:pPr>
-              <a:defRPr>
-                <a:latin typeface="Roboto"/>
-              </a:defRPr>
-            </a:pPr>
-            <a:r>
-              <a:rPr sz="1000" b="0">
-                <a:solidFill>
-                  <a:srgbClr val="5F6F63"/>
-                </a:solidFill>
-                <a:latin typeface="Roboto"/>
-              </a:rPr>
-              <a:t>Sample Community Services Ltd · What does each program really cost?</a:t>
-            </a:r>
-          </a:p>
-        </p:txBody>
-      </p:sp>
-      <p:sp>
-        <p:nvSpPr>
-          <p:cNvPr id="4" name="TextBox 3"/>
-          <p:cNvSpPr txBox="1"/>
-          <p:nvPr/>
-        </p:nvSpPr>
-        <p:spPr>
-          <a:xfrm>
-            <a:off x="457200" y="411480"/>
-            <a:ext cx="11247120" cy="548640"/>
-          </a:xfrm>
-          <a:prstGeom prst="rect">
-            <a:avLst/>
-          </a:prstGeom>
-          <a:noFill/>
-        </p:spPr>
-        <p:txBody>
-          <a:bodyPr wrap="square">
-            <a:spAutoFit/>
-          </a:bodyPr>
-          <a:lstStyle/>
-          <a:p>
-            <a:pPr>
-              <a:defRPr>
-                <a:latin typeface="Roboto"/>
-              </a:defRPr>
-            </a:pPr>
-            <a:r>
-              <a:rPr sz="2400" b="1">
-                <a:solidFill>
-                  <a:srgbClr val="25342A"/>
-                </a:solidFill>
-                <a:latin typeface="Roboto"/>
-              </a:rPr>
-              <a:t>Grant spending, by month · Spend $ · Every program at once</a:t>
-            </a:r>
-          </a:p>
-        </p:txBody>
-      </p:sp>
-      <p:sp>
-        <p:nvSpPr>
-          <p:cNvPr id="5" name="TextBox 4"/>
-          <p:cNvSpPr txBox="1"/>
-          <p:nvPr/>
-        </p:nvSpPr>
-        <p:spPr>
-          <a:xfrm>
-            <a:off x="457200" y="960120"/>
-            <a:ext cx="11247120" cy="457200"/>
-          </a:xfrm>
-          <a:prstGeom prst="rect">
-            <a:avLst/>
-          </a:prstGeom>
-          <a:noFill/>
-        </p:spPr>
-        <p:txBody>
-          <a:bodyPr wrap="square">
-            <a:spAutoFit/>
-          </a:bodyPr>
-          <a:lstStyle/>
-          <a:p>
-            <a:pPr>
-              <a:defRPr>
-                <a:latin typeface="Roboto"/>
-              </a:defRPr>
-            </a:pPr>
-            <a:r>
-              <a:rPr sz="1200" b="0">
-                <a:solidFill>
-                  <a:srgbClr val="5F6F63"/>
-                </a:solidFill>
-                <a:latin typeface="Roboto"/>
-              </a:rPr>
-              <a:t>Grant spending only (the program's direct cost). All programs includes grants that have finished.</a:t>
-            </a:r>
-          </a:p>
-        </p:txBody>
-      </p:sp>
-      <p:graphicFrame>
-        <p:nvGraphicFramePr>
-          <p:cNvPr id="6" name="Chart 5"/>
-          <p:cNvGraphicFramePr>
-            <a:graphicFrameLocks noGrp="1"/>
-          </p:cNvGraphicFramePr>
-          <p:nvPr/>
-        </p:nvGraphicFramePr>
-        <p:xfrm>
-          <a:off x="457200" y="1463040"/>
-          <a:ext cx="11247120" cy="4754880"/>
-        </p:xfrm>
-        <a:graphic>
-          <a:graphicData uri="http://schemas.openxmlformats.org/drawingml/2006/chart">
-            <c:chart xmlns:c="http://schemas.openxmlformats.org/drawingml/2006/chart" r:id="rId2"/>
-          </a:graphicData>
-        </a:graphic>
-      </p:graphicFrame>
-      <p:sp>
-        <p:nvSpPr>
-          <p:cNvPr id="7" name="TextBox 6"/>
-          <p:cNvSpPr txBox="1"/>
-          <p:nvPr/>
-        </p:nvSpPr>
-        <p:spPr>
-          <a:xfrm>
-            <a:off x="457200" y="6492240"/>
-            <a:ext cx="3657600" cy="274320"/>
-          </a:xfrm>
-          <a:prstGeom prst="rect">
-            <a:avLst/>
-          </a:prstGeom>
-          <a:noFill/>
-        </p:spPr>
-        <p:txBody>
-          <a:bodyPr wrap="square">
-            <a:spAutoFit/>
-          </a:bodyPr>
-          <a:lstStyle/>
-          <a:p>
-            <a:pPr>
-              <a:defRPr>
-                <a:latin typeface="Roboto"/>
-              </a:defRPr>
-            </a:pPr>
-            <a:r>
-              <a:rPr sz="900" b="0">
-                <a:solidFill>
-                  <a:srgbClr val="5F6F63"/>
-                </a:solidFill>
-                <a:latin typeface="Roboto"/>
-              </a:rPr>
-              <a:t>program-cost.pptx</a:t>
-            </a:r>
-          </a:p>
-        </p:txBody>
-      </p:sp>
-      <p:sp>
-        <p:nvSpPr>
-          <p:cNvPr id="8" name="TextBox 7"/>
-          <p:cNvSpPr txBox="1"/>
-          <p:nvPr/>
-        </p:nvSpPr>
-        <p:spPr>
-          <a:xfrm>
-            <a:off x="4297680" y="6492240"/>
-            <a:ext cx="3657600" cy="274320"/>
-          </a:xfrm>
-          <a:prstGeom prst="rect">
-            <a:avLst/>
-          </a:prstGeom>
-          <a:noFill/>
-        </p:spPr>
-        <p:txBody>
-          <a:bodyPr wrap="square">
-            <a:spAutoFit/>
-          </a:bodyPr>
-          <a:lstStyle/>
-          <a:p>
-            <a:pPr algn="ctr">
-              <a:defRPr>
-                <a:latin typeface="Roboto"/>
-              </a:defRPr>
-            </a:pPr>
-            <a:r>
-              <a:rPr sz="900" b="0">
-                <a:solidFill>
-                  <a:srgbClr val="5F6F63"/>
-                </a:solidFill>
-                <a:latin typeface="Roboto"/>
-              </a:rPr>
-              <a:t>Data retrieved 2pm, Tue 6 Oct 2026 · Sample data</a:t>
-            </a:r>
-          </a:p>
-        </p:txBody>
-      </p:sp>
-      <p:sp>
-        <p:nvSpPr>
-          <p:cNvPr id="9" name="TextBox 8"/>
-          <p:cNvSpPr txBox="1"/>
-          <p:nvPr/>
-        </p:nvSpPr>
-        <p:spPr>
-          <a:xfrm>
-            <a:off x="8503920" y="6492240"/>
-            <a:ext cx="3200400" cy="274320"/>
-          </a:xfrm>
-          <a:prstGeom prst="rect">
-            <a:avLst/>
-          </a:prstGeom>
-          <a:noFill/>
-        </p:spPr>
-        <p:txBody>
-          <a:bodyPr wrap="square">
-            <a:spAutoFit/>
-          </a:bodyPr>
-          <a:lstStyle/>
-          <a:p>
-            <a:pPr algn="r">
-              <a:defRPr>
-                <a:latin typeface="Roboto"/>
-              </a:defRPr>
-            </a:pPr>
-            <a:r>
-              <a:rPr sz="900" b="0">
-                <a:solidFill>
-                  <a:srgbClr val="5F6F63"/>
-                </a:solidFill>
-                <a:latin typeface="Roboto"/>
-              </a:rPr>
-              <a:t>Slide 9 of 9</a:t>
+              <a:t>Slide 6 of 6</a:t>
             </a:r>
           </a:p>
         </p:txBody>
@@ -7627,6 +8448,326 @@
 </file>
 
 <file path=ppt/theme/theme1.xml><?xml version="1.0" encoding="utf-8"?>
+<a:theme xmlns:a="http://schemas.openxmlformats.org/drawingml/2006/main" name="Office Theme">
+  <a:themeElements>
+    <a:clrScheme name="Office">
+      <a:dk1>
+        <a:sysClr val="windowText" lastClr="000000"/>
+      </a:dk1>
+      <a:lt1>
+        <a:sysClr val="window" lastClr="FFFFFF"/>
+      </a:lt1>
+      <a:dk2>
+        <a:srgbClr val="25342A"/>
+      </a:dk2>
+      <a:lt2>
+        <a:srgbClr val="F4F7F2"/>
+      </a:lt2>
+      <a:accent1>
+        <a:srgbClr val="2F7A5D"/>
+      </a:accent1>
+      <a:accent2>
+        <a:srgbClr val="0E9F6E"/>
+      </a:accent2>
+      <a:accent3>
+        <a:srgbClr val="7D8790"/>
+      </a:accent3>
+      <a:accent4>
+        <a:srgbClr val="8A6D3B"/>
+      </a:accent4>
+      <a:accent5>
+        <a:srgbClr val="B42318"/>
+      </a:accent5>
+      <a:accent6>
+        <a:srgbClr val="8E9CAB"/>
+      </a:accent6>
+      <a:hlink>
+        <a:srgbClr val="0000FF"/>
+      </a:hlink>
+      <a:folHlink>
+        <a:srgbClr val="800080"/>
+      </a:folHlink>
+    </a:clrScheme>
+    <a:fontScheme name="Office">
+      <a:majorFont>
+        <a:latin typeface="Roboto"/>
+        <a:ea typeface=""/>
+        <a:cs typeface=""/>
+        <a:font script="Jpan" typeface="ＭＳ Ｐゴシック"/>
+        <a:font script="Hang" typeface="맑은 고딕"/>
+        <a:font script="Hans" typeface="宋体"/>
+        <a:font script="Hant" typeface="新細明體"/>
+        <a:font script="Arab" typeface="Times New Roman"/>
+        <a:font script="Hebr" typeface="Times New Roman"/>
+        <a:font script="Thai" typeface="Angsana New"/>
+        <a:font script="Ethi" typeface="Nyala"/>
+        <a:font script="Beng" typeface="Vrinda"/>
+        <a:font script="Gujr" typeface="Shruti"/>
+        <a:font script="Khmr" typeface="MoolBoran"/>
+        <a:font script="Knda" typeface="Tunga"/>
+        <a:font script="Guru" typeface="Raavi"/>
+        <a:font script="Cans" typeface="Euphemia"/>
+        <a:font script="Cher" typeface="Plantagenet Cherokee"/>
+        <a:font script="Yiii" typeface="Microsoft Yi Baiti"/>
+        <a:font script="Tibt" typeface="Microsoft Himalaya"/>
+        <a:font script="Thaa" typeface="MV Boli"/>
+        <a:font script="Deva" typeface="Mangal"/>
+        <a:font script="Telu" typeface="Gautami"/>
+        <a:font script="Taml" typeface="Latha"/>
+        <a:font script="Syrc" typeface="Estrangelo Edessa"/>
+        <a:font script="Orya" typeface="Kalinga"/>
+        <a:font script="Mlym" typeface="Kartika"/>
+        <a:font script="Laoo" typeface="DokChampa"/>
+        <a:font script="Sinh" typeface="Iskoola Pota"/>
+        <a:font script="Mong" typeface="Mongolian Baiti"/>
+        <a:font script="Viet" typeface="Times New Roman"/>
+        <a:font script="Uigh" typeface="Microsoft Uighur"/>
+        <a:font script="Geor" typeface="Sylfaen"/>
+      </a:majorFont>
+      <a:minorFont>
+        <a:latin typeface="Roboto"/>
+        <a:ea typeface=""/>
+        <a:cs typeface=""/>
+        <a:font script="Jpan" typeface="ＭＳ Ｐゴシック"/>
+        <a:font script="Hang" typeface="맑은 고딕"/>
+        <a:font script="Hans" typeface="宋体"/>
+        <a:font script="Hant" typeface="新細明體"/>
+        <a:font script="Arab" typeface="Arial"/>
+        <a:font script="Hebr" typeface="Arial"/>
+        <a:font script="Thai" typeface="Cordia New"/>
+        <a:font script="Ethi" typeface="Nyala"/>
+        <a:font script="Beng" typeface="Vrinda"/>
+        <a:font script="Gujr" typeface="Shruti"/>
+        <a:font script="Khmr" typeface="DaunPenh"/>
+        <a:font script="Knda" typeface="Tunga"/>
+        <a:font script="Guru" typeface="Raavi"/>
+        <a:font script="Cans" typeface="Euphemia"/>
+        <a:font script="Cher" typeface="Plantagenet Cherokee"/>
+        <a:font script="Yiii" typeface="Microsoft Yi Baiti"/>
+        <a:font script="Tibt" typeface="Microsoft Himalaya"/>
+        <a:font script="Thaa" typeface="MV Boli"/>
+        <a:font script="Deva" typeface="Mangal"/>
+        <a:font script="Telu" typeface="Gautami"/>
+        <a:font script="Taml" typeface="Latha"/>
+        <a:font script="Syrc" typeface="Estrangelo Edessa"/>
+        <a:font script="Orya" typeface="Kalinga"/>
+        <a:font script="Mlym" typeface="Kartika"/>
+        <a:font script="Laoo" typeface="DokChampa"/>
+        <a:font script="Sinh" typeface="Iskoola Pota"/>
+        <a:font script="Mong" typeface="Mongolian Baiti"/>
+        <a:font script="Viet" typeface="Arial"/>
+        <a:font script="Uigh" typeface="Microsoft Uighur"/>
+        <a:font script="Geor" typeface="Sylfaen"/>
+      </a:minorFont>
+    </a:fontScheme>
+    <a:fmtScheme name="Office">
+      <a:fillStyleLst>
+        <a:solidFill>
+          <a:schemeClr val="phClr"/>
+        </a:solidFill>
+        <a:gradFill rotWithShape="1">
+          <a:gsLst>
+            <a:gs pos="0">
+              <a:schemeClr val="phClr">
+                <a:tint val="50000"/>
+                <a:satMod val="300000"/>
+              </a:schemeClr>
+            </a:gs>
+            <a:gs pos="35000">
+              <a:schemeClr val="phClr">
+                <a:tint val="37000"/>
+                <a:satMod val="300000"/>
+              </a:schemeClr>
+            </a:gs>
+            <a:gs pos="100000">
+              <a:schemeClr val="phClr">
+                <a:tint val="15000"/>
+                <a:satMod val="350000"/>
+              </a:schemeClr>
+            </a:gs>
+          </a:gsLst>
+          <a:lin ang="16200000" scaled="1"/>
+        </a:gradFill>
+        <a:gradFill rotWithShape="1">
+          <a:gsLst>
+            <a:gs pos="0">
+              <a:schemeClr val="phClr">
+                <a:tint val="100000"/>
+                <a:shade val="100000"/>
+                <a:satMod val="130000"/>
+              </a:schemeClr>
+            </a:gs>
+            <a:gs pos="100000">
+              <a:schemeClr val="phClr">
+                <a:tint val="50000"/>
+                <a:shade val="100000"/>
+                <a:satMod val="350000"/>
+              </a:schemeClr>
+            </a:gs>
+          </a:gsLst>
+          <a:lin ang="16200000" scaled="0"/>
+        </a:gradFill>
+      </a:fillStyleLst>
+      <a:lnStyleLst>
+        <a:ln w="9525" cap="flat" cmpd="sng" algn="ctr">
+          <a:solidFill>
+            <a:schemeClr val="phClr">
+              <a:shade val="95000"/>
+              <a:satMod val="105000"/>
+            </a:schemeClr>
+          </a:solidFill>
+          <a:prstDash val="solid"/>
+        </a:ln>
+        <a:ln w="25400" cap="flat" cmpd="sng" algn="ctr">
+          <a:solidFill>
+            <a:schemeClr val="phClr"/>
+          </a:solidFill>
+          <a:prstDash val="solid"/>
+        </a:ln>
+        <a:ln w="38100" cap="flat" cmpd="sng" algn="ctr">
+          <a:solidFill>
+            <a:schemeClr val="phClr"/>
+          </a:solidFill>
+          <a:prstDash val="solid"/>
+        </a:ln>
+      </a:lnStyleLst>
+      <a:effectStyleLst>
+        <a:effectStyle>
+          <a:effectLst>
+            <a:outerShdw blurRad="40000" dist="20000" dir="5400000" rotWithShape="0">
+              <a:srgbClr val="000000">
+                <a:alpha val="38000"/>
+              </a:srgbClr>
+            </a:outerShdw>
+          </a:effectLst>
+        </a:effectStyle>
+        <a:effectStyle>
+          <a:effectLst>
+            <a:outerShdw blurRad="40000" dist="23000" dir="5400000" rotWithShape="0">
+              <a:srgbClr val="000000">
+                <a:alpha val="35000"/>
+              </a:srgbClr>
+            </a:outerShdw>
+          </a:effectLst>
+        </a:effectStyle>
+        <a:effectStyle>
+          <a:effectLst>
+            <a:outerShdw blurRad="40000" dist="23000" dir="5400000" rotWithShape="0">
+              <a:srgbClr val="000000">
+                <a:alpha val="35000"/>
+              </a:srgbClr>
+            </a:outerShdw>
+          </a:effectLst>
+          <a:scene3d>
+            <a:camera prst="orthographicFront">
+              <a:rot lat="0" lon="0" rev="0"/>
+            </a:camera>
+            <a:lightRig rig="threePt" dir="t">
+              <a:rot lat="0" lon="0" rev="1200000"/>
+            </a:lightRig>
+          </a:scene3d>
+          <a:sp3d>
+            <a:bevelT w="63500" h="25400"/>
+          </a:sp3d>
+        </a:effectStyle>
+      </a:effectStyleLst>
+      <a:bgFillStyleLst>
+        <a:solidFill>
+          <a:schemeClr val="phClr"/>
+        </a:solidFill>
+        <a:gradFill rotWithShape="1">
+          <a:gsLst>
+            <a:gs pos="0">
+              <a:schemeClr val="phClr">
+                <a:tint val="40000"/>
+                <a:satMod val="350000"/>
+              </a:schemeClr>
+            </a:gs>
+            <a:gs pos="40000">
+              <a:schemeClr val="phClr">
+                <a:tint val="45000"/>
+                <a:shade val="99000"/>
+                <a:satMod val="350000"/>
+              </a:schemeClr>
+            </a:gs>
+            <a:gs pos="100000">
+              <a:schemeClr val="phClr">
+                <a:shade val="20000"/>
+                <a:satMod val="255000"/>
+              </a:schemeClr>
+            </a:gs>
+          </a:gsLst>
+          <a:path path="circle">
+            <a:fillToRect l="50000" t="-80000" r="50000" b="180000"/>
+          </a:path>
+        </a:gradFill>
+        <a:gradFill rotWithShape="1">
+          <a:gsLst>
+            <a:gs pos="0">
+              <a:schemeClr val="phClr">
+                <a:tint val="80000"/>
+                <a:satMod val="300000"/>
+              </a:schemeClr>
+            </a:gs>
+            <a:gs pos="100000">
+              <a:schemeClr val="phClr">
+                <a:shade val="30000"/>
+                <a:satMod val="200000"/>
+              </a:schemeClr>
+            </a:gs>
+          </a:gsLst>
+          <a:path path="circle">
+            <a:fillToRect l="50000" t="50000" r="50000" b="50000"/>
+          </a:path>
+        </a:gradFill>
+      </a:bgFillStyleLst>
+    </a:fmtScheme>
+  </a:themeElements>
+  <a:objectDefaults>
+    <a:spDef>
+      <a:spPr/>
+      <a:bodyPr/>
+      <a:lstStyle/>
+      <a:style>
+        <a:lnRef idx="1">
+          <a:schemeClr val="accent1"/>
+        </a:lnRef>
+        <a:fillRef idx="3">
+          <a:schemeClr val="accent1"/>
+        </a:fillRef>
+        <a:effectRef idx="2">
+          <a:schemeClr val="accent1"/>
+        </a:effectRef>
+        <a:fontRef idx="minor">
+          <a:schemeClr val="lt1"/>
+        </a:fontRef>
+      </a:style>
+    </a:spDef>
+    <a:lnDef>
+      <a:spPr/>
+      <a:bodyPr/>
+      <a:lstStyle/>
+      <a:style>
+        <a:lnRef idx="2">
+          <a:schemeClr val="accent1"/>
+        </a:lnRef>
+        <a:fillRef idx="0">
+          <a:schemeClr val="accent1"/>
+        </a:fillRef>
+        <a:effectRef idx="1">
+          <a:schemeClr val="accent1"/>
+        </a:effectRef>
+        <a:fontRef idx="minor">
+          <a:schemeClr val="tx1"/>
+        </a:fontRef>
+      </a:style>
+    </a:lnDef>
+  </a:objectDefaults>
+  <a:extraClrSchemeLst/>
+</a:theme>
+</file>
+
+<file path=ppt/theme/theme2.xml><?xml version="1.0" encoding="utf-8"?>
 <a:theme xmlns:a="http://schemas.openxmlformats.org/drawingml/2006/main" name="Office Theme">
   <a:themeElements>
     <a:clrScheme name="Office">

--- a/media/exports/reports/2026-02/program-cost.pptx
+++ b/media/exports/reports/2026-02/program-cost.pptx
@@ -1785,7 +1785,7 @@
           <a:lstStyle/>
           <a:p>
             <a:r>
-              <a:t>What does each program really cost?. Sample Community Services Ltd. Period: February 2026. Each program's full cost: what its grant pays for, plus its fair share of the costs no single grant covers (untied program costs and administration, shared by grant spending). Pick a program and every chart and note follows it.</a:t>
+              <a:t>What does each program really cost?. Sample Community Services Ltd. Period: February 2026. In short: Housing support costs $51,514 in full in February: $25,006 more than its grant spending, once its share of shared costs is added. Each program's full cost: what its grant pays for, plus its fair share of the costs no single grant covers (untied program costs and administration, shared by grant spending). Pick a program and every chart and note follows it.</a:t>
             </a:r>
           </a:p>
         </p:txBody>
@@ -5360,7 +5360,7 @@
         <p:spPr>
           <a:xfrm>
             <a:off x="457200" y="3703320"/>
-            <a:ext cx="11277295" cy="535940"/>
+            <a:ext cx="11277295" cy="980440"/>
           </a:xfrm>
           <a:prstGeom prst="rect">
             <a:avLst/>
@@ -5385,7 +5385,7 @@
                 </a:solidFill>
                 <a:latin typeface="Roboto"/>
               </a:rPr>
-              <a:t>Period: February 2026. Each program's full cost: what its grant pays for, plus its fair share of the costs no single grant covers (untied program costs and administration, shared by grant spending). Pick a program and every chart and note follows it.</a:t>
+              <a:t>Period: February 2026. In short: Housing support costs $51,514 in full in February: $25,006 more than its grant spending, once its share of shared costs is added. Each program's full cost: what its grant pays for, plus its fair share of the costs no single grant covers (untied program costs and administration, shared by grant spending). Pick a program and every chart and note follows it.</a:t>
             </a:r>
           </a:p>
         </p:txBody>
@@ -5398,7 +5398,7 @@
         </p:nvSpPr>
         <p:spPr>
           <a:xfrm>
-            <a:off x="457200" y="4330700"/>
+            <a:off x="457200" y="4775200"/>
             <a:ext cx="11277295" cy="1097280"/>
           </a:xfrm>
           <a:prstGeom prst="rect">
@@ -5550,7 +5550,7 @@
                 </a:solidFill>
                 <a:latin typeface="Roboto"/>
               </a:rPr>
-              <a:t>Data retrieved 2pm, Tue 6 Oct 2026 · Generated 8 Oct 2026, 9:35am · Sample data · Made with Python (python-pptx)</a:t>
+              <a:t>Data retrieved 2pm, Tue 6 Oct 2026 · Generated 10 Oct 2026, 9:55pm · Sample data · Made with Python (python-pptx)</a:t>
             </a:r>
           </a:p>
         </p:txBody>
@@ -6119,7 +6119,7 @@
                 </a:solidFill>
                 <a:latin typeface="Roboto"/>
               </a:rPr>
-              <a:t>Data retrieved 2pm, Tue 6 Oct 2026 · Generated 8 Oct 2026, 9:35am · Sample data · Made with Python (python-pptx)</a:t>
+              <a:t>Data retrieved 2pm, Tue 6 Oct 2026 · Generated 10 Oct 2026, 9:55pm · Sample data · Made with Python (python-pptx)</a:t>
             </a:r>
           </a:p>
         </p:txBody>
@@ -6688,7 +6688,7 @@
                 </a:solidFill>
                 <a:latin typeface="Roboto"/>
               </a:rPr>
-              <a:t>Data retrieved 2pm, Tue 6 Oct 2026 · Generated 8 Oct 2026, 9:35am · Sample data · Made with Python (python-pptx)</a:t>
+              <a:t>Data retrieved 2pm, Tue 6 Oct 2026 · Generated 10 Oct 2026, 9:55pm · Sample data · Made with Python (python-pptx)</a:t>
             </a:r>
           </a:p>
         </p:txBody>
@@ -7257,7 +7257,7 @@
                 </a:solidFill>
                 <a:latin typeface="Roboto"/>
               </a:rPr>
-              <a:t>Data retrieved 2pm, Tue 6 Oct 2026 · Generated 8 Oct 2026, 9:35am · Sample data · Made with Python (python-pptx)</a:t>
+              <a:t>Data retrieved 2pm, Tue 6 Oct 2026 · Generated 10 Oct 2026, 9:55pm · Sample data · Made with Python (python-pptx)</a:t>
             </a:r>
           </a:p>
         </p:txBody>
@@ -7826,7 +7826,7 @@
                 </a:solidFill>
                 <a:latin typeface="Roboto"/>
               </a:rPr>
-              <a:t>Data retrieved 2pm, Tue 6 Oct 2026 · Generated 8 Oct 2026, 9:35am · Sample data · Made with Python (python-pptx)</a:t>
+              <a:t>Data retrieved 2pm, Tue 6 Oct 2026 · Generated 10 Oct 2026, 9:55pm · Sample data · Made with Python (python-pptx)</a:t>
             </a:r>
           </a:p>
         </p:txBody>
@@ -8395,7 +8395,7 @@
                 </a:solidFill>
                 <a:latin typeface="Roboto"/>
               </a:rPr>
-              <a:t>Data retrieved 2pm, Tue 6 Oct 2026 · Generated 8 Oct 2026, 9:35am · Sample data · Made with Python (python-pptx)</a:t>
+              <a:t>Data retrieved 2pm, Tue 6 Oct 2026 · Generated 10 Oct 2026, 9:55pm · Sample data · Made with Python (python-pptx)</a:t>
             </a:r>
           </a:p>
         </p:txBody>
